--- a/paper/Knowledge_engineering_slides.pptx
+++ b/paper/Knowledge_engineering_slides.pptx
@@ -6,6 +6,7 @@
   </p:sldMasterIdLst>
   <p:sldIdLst>
     <p:sldId id="256" r:id="rId2"/>
+    <p:sldId id="278" r:id="rId24"/>
     <p:sldId id="257" r:id="rId3"/>
     <p:sldId id="258" r:id="rId4"/>
     <p:sldId id="259" r:id="rId5"/>
@@ -3881,7 +3882,7 @@
                 </a:solidFill>
                 <a:latin typeface="Calibri"/>
               </a:rPr>
-              <a:t>13 / 19</a:t>
+              <a:t>11 / 19</a:t>
             </a:r>
           </a:p>
         </p:txBody>
@@ -4350,7 +4351,7 @@
                 </a:solidFill>
                 <a:latin typeface="Calibri"/>
               </a:rPr>
-              <a:t>14 / 19</a:t>
+              <a:t>12 / 19</a:t>
             </a:r>
           </a:p>
         </p:txBody>
@@ -5353,7 +5354,7 @@
                 </a:solidFill>
                 <a:latin typeface="Calibri"/>
               </a:rPr>
-              <a:t>15 / 19</a:t>
+              <a:t>13 / 19</a:t>
             </a:r>
           </a:p>
         </p:txBody>
@@ -5680,7 +5681,7 @@
                 </a:solidFill>
                 <a:latin typeface="Calibri"/>
               </a:rPr>
-              <a:t>16 / 19</a:t>
+              <a:t>14 / 19</a:t>
             </a:r>
           </a:p>
         </p:txBody>
@@ -5873,7 +5874,7 @@
                 </a:solidFill>
                 <a:latin typeface="Calibri"/>
               </a:rPr>
-              <a:t>16 / 19</a:t>
+              <a:t>15 / 19</a:t>
             </a:r>
           </a:p>
         </p:txBody>
@@ -6488,7 +6489,7 @@
         </p:nvSpPr>
         <p:spPr>
           <a:xfrm>
-            <a:off x="4317558" y="4425367"/>
+            <a:off x="2178658" y="6138669"/>
             <a:ext cx="889795" cy="369332"/>
           </a:xfrm>
           <a:prstGeom prst="rect">
@@ -6892,7 +6893,7 @@
                 </a:solidFill>
                 <a:latin typeface="Calibri"/>
               </a:rPr>
-              <a:t>16 / 19</a:t>
+              <a:t>17 / 19</a:t>
             </a:r>
           </a:p>
         </p:txBody>
@@ -7677,6 +7678,978 @@
 </p:sld>
 </file>
 
+<file path=ppt/slides/slide19.xml><?xml version="1.0" encoding="utf-8"?>
+<p:sld xmlns:a="http://schemas.openxmlformats.org/drawingml/2006/main" xmlns:p="http://schemas.openxmlformats.org/presentationml/2006/main" xmlns:r="http://schemas.openxmlformats.org/officeDocument/2006/relationships">
+  <p:cSld>
+    <p:spTree>
+      <p:nvGrpSpPr>
+        <p:cNvPr id="1" name=""/>
+        <p:cNvGrpSpPr/>
+        <p:nvPr/>
+      </p:nvGrpSpPr>
+      <p:grpSpPr/>
+      <p:sp>
+        <p:nvSpPr>
+          <p:cNvPr id="2" name="Rectangle 1"/>
+          <p:cNvSpPr/>
+          <p:nvPr/>
+        </p:nvSpPr>
+        <p:spPr>
+          <a:xfrm>
+            <a:off x="0" y="0"/>
+            <a:ext cx="12192000" cy="164592"/>
+          </a:xfrm>
+          <a:prstGeom prst="rect">
+            <a:avLst/>
+          </a:prstGeom>
+          <a:solidFill>
+            <a:srgbClr val="1F3A5F"/>
+          </a:solidFill>
+          <a:ln>
+            <a:noFill/>
+          </a:ln>
+        </p:spPr>
+        <p:style>
+          <a:lnRef idx="1">
+            <a:schemeClr val="accent1"/>
+          </a:lnRef>
+          <a:fillRef idx="3">
+            <a:schemeClr val="accent1"/>
+          </a:fillRef>
+          <a:effectRef idx="2">
+            <a:schemeClr val="accent1"/>
+          </a:effectRef>
+          <a:fontRef idx="minor">
+            <a:schemeClr val="lt1"/>
+          </a:fontRef>
+        </p:style>
+        <p:txBody>
+          <a:bodyPr rtlCol="0" anchor="ctr"/>
+          <a:lstStyle/>
+          <a:p>
+            <a:pPr algn="ctr"/>
+          </a:p>
+        </p:txBody>
+      </p:sp>
+      <p:sp>
+        <p:nvSpPr>
+          <p:cNvPr id="3" name="TextBox 2"/>
+          <p:cNvSpPr txBox="1"/>
+          <p:nvPr/>
+        </p:nvSpPr>
+        <p:spPr>
+          <a:xfrm>
+            <a:off x="502920" y="384048"/>
+            <a:ext cx="10972800" cy="365760"/>
+          </a:xfrm>
+          <a:prstGeom prst="rect">
+            <a:avLst/>
+          </a:prstGeom>
+          <a:noFill/>
+        </p:spPr>
+        <p:txBody>
+          <a:bodyPr wrap="none" lIns="0">
+            <a:spAutoFit/>
+          </a:bodyPr>
+          <a:lstStyle/>
+          <a:p>
+            <a:r>
+              <a:rPr sz="1100" b="1">
+                <a:solidFill>
+                  <a:srgbClr val="C9A227"/>
+                </a:solidFill>
+                <a:latin typeface="Calibri"/>
+              </a:rPr>
+              <a:t>CONTENTS</a:t>
+            </a:r>
+          </a:p>
+        </p:txBody>
+      </p:sp>
+      <p:sp>
+        <p:nvSpPr>
+          <p:cNvPr id="4" name="TextBox 3"/>
+          <p:cNvSpPr txBox="1"/>
+          <p:nvPr/>
+        </p:nvSpPr>
+        <p:spPr>
+          <a:xfrm>
+            <a:off x="457200" y="713232"/>
+            <a:ext cx="11247120" cy="822960"/>
+          </a:xfrm>
+          <a:prstGeom prst="rect">
+            <a:avLst/>
+          </a:prstGeom>
+          <a:noFill/>
+        </p:spPr>
+        <p:txBody>
+          <a:bodyPr wrap="none">
+            <a:spAutoFit/>
+          </a:bodyPr>
+          <a:lstStyle/>
+          <a:p>
+            <a:r>
+              <a:rPr sz="3000" b="1">
+                <a:solidFill>
+                  <a:srgbClr val="1F3A5F"/>
+                </a:solidFill>
+                <a:latin typeface="Calibri"/>
+              </a:rPr>
+              <a:t>Table of Contents</a:t>
+            </a:r>
+          </a:p>
+        </p:txBody>
+      </p:sp>
+      <p:sp>
+        <p:nvSpPr>
+          <p:cNvPr id="5" name="Rectangle 4"/>
+          <p:cNvSpPr/>
+          <p:nvPr/>
+        </p:nvSpPr>
+        <p:spPr>
+          <a:xfrm>
+            <a:off x="502920" y="1508760"/>
+            <a:ext cx="548640" cy="54864"/>
+          </a:xfrm>
+          <a:prstGeom prst="rect">
+            <a:avLst/>
+          </a:prstGeom>
+          <a:solidFill>
+            <a:srgbClr val="C9A227"/>
+          </a:solidFill>
+          <a:ln>
+            <a:noFill/>
+          </a:ln>
+        </p:spPr>
+        <p:style>
+          <a:lnRef idx="1">
+            <a:schemeClr val="accent1"/>
+          </a:lnRef>
+          <a:fillRef idx="3">
+            <a:schemeClr val="accent1"/>
+          </a:fillRef>
+          <a:effectRef idx="2">
+            <a:schemeClr val="accent1"/>
+          </a:effectRef>
+          <a:fontRef idx="minor">
+            <a:schemeClr val="lt1"/>
+          </a:fontRef>
+        </p:style>
+        <p:txBody>
+          <a:bodyPr rtlCol="0" anchor="ctr"/>
+          <a:lstStyle/>
+          <a:p>
+            <a:pPr algn="ctr"/>
+          </a:p>
+        </p:txBody>
+      </p:sp>
+      <p:sp>
+        <p:nvSpPr>
+          <p:cNvPr id="6" name="TextBox 5"/>
+          <p:cNvSpPr txBox="1"/>
+          <p:nvPr/>
+        </p:nvSpPr>
+        <p:spPr>
+          <a:xfrm>
+            <a:off x="548640" y="1828800"/>
+            <a:ext cx="5486400" cy="384048"/>
+          </a:xfrm>
+          <a:prstGeom prst="rect">
+            <a:avLst/>
+          </a:prstGeom>
+          <a:noFill/>
+        </p:spPr>
+        <p:txBody>
+          <a:bodyPr wrap="none" lIns="0" rIns="0" tIns="38100" bIns="38100">
+            <a:spAutoFit/>
+          </a:bodyPr>
+          <a:lstStyle/>
+          <a:p>
+            <a:r>
+              <a:rPr sz="1500" b="1">
+                <a:solidFill>
+                  <a:srgbClr val="C9A227"/>
+                </a:solidFill>
+                <a:latin typeface="Calibri"/>
+              </a:rPr>
+              <a:t> 3.</a:t>
+            </a:r>
+            <a:r>
+              <a:rPr sz="1500">
+                <a:solidFill>
+                  <a:srgbClr val="1A1A1A"/>
+                </a:solidFill>
+                <a:latin typeface="Calibri"/>
+              </a:rPr>
+              <a:t>   The Problem</a:t>
+            </a:r>
+          </a:p>
+        </p:txBody>
+      </p:sp>
+      <p:sp>
+        <p:nvSpPr>
+          <p:cNvPr id="7" name="TextBox 6"/>
+          <p:cNvSpPr txBox="1"/>
+          <p:nvPr/>
+        </p:nvSpPr>
+        <p:spPr>
+          <a:xfrm>
+            <a:off x="548640" y="2212848"/>
+            <a:ext cx="5486400" cy="384048"/>
+          </a:xfrm>
+          <a:prstGeom prst="rect">
+            <a:avLst/>
+          </a:prstGeom>
+          <a:noFill/>
+        </p:spPr>
+        <p:txBody>
+          <a:bodyPr wrap="none" lIns="0" rIns="0" tIns="38100" bIns="38100">
+            <a:spAutoFit/>
+          </a:bodyPr>
+          <a:lstStyle/>
+          <a:p>
+            <a:r>
+              <a:rPr sz="1500" b="1">
+                <a:solidFill>
+                  <a:srgbClr val="C9A227"/>
+                </a:solidFill>
+                <a:latin typeface="Calibri"/>
+              </a:rPr>
+              <a:t> 4.</a:t>
+            </a:r>
+            <a:r>
+              <a:rPr sz="1500">
+                <a:solidFill>
+                  <a:srgbClr val="1A1A1A"/>
+                </a:solidFill>
+                <a:latin typeface="Calibri"/>
+              </a:rPr>
+              <a:t>   A Short History</a:t>
+            </a:r>
+          </a:p>
+        </p:txBody>
+      </p:sp>
+      <p:sp>
+        <p:nvSpPr>
+          <p:cNvPr id="8" name="TextBox 7"/>
+          <p:cNvSpPr txBox="1"/>
+          <p:nvPr/>
+        </p:nvSpPr>
+        <p:spPr>
+          <a:xfrm>
+            <a:off x="548640" y="2596896"/>
+            <a:ext cx="5486400" cy="384048"/>
+          </a:xfrm>
+          <a:prstGeom prst="rect">
+            <a:avLst/>
+          </a:prstGeom>
+          <a:noFill/>
+        </p:spPr>
+        <p:txBody>
+          <a:bodyPr wrap="none" lIns="0" rIns="0" tIns="38100" bIns="38100">
+            <a:spAutoFit/>
+          </a:bodyPr>
+          <a:lstStyle/>
+          <a:p>
+            <a:r>
+              <a:rPr sz="1500" b="1">
+                <a:solidFill>
+                  <a:srgbClr val="C9A227"/>
+                </a:solidFill>
+                <a:latin typeface="Calibri"/>
+              </a:rPr>
+              <a:t> 5.</a:t>
+            </a:r>
+            <a:r>
+              <a:rPr sz="1500">
+                <a:solidFill>
+                  <a:srgbClr val="1A1A1A"/>
+                </a:solidFill>
+                <a:latin typeface="Calibri"/>
+              </a:rPr>
+              <a:t>   Project Goals</a:t>
+            </a:r>
+          </a:p>
+        </p:txBody>
+      </p:sp>
+      <p:sp>
+        <p:nvSpPr>
+          <p:cNvPr id="9" name="TextBox 8"/>
+          <p:cNvSpPr txBox="1"/>
+          <p:nvPr/>
+        </p:nvSpPr>
+        <p:spPr>
+          <a:xfrm>
+            <a:off x="548640" y="2980944"/>
+            <a:ext cx="5486400" cy="384048"/>
+          </a:xfrm>
+          <a:prstGeom prst="rect">
+            <a:avLst/>
+          </a:prstGeom>
+          <a:noFill/>
+        </p:spPr>
+        <p:txBody>
+          <a:bodyPr wrap="none" lIns="0" rIns="0" tIns="38100" bIns="38100">
+            <a:spAutoFit/>
+          </a:bodyPr>
+          <a:lstStyle/>
+          <a:p>
+            <a:r>
+              <a:rPr sz="1500" b="1">
+                <a:solidFill>
+                  <a:srgbClr val="C9A227"/>
+                </a:solidFill>
+                <a:latin typeface="Calibri"/>
+              </a:rPr>
+              <a:t> 6.</a:t>
+            </a:r>
+            <a:r>
+              <a:rPr sz="1500">
+                <a:solidFill>
+                  <a:srgbClr val="1A1A1A"/>
+                </a:solidFill>
+                <a:latin typeface="Calibri"/>
+              </a:rPr>
+              <a:t>   System Architecture</a:t>
+            </a:r>
+          </a:p>
+        </p:txBody>
+      </p:sp>
+      <p:sp>
+        <p:nvSpPr>
+          <p:cNvPr id="10" name="TextBox 9"/>
+          <p:cNvSpPr txBox="1"/>
+          <p:nvPr/>
+        </p:nvSpPr>
+        <p:spPr>
+          <a:xfrm>
+            <a:off x="548640" y="3364992"/>
+            <a:ext cx="5486400" cy="384048"/>
+          </a:xfrm>
+          <a:prstGeom prst="rect">
+            <a:avLst/>
+          </a:prstGeom>
+          <a:noFill/>
+        </p:spPr>
+        <p:txBody>
+          <a:bodyPr wrap="none" lIns="0" rIns="0" tIns="38100" bIns="38100">
+            <a:spAutoFit/>
+          </a:bodyPr>
+          <a:lstStyle/>
+          <a:p>
+            <a:r>
+              <a:rPr sz="1500" b="1">
+                <a:solidFill>
+                  <a:srgbClr val="C9A227"/>
+                </a:solidFill>
+                <a:latin typeface="Calibri"/>
+              </a:rPr>
+              <a:t> 7.</a:t>
+            </a:r>
+            <a:r>
+              <a:rPr sz="1500">
+                <a:solidFill>
+                  <a:srgbClr val="1A1A1A"/>
+                </a:solidFill>
+                <a:latin typeface="Calibri"/>
+              </a:rPr>
+              <a:t>   Hybrid Schema</a:t>
+            </a:r>
+          </a:p>
+        </p:txBody>
+      </p:sp>
+      <p:sp>
+        <p:nvSpPr>
+          <p:cNvPr id="11" name="TextBox 10"/>
+          <p:cNvSpPr txBox="1"/>
+          <p:nvPr/>
+        </p:nvSpPr>
+        <p:spPr>
+          <a:xfrm>
+            <a:off x="548640" y="3749040"/>
+            <a:ext cx="5486400" cy="384048"/>
+          </a:xfrm>
+          <a:prstGeom prst="rect">
+            <a:avLst/>
+          </a:prstGeom>
+          <a:noFill/>
+        </p:spPr>
+        <p:txBody>
+          <a:bodyPr wrap="none" lIns="0" rIns="0" tIns="38100" bIns="38100">
+            <a:spAutoFit/>
+          </a:bodyPr>
+          <a:lstStyle/>
+          <a:p>
+            <a:r>
+              <a:rPr sz="1500" b="1">
+                <a:solidFill>
+                  <a:srgbClr val="C9A227"/>
+                </a:solidFill>
+                <a:latin typeface="Calibri"/>
+              </a:rPr>
+              <a:t> 8.</a:t>
+            </a:r>
+            <a:r>
+              <a:rPr sz="1500">
+                <a:solidFill>
+                  <a:srgbClr val="1A1A1A"/>
+                </a:solidFill>
+                <a:latin typeface="Calibri"/>
+              </a:rPr>
+              <a:t>   The Prompt</a:t>
+            </a:r>
+          </a:p>
+        </p:txBody>
+      </p:sp>
+      <p:sp>
+        <p:nvSpPr>
+          <p:cNvPr id="12" name="TextBox 11"/>
+          <p:cNvSpPr txBox="1"/>
+          <p:nvPr/>
+        </p:nvSpPr>
+        <p:spPr>
+          <a:xfrm>
+            <a:off x="548640" y="4133088"/>
+            <a:ext cx="5486400" cy="384048"/>
+          </a:xfrm>
+          <a:prstGeom prst="rect">
+            <a:avLst/>
+          </a:prstGeom>
+          <a:noFill/>
+        </p:spPr>
+        <p:txBody>
+          <a:bodyPr wrap="none" lIns="0" rIns="0" tIns="38100" bIns="38100">
+            <a:spAutoFit/>
+          </a:bodyPr>
+          <a:lstStyle/>
+          <a:p>
+            <a:r>
+              <a:rPr sz="1500" b="1">
+                <a:solidFill>
+                  <a:srgbClr val="C9A227"/>
+                </a:solidFill>
+                <a:latin typeface="Calibri"/>
+              </a:rPr>
+              <a:t> 9.</a:t>
+            </a:r>
+            <a:r>
+              <a:rPr sz="1500">
+                <a:solidFill>
+                  <a:srgbClr val="1A1A1A"/>
+                </a:solidFill>
+                <a:latin typeface="Calibri"/>
+              </a:rPr>
+              <a:t>   Aliases and Deduplication</a:t>
+            </a:r>
+          </a:p>
+        </p:txBody>
+      </p:sp>
+      <p:sp>
+        <p:nvSpPr>
+          <p:cNvPr id="13" name="TextBox 12"/>
+          <p:cNvSpPr txBox="1"/>
+          <p:nvPr/>
+        </p:nvSpPr>
+        <p:spPr>
+          <a:xfrm>
+            <a:off x="548640" y="4517136"/>
+            <a:ext cx="5486400" cy="384048"/>
+          </a:xfrm>
+          <a:prstGeom prst="rect">
+            <a:avLst/>
+          </a:prstGeom>
+          <a:noFill/>
+        </p:spPr>
+        <p:txBody>
+          <a:bodyPr wrap="none" lIns="0" rIns="0" tIns="38100" bIns="38100">
+            <a:spAutoFit/>
+          </a:bodyPr>
+          <a:lstStyle/>
+          <a:p>
+            <a:r>
+              <a:rPr sz="1500" b="1">
+                <a:solidFill>
+                  <a:srgbClr val="C9A227"/>
+                </a:solidFill>
+                <a:latin typeface="Calibri"/>
+              </a:rPr>
+              <a:t>10.</a:t>
+            </a:r>
+            <a:r>
+              <a:rPr sz="1500">
+                <a:solidFill>
+                  <a:srgbClr val="1A1A1A"/>
+                </a:solidFill>
+                <a:latin typeface="Calibri"/>
+              </a:rPr>
+              <a:t>   Provenance and Output Formats</a:t>
+            </a:r>
+          </a:p>
+        </p:txBody>
+      </p:sp>
+      <p:sp>
+        <p:nvSpPr>
+          <p:cNvPr id="14" name="TextBox 13"/>
+          <p:cNvSpPr txBox="1"/>
+          <p:nvPr/>
+        </p:nvSpPr>
+        <p:spPr>
+          <a:xfrm>
+            <a:off x="548640" y="4901184"/>
+            <a:ext cx="5486400" cy="384048"/>
+          </a:xfrm>
+          <a:prstGeom prst="rect">
+            <a:avLst/>
+          </a:prstGeom>
+          <a:noFill/>
+        </p:spPr>
+        <p:txBody>
+          <a:bodyPr wrap="none" lIns="0" rIns="0" tIns="38100" bIns="38100">
+            <a:spAutoFit/>
+          </a:bodyPr>
+          <a:lstStyle/>
+          <a:p>
+            <a:r>
+              <a:rPr sz="1500" b="1">
+                <a:solidFill>
+                  <a:srgbClr val="C9A227"/>
+                </a:solidFill>
+                <a:latin typeface="Calibri"/>
+              </a:rPr>
+              <a:t>11.</a:t>
+            </a:r>
+            <a:r>
+              <a:rPr sz="1500">
+                <a:solidFill>
+                  <a:srgbClr val="1A1A1A"/>
+                </a:solidFill>
+                <a:latin typeface="Calibri"/>
+              </a:rPr>
+              <a:t>   Interactive Visualization</a:t>
+            </a:r>
+          </a:p>
+        </p:txBody>
+      </p:sp>
+      <p:sp>
+        <p:nvSpPr>
+          <p:cNvPr id="15" name="TextBox 14"/>
+          <p:cNvSpPr txBox="1"/>
+          <p:nvPr/>
+        </p:nvSpPr>
+        <p:spPr>
+          <a:xfrm>
+            <a:off x="6217920" y="1828800"/>
+            <a:ext cx="5486400" cy="384048"/>
+          </a:xfrm>
+          <a:prstGeom prst="rect">
+            <a:avLst/>
+          </a:prstGeom>
+          <a:noFill/>
+        </p:spPr>
+        <p:txBody>
+          <a:bodyPr wrap="none" lIns="0" rIns="0" tIns="38100" bIns="38100">
+            <a:spAutoFit/>
+          </a:bodyPr>
+          <a:lstStyle/>
+          <a:p>
+            <a:r>
+              <a:rPr sz="1500" b="1">
+                <a:solidFill>
+                  <a:srgbClr val="C9A227"/>
+                </a:solidFill>
+                <a:latin typeface="Calibri"/>
+              </a:rPr>
+              <a:t>12.</a:t>
+            </a:r>
+            <a:r>
+              <a:rPr sz="1500">
+                <a:solidFill>
+                  <a:srgbClr val="1A1A1A"/>
+                </a:solidFill>
+                <a:latin typeface="Calibri"/>
+              </a:rPr>
+              <a:t>   Complexity Slider</a:t>
+            </a:r>
+          </a:p>
+        </p:txBody>
+      </p:sp>
+      <p:sp>
+        <p:nvSpPr>
+          <p:cNvPr id="16" name="TextBox 15"/>
+          <p:cNvSpPr txBox="1"/>
+          <p:nvPr/>
+        </p:nvSpPr>
+        <p:spPr>
+          <a:xfrm>
+            <a:off x="6217920" y="2212848"/>
+            <a:ext cx="5486400" cy="384048"/>
+          </a:xfrm>
+          <a:prstGeom prst="rect">
+            <a:avLst/>
+          </a:prstGeom>
+          <a:noFill/>
+        </p:spPr>
+        <p:txBody>
+          <a:bodyPr wrap="none" lIns="0" rIns="0" tIns="38100" bIns="38100">
+            <a:spAutoFit/>
+          </a:bodyPr>
+          <a:lstStyle/>
+          <a:p>
+            <a:r>
+              <a:rPr sz="1500" b="1">
+                <a:solidFill>
+                  <a:srgbClr val="C9A227"/>
+                </a:solidFill>
+                <a:latin typeface="Calibri"/>
+              </a:rPr>
+              <a:t>13.</a:t>
+            </a:r>
+            <a:r>
+              <a:rPr sz="1500">
+                <a:solidFill>
+                  <a:srgbClr val="1A1A1A"/>
+                </a:solidFill>
+                <a:latin typeface="Calibri"/>
+              </a:rPr>
+              <a:t>   Evaluation — Three Passages</a:t>
+            </a:r>
+          </a:p>
+        </p:txBody>
+      </p:sp>
+      <p:sp>
+        <p:nvSpPr>
+          <p:cNvPr id="17" name="TextBox 16"/>
+          <p:cNvSpPr txBox="1"/>
+          <p:nvPr/>
+        </p:nvSpPr>
+        <p:spPr>
+          <a:xfrm>
+            <a:off x="6217920" y="2596896"/>
+            <a:ext cx="5486400" cy="384048"/>
+          </a:xfrm>
+          <a:prstGeom prst="rect">
+            <a:avLst/>
+          </a:prstGeom>
+          <a:noFill/>
+        </p:spPr>
+        <p:txBody>
+          <a:bodyPr wrap="none" lIns="0" rIns="0" tIns="38100" bIns="38100">
+            <a:spAutoFit/>
+          </a:bodyPr>
+          <a:lstStyle/>
+          <a:p>
+            <a:r>
+              <a:rPr sz="1500" b="1">
+                <a:solidFill>
+                  <a:srgbClr val="C9A227"/>
+                </a:solidFill>
+                <a:latin typeface="Calibri"/>
+              </a:rPr>
+              <a:t>14.</a:t>
+            </a:r>
+            <a:r>
+              <a:rPr sz="1500">
+                <a:solidFill>
+                  <a:srgbClr val="1A1A1A"/>
+                </a:solidFill>
+                <a:latin typeface="Calibri"/>
+              </a:rPr>
+              <a:t>   Real Example — Microsoft</a:t>
+            </a:r>
+          </a:p>
+        </p:txBody>
+      </p:sp>
+      <p:sp>
+        <p:nvSpPr>
+          <p:cNvPr id="18" name="TextBox 17"/>
+          <p:cNvSpPr txBox="1"/>
+          <p:nvPr/>
+        </p:nvSpPr>
+        <p:spPr>
+          <a:xfrm>
+            <a:off x="6217920" y="2980944"/>
+            <a:ext cx="5486400" cy="384048"/>
+          </a:xfrm>
+          <a:prstGeom prst="rect">
+            <a:avLst/>
+          </a:prstGeom>
+          <a:noFill/>
+        </p:spPr>
+        <p:txBody>
+          <a:bodyPr wrap="none" lIns="0" rIns="0" tIns="38100" bIns="38100">
+            <a:spAutoFit/>
+          </a:bodyPr>
+          <a:lstStyle/>
+          <a:p>
+            <a:r>
+              <a:rPr sz="1500" b="1">
+                <a:solidFill>
+                  <a:srgbClr val="C9A227"/>
+                </a:solidFill>
+                <a:latin typeface="Calibri"/>
+              </a:rPr>
+              <a:t>15.</a:t>
+            </a:r>
+            <a:r>
+              <a:rPr sz="1500">
+                <a:solidFill>
+                  <a:srgbClr val="1A1A1A"/>
+                </a:solidFill>
+                <a:latin typeface="Calibri"/>
+              </a:rPr>
+              <a:t>   Real Example — Climate Science</a:t>
+            </a:r>
+          </a:p>
+        </p:txBody>
+      </p:sp>
+      <p:sp>
+        <p:nvSpPr>
+          <p:cNvPr id="19" name="TextBox 18"/>
+          <p:cNvSpPr txBox="1"/>
+          <p:nvPr/>
+        </p:nvSpPr>
+        <p:spPr>
+          <a:xfrm>
+            <a:off x="6217920" y="3364992"/>
+            <a:ext cx="5486400" cy="384048"/>
+          </a:xfrm>
+          <a:prstGeom prst="rect">
+            <a:avLst/>
+          </a:prstGeom>
+          <a:noFill/>
+        </p:spPr>
+        <p:txBody>
+          <a:bodyPr wrap="none" lIns="0" rIns="0" tIns="38100" bIns="38100">
+            <a:spAutoFit/>
+          </a:bodyPr>
+          <a:lstStyle/>
+          <a:p>
+            <a:r>
+              <a:rPr sz="1500" b="1">
+                <a:solidFill>
+                  <a:srgbClr val="C9A227"/>
+                </a:solidFill>
+                <a:latin typeface="Calibri"/>
+              </a:rPr>
+              <a:t>16.</a:t>
+            </a:r>
+            <a:r>
+              <a:rPr sz="1500">
+                <a:solidFill>
+                  <a:srgbClr val="1A1A1A"/>
+                </a:solidFill>
+                <a:latin typeface="Calibri"/>
+              </a:rPr>
+              <a:t>   Real Example — Mark Twain</a:t>
+            </a:r>
+          </a:p>
+        </p:txBody>
+      </p:sp>
+      <p:sp>
+        <p:nvSpPr>
+          <p:cNvPr id="20" name="TextBox 19"/>
+          <p:cNvSpPr txBox="1"/>
+          <p:nvPr/>
+        </p:nvSpPr>
+        <p:spPr>
+          <a:xfrm>
+            <a:off x="6217920" y="3749040"/>
+            <a:ext cx="5486400" cy="384048"/>
+          </a:xfrm>
+          <a:prstGeom prst="rect">
+            <a:avLst/>
+          </a:prstGeom>
+          <a:noFill/>
+        </p:spPr>
+        <p:txBody>
+          <a:bodyPr wrap="none" lIns="0" rIns="0" tIns="38100" bIns="38100">
+            <a:spAutoFit/>
+          </a:bodyPr>
+          <a:lstStyle/>
+          <a:p>
+            <a:r>
+              <a:rPr sz="1500" b="1">
+                <a:solidFill>
+                  <a:srgbClr val="C9A227"/>
+                </a:solidFill>
+                <a:latin typeface="Calibri"/>
+              </a:rPr>
+              <a:t>17.</a:t>
+            </a:r>
+            <a:r>
+              <a:rPr sz="1500">
+                <a:solidFill>
+                  <a:srgbClr val="1A1A1A"/>
+                </a:solidFill>
+                <a:latin typeface="Calibri"/>
+              </a:rPr>
+              <a:t>   What Worked</a:t>
+            </a:r>
+          </a:p>
+        </p:txBody>
+      </p:sp>
+      <p:sp>
+        <p:nvSpPr>
+          <p:cNvPr id="21" name="TextBox 20"/>
+          <p:cNvSpPr txBox="1"/>
+          <p:nvPr/>
+        </p:nvSpPr>
+        <p:spPr>
+          <a:xfrm>
+            <a:off x="6217920" y="4133088"/>
+            <a:ext cx="5486400" cy="384048"/>
+          </a:xfrm>
+          <a:prstGeom prst="rect">
+            <a:avLst/>
+          </a:prstGeom>
+          <a:noFill/>
+        </p:spPr>
+        <p:txBody>
+          <a:bodyPr wrap="none" lIns="0" rIns="0" tIns="38100" bIns="38100">
+            <a:spAutoFit/>
+          </a:bodyPr>
+          <a:lstStyle/>
+          <a:p>
+            <a:r>
+              <a:rPr sz="1500" b="1">
+                <a:solidFill>
+                  <a:srgbClr val="C9A227"/>
+                </a:solidFill>
+                <a:latin typeface="Calibri"/>
+              </a:rPr>
+              <a:t>18.</a:t>
+            </a:r>
+            <a:r>
+              <a:rPr sz="1500">
+                <a:solidFill>
+                  <a:srgbClr val="1A1A1A"/>
+                </a:solidFill>
+                <a:latin typeface="Calibri"/>
+              </a:rPr>
+              <a:t>   Future Work</a:t>
+            </a:r>
+          </a:p>
+        </p:txBody>
+      </p:sp>
+      <p:sp>
+        <p:nvSpPr>
+          <p:cNvPr id="22" name="TextBox 21"/>
+          <p:cNvSpPr txBox="1"/>
+          <p:nvPr/>
+        </p:nvSpPr>
+        <p:spPr>
+          <a:xfrm>
+            <a:off x="6217920" y="4517136"/>
+            <a:ext cx="5486400" cy="384048"/>
+          </a:xfrm>
+          <a:prstGeom prst="rect">
+            <a:avLst/>
+          </a:prstGeom>
+          <a:noFill/>
+        </p:spPr>
+        <p:txBody>
+          <a:bodyPr wrap="none" lIns="0" rIns="0" tIns="38100" bIns="38100">
+            <a:spAutoFit/>
+          </a:bodyPr>
+          <a:lstStyle/>
+          <a:p>
+            <a:r>
+              <a:rPr sz="1500" b="1">
+                <a:solidFill>
+                  <a:srgbClr val="C9A227"/>
+                </a:solidFill>
+                <a:latin typeface="Calibri"/>
+              </a:rPr>
+              <a:t>19.</a:t>
+            </a:r>
+            <a:r>
+              <a:rPr sz="1500">
+                <a:solidFill>
+                  <a:srgbClr val="1A1A1A"/>
+                </a:solidFill>
+                <a:latin typeface="Calibri"/>
+              </a:rPr>
+              <a:t>   Summary</a:t>
+            </a:r>
+          </a:p>
+        </p:txBody>
+      </p:sp>
+      <p:sp>
+        <p:nvSpPr>
+          <p:cNvPr id="23" name="TextBox 22"/>
+          <p:cNvSpPr txBox="1"/>
+          <p:nvPr/>
+        </p:nvSpPr>
+        <p:spPr>
+          <a:xfrm>
+            <a:off x="365760" y="6446520"/>
+            <a:ext cx="5486400" cy="320040"/>
+          </a:xfrm>
+          <a:prstGeom prst="rect">
+            <a:avLst/>
+          </a:prstGeom>
+          <a:noFill/>
+        </p:spPr>
+        <p:txBody>
+          <a:bodyPr wrap="none">
+            <a:spAutoFit/>
+          </a:bodyPr>
+          <a:lstStyle/>
+          <a:p>
+            <a:r>
+              <a:rPr sz="900">
+                <a:solidFill>
+                  <a:srgbClr val="6B6B6B"/>
+                </a:solidFill>
+                <a:latin typeface="Calibri"/>
+              </a:rPr>
+              <a:t>CSCE526301  ·  LLM-Powered Knowledge Graph Extractor</a:t>
+            </a:r>
+          </a:p>
+        </p:txBody>
+      </p:sp>
+      <p:sp>
+        <p:nvSpPr>
+          <p:cNvPr id="24" name="TextBox 23"/>
+          <p:cNvSpPr txBox="1"/>
+          <p:nvPr/>
+        </p:nvSpPr>
+        <p:spPr>
+          <a:xfrm>
+            <a:off x="11247120" y="6446520"/>
+            <a:ext cx="822960" cy="320040"/>
+          </a:xfrm>
+          <a:prstGeom prst="rect">
+            <a:avLst/>
+          </a:prstGeom>
+          <a:noFill/>
+        </p:spPr>
+        <p:txBody>
+          <a:bodyPr wrap="none">
+            <a:spAutoFit/>
+          </a:bodyPr>
+          <a:lstStyle/>
+          <a:p>
+            <a:pPr algn="r"/>
+            <a:r>
+              <a:rPr sz="900">
+                <a:solidFill>
+                  <a:srgbClr val="6B6B6B"/>
+                </a:solidFill>
+                <a:latin typeface="Calibri"/>
+              </a:rPr>
+              <a:t>2 / 19</a:t>
+            </a:r>
+          </a:p>
+        </p:txBody>
+      </p:sp>
+    </p:spTree>
+  </p:cSld>
+  <p:clrMapOvr>
+    <a:masterClrMapping/>
+  </p:clrMapOvr>
+</p:sld>
+</file>
+
 <file path=ppt/slides/slide2.xml><?xml version="1.0" encoding="utf-8"?>
 <p:sld xmlns:a="http://schemas.openxmlformats.org/drawingml/2006/main" xmlns:r="http://schemas.openxmlformats.org/officeDocument/2006/relationships" xmlns:p="http://schemas.openxmlformats.org/presentationml/2006/main">
   <p:cSld>
@@ -8082,7 +9055,7 @@
                 </a:solidFill>
                 <a:latin typeface="Calibri"/>
               </a:rPr>
-              <a:t>2 / 19</a:t>
+              <a:t>3 / 19</a:t>
             </a:r>
           </a:p>
         </p:txBody>
@@ -8508,7 +9481,7 @@
                 </a:solidFill>
                 <a:latin typeface="Calibri"/>
               </a:rPr>
-              <a:t>3 / 19</a:t>
+              <a:t>4 / 19</a:t>
             </a:r>
           </a:p>
         </p:txBody>
@@ -8925,7 +9898,7 @@
                 </a:solidFill>
                 <a:latin typeface="Calibri"/>
               </a:rPr>
-              <a:t>4 / 19</a:t>
+              <a:t>5 / 19</a:t>
             </a:r>
           </a:p>
         </p:txBody>
@@ -9699,7 +10672,7 @@
                 </a:solidFill>
                 <a:latin typeface="Calibri"/>
               </a:rPr>
-              <a:t>5 / 19</a:t>
+              <a:t>6 / 19</a:t>
             </a:r>
           </a:p>
         </p:txBody>
@@ -10189,7 +11162,7 @@
                 </a:solidFill>
                 <a:latin typeface="Calibri"/>
               </a:rPr>
-              <a:t>6 / 19</a:t>
+              <a:t>7 / 19</a:t>
             </a:r>
           </a:p>
         </p:txBody>
@@ -11105,7 +12078,7 @@
                 </a:solidFill>
                 <a:latin typeface="Calibri"/>
               </a:rPr>
-              <a:t>10 / 19</a:t>
+              <a:t>9 / 19</a:t>
             </a:r>
           </a:p>
         </p:txBody>
@@ -11483,7 +12456,7 @@
                 </a:solidFill>
                 <a:latin typeface="Calibri"/>
               </a:rPr>
-              <a:t>12 / 19</a:t>
+              <a:t>10 / 19</a:t>
             </a:r>
           </a:p>
         </p:txBody>

--- a/paper/Knowledge_engineering_slides.pptx
+++ b/paper/Knowledge_engineering_slides.pptx
@@ -6,24 +6,24 @@
   </p:sldMasterIdLst>
   <p:sldIdLst>
     <p:sldId id="256" r:id="rId2"/>
-    <p:sldId id="278" r:id="rId24"/>
-    <p:sldId id="257" r:id="rId3"/>
-    <p:sldId id="258" r:id="rId4"/>
-    <p:sldId id="259" r:id="rId5"/>
-    <p:sldId id="260" r:id="rId6"/>
-    <p:sldId id="261" r:id="rId7"/>
-    <p:sldId id="263" r:id="rId8"/>
-    <p:sldId id="265" r:id="rId9"/>
-    <p:sldId id="267" r:id="rId10"/>
-    <p:sldId id="268" r:id="rId11"/>
-    <p:sldId id="269" r:id="rId12"/>
-    <p:sldId id="270" r:id="rId13"/>
-    <p:sldId id="271" r:id="rId14"/>
-    <p:sldId id="277" r:id="rId15"/>
-    <p:sldId id="276" r:id="rId16"/>
-    <p:sldId id="275" r:id="rId17"/>
-    <p:sldId id="273" r:id="rId18"/>
-    <p:sldId id="274" r:id="rId19"/>
+    <p:sldId id="278" r:id="rId3"/>
+    <p:sldId id="257" r:id="rId4"/>
+    <p:sldId id="258" r:id="rId5"/>
+    <p:sldId id="259" r:id="rId6"/>
+    <p:sldId id="260" r:id="rId7"/>
+    <p:sldId id="261" r:id="rId8"/>
+    <p:sldId id="263" r:id="rId9"/>
+    <p:sldId id="265" r:id="rId10"/>
+    <p:sldId id="267" r:id="rId11"/>
+    <p:sldId id="268" r:id="rId12"/>
+    <p:sldId id="269" r:id="rId13"/>
+    <p:sldId id="270" r:id="rId14"/>
+    <p:sldId id="271" r:id="rId15"/>
+    <p:sldId id="277" r:id="rId16"/>
+    <p:sldId id="276" r:id="rId17"/>
+    <p:sldId id="275" r:id="rId18"/>
+    <p:sldId id="273" r:id="rId19"/>
+    <p:sldId id="274" r:id="rId20"/>
   </p:sldIdLst>
   <p:sldSz cx="12192000" cy="6858000"/>
   <p:notesSz cx="6858000" cy="9144000"/>
@@ -3117,7 +3117,7 @@
         <p:spPr>
           <a:xfrm>
             <a:off x="0" y="0"/>
-            <a:ext cx="3840480" cy="6858000"/>
+            <a:ext cx="3481081" cy="6858000"/>
           </a:xfrm>
           <a:prstGeom prst="rect">
             <a:avLst/>
@@ -3160,7 +3160,7 @@
         </p:nvSpPr>
         <p:spPr>
           <a:xfrm>
-            <a:off x="3840480" y="0"/>
+            <a:off x="3490624" y="0"/>
             <a:ext cx="73152" cy="6858000"/>
           </a:xfrm>
           <a:prstGeom prst="rect">
@@ -3507,7 +3507,7 @@
                 </a:solidFill>
                 <a:latin typeface="Calibri"/>
               </a:rPr>
-              <a:t>UI</a:t>
+              <a:t>EXPORT</a:t>
             </a:r>
           </a:p>
         </p:txBody>
@@ -3542,7 +3542,7 @@
                 </a:solidFill>
                 <a:latin typeface="Calibri"/>
               </a:rPr>
-              <a:t>Interactive Visualization</a:t>
+              <a:t>Provenance and Output Formats</a:t>
             </a:r>
           </a:p>
         </p:txBody>
@@ -3599,7 +3599,7 @@
         </p:nvSpPr>
         <p:spPr>
           <a:xfrm>
-            <a:off x="548640" y="1783080"/>
+            <a:off x="548640" y="1828800"/>
             <a:ext cx="11064240" cy="4389120"/>
           </a:xfrm>
           <a:prstGeom prst="rect">
@@ -3615,11 +3615,11 @@
           <a:p>
             <a:pPr algn="l">
               <a:spcAft>
-                <a:spcPts val="400"/>
+                <a:spcPts val="1000"/>
               </a:spcAft>
             </a:pPr>
             <a:r>
-              <a:rPr sz="1600" b="1">
+              <a:rPr sz="1800" b="1">
                 <a:solidFill>
                   <a:srgbClr val="C9A227"/>
                 </a:solidFill>
@@ -3628,32 +3628,32 @@
               <a:t>•  </a:t>
             </a:r>
             <a:r>
-              <a:rPr sz="1600" b="1">
+              <a:rPr sz="1800" b="1">
                 <a:solidFill>
                   <a:srgbClr val="1F3A5F"/>
                 </a:solidFill>
                 <a:latin typeface="Calibri"/>
               </a:rPr>
-              <a:t>5 layouts</a:t>
-            </a:r>
-            <a:r>
-              <a:rPr sz="1600">
+              <a:t>JSON</a:t>
+            </a:r>
+            <a:r>
+              <a:rPr sz="1800">
                 <a:solidFill>
                   <a:srgbClr val="1A1A1A"/>
                 </a:solidFill>
                 <a:latin typeface="Calibri"/>
               </a:rPr>
-              <a:t>  Force · Concentric · Hierarchy · Circle · Grid (default picked from hub ratio)</a:t>
+              <a:t>  nodes, edges, evidence, confidence, aliases</a:t>
             </a:r>
           </a:p>
           <a:p>
             <a:pPr algn="l">
               <a:spcAft>
-                <a:spcPts val="400"/>
+                <a:spcPts val="1000"/>
               </a:spcAft>
             </a:pPr>
             <a:r>
-              <a:rPr sz="1600" b="1">
+              <a:rPr sz="1800" b="1">
                 <a:solidFill>
                   <a:srgbClr val="C9A227"/>
                 </a:solidFill>
@@ -3662,32 +3662,32 @@
               <a:t>•  </a:t>
             </a:r>
             <a:r>
-              <a:rPr sz="1600" b="1">
+              <a:rPr sz="1800" b="1">
                 <a:solidFill>
                   <a:srgbClr val="1F3A5F"/>
                 </a:solidFill>
                 <a:latin typeface="Calibri"/>
               </a:rPr>
-              <a:t>Live search</a:t>
-            </a:r>
-            <a:r>
-              <a:rPr sz="1600">
+              <a:t>Turtle / RDF</a:t>
+            </a:r>
+            <a:r>
+              <a:rPr sz="1800">
                 <a:solidFill>
                   <a:srgbClr val="1A1A1A"/>
                 </a:solidFill>
                 <a:latin typeface="Calibri"/>
               </a:rPr>
-              <a:t>  highlights matching nodes</a:t>
+              <a:t>  edges as rdf:Statement reifications, kg:evidence, kg:confidence (PROV-O)</a:t>
             </a:r>
           </a:p>
           <a:p>
             <a:pPr algn="l">
               <a:spcAft>
-                <a:spcPts val="400"/>
+                <a:spcPts val="1000"/>
               </a:spcAft>
             </a:pPr>
             <a:r>
-              <a:rPr sz="1600" b="1">
+              <a:rPr sz="1800" b="1">
                 <a:solidFill>
                   <a:srgbClr val="C9A227"/>
                 </a:solidFill>
@@ -3696,165 +3696,64 @@
               <a:t>•  </a:t>
             </a:r>
             <a:r>
-              <a:rPr sz="1600" b="1">
+              <a:rPr sz="1800" b="1">
                 <a:solidFill>
                   <a:srgbClr val="1F3A5F"/>
                 </a:solidFill>
                 <a:latin typeface="Calibri"/>
               </a:rPr>
-              <a:t>Relation chips</a:t>
-            </a:r>
-            <a:r>
-              <a:rPr sz="1600">
+              <a:t>PNG</a:t>
+            </a:r>
+            <a:r>
+              <a:rPr sz="1800">
                 <a:solidFill>
                   <a:srgbClr val="1A1A1A"/>
                 </a:solidFill>
                 <a:latin typeface="Calibri"/>
               </a:rPr>
-              <a:t>  hide / show each of the 23 relations</a:t>
-            </a:r>
-          </a:p>
-          <a:p>
-            <a:pPr algn="l">
-              <a:spcAft>
-                <a:spcPts val="400"/>
-              </a:spcAft>
-            </a:pPr>
-            <a:r>
-              <a:rPr sz="1600" b="1">
-                <a:solidFill>
-                  <a:srgbClr val="C9A227"/>
-                </a:solidFill>
-                <a:latin typeface="Calibri"/>
-              </a:rPr>
-              <a:t>•  </a:t>
-            </a:r>
-            <a:r>
-              <a:rPr sz="1600" b="1">
-                <a:solidFill>
-                  <a:srgbClr val="1F3A5F"/>
-                </a:solidFill>
-                <a:latin typeface="Calibri"/>
-              </a:rPr>
-              <a:t>Hide individual entities</a:t>
-            </a:r>
-            <a:r>
-              <a:rPr sz="1600">
-                <a:solidFill>
-                  <a:srgbClr val="1A1A1A"/>
-                </a:solidFill>
-                <a:latin typeface="Calibri"/>
-              </a:rPr>
-              <a:t>  with one-click restore</a:t>
-            </a:r>
-          </a:p>
-          <a:p>
-            <a:pPr algn="l">
-              <a:spcAft>
-                <a:spcPts val="400"/>
-              </a:spcAft>
-            </a:pPr>
-            <a:r>
-              <a:rPr sz="1600" b="1">
-                <a:solidFill>
-                  <a:srgbClr val="C9A227"/>
-                </a:solidFill>
-                <a:latin typeface="Calibri"/>
-              </a:rPr>
-              <a:t>•  </a:t>
-            </a:r>
-            <a:r>
-              <a:rPr sz="1600" b="1">
-                <a:solidFill>
-                  <a:srgbClr val="1F3A5F"/>
-                </a:solidFill>
-                <a:latin typeface="Calibri"/>
-              </a:rPr>
-              <a:t>Edge labels</a:t>
-            </a:r>
-            <a:r>
-              <a:rPr sz="1600">
-                <a:solidFill>
-                  <a:srgbClr val="1A1A1A"/>
-                </a:solidFill>
-                <a:latin typeface="Calibri"/>
-              </a:rPr>
-              <a:t>  on hover or always</a:t>
-            </a:r>
-          </a:p>
-          <a:p>
-            <a:pPr algn="l">
-              <a:spcAft>
-                <a:spcPts val="400"/>
-              </a:spcAft>
-            </a:pPr>
-            <a:r>
-              <a:rPr sz="1600" b="1">
-                <a:solidFill>
-                  <a:srgbClr val="C9A227"/>
-                </a:solidFill>
-                <a:latin typeface="Calibri"/>
-              </a:rPr>
-              <a:t>•  </a:t>
-            </a:r>
-            <a:r>
-              <a:rPr sz="1600" b="1">
-                <a:solidFill>
-                  <a:srgbClr val="1F3A5F"/>
-                </a:solidFill>
-                <a:latin typeface="Calibri"/>
-              </a:rPr>
-              <a:t>Date nodes</a:t>
-            </a:r>
-            <a:r>
-              <a:rPr sz="1600">
-                <a:solidFill>
-                  <a:srgbClr val="1A1A1A"/>
-                </a:solidFill>
-                <a:latin typeface="Calibri"/>
-              </a:rPr>
-              <a:t>  on/off — clean ‘paper-ready’ view</a:t>
-            </a:r>
-          </a:p>
-          <a:p>
-            <a:pPr algn="l">
-              <a:spcAft>
-                <a:spcPts val="400"/>
-              </a:spcAft>
-            </a:pPr>
-            <a:r>
-              <a:rPr sz="1600" b="1">
-                <a:solidFill>
-                  <a:srgbClr val="C9A227"/>
-                </a:solidFill>
-                <a:latin typeface="Calibri"/>
-              </a:rPr>
-              <a:t>•  </a:t>
-            </a:r>
-            <a:r>
-              <a:rPr sz="1600" b="1">
-                <a:solidFill>
-                  <a:srgbClr val="1F3A5F"/>
-                </a:solidFill>
-                <a:latin typeface="Calibri"/>
-              </a:rPr>
-              <a:t>Zoom · Fit · PNG</a:t>
-            </a:r>
-            <a:r>
-              <a:rPr sz="1600">
-                <a:solidFill>
-                  <a:srgbClr val="1A1A1A"/>
-                </a:solidFill>
-                <a:latin typeface="Calibri"/>
-              </a:rPr>
-              <a:t>  standard controls in the toolbar</a:t>
-            </a:r>
-          </a:p>
-        </p:txBody>
-      </p:sp>
-      <p:sp>
-        <p:nvSpPr>
-          <p:cNvPr id="8" name="TextBox 7"/>
+              <a:t>  one-click export of the current graph view</a:t>
+            </a:r>
+          </a:p>
+        </p:txBody>
+      </p:sp>
+      <p:sp>
+        <p:nvSpPr>
+          <p:cNvPr id="7" name="TextBox 6"/>
+          <p:cNvSpPr txBox="1"/>
+          <p:nvPr/>
+        </p:nvSpPr>
+        <p:spPr>
+          <a:xfrm>
+            <a:off x="548640" y="5120640"/>
+            <a:ext cx="11064240" cy="914400"/>
+          </a:xfrm>
+          <a:prstGeom prst="rect">
+            <a:avLst/>
+          </a:prstGeom>
+          <a:noFill/>
+        </p:spPr>
+        <p:txBody>
+          <a:bodyPr wrap="square">
+            <a:spAutoFit/>
+          </a:bodyPr>
+          <a:lstStyle/>
+          <a:p>
+            <a:pPr algn="l"/>
+            <a:r>
+              <a:rPr sz="1500" b="0">
+                <a:solidFill>
+                  <a:srgbClr val="6B6B6B"/>
+                </a:solidFill>
+                <a:latin typeface="Calibri"/>
+              </a:rPr>
+              <a:t>Downstream tools can verify WHY each fact is in the graph, not just WHAT it claims.</a:t>
+            </a:r>
+          </a:p>
+        </p:txBody>
+      </p:sp>
+      <p:sp>
+        <p:nvSpPr>
+          <p:cNvPr id="9" name="TextBox 8"/>
           <p:cNvSpPr txBox="1"/>
           <p:nvPr/>
         </p:nvSpPr>
@@ -3882,7 +3781,7 @@
                 </a:solidFill>
                 <a:latin typeface="Calibri"/>
               </a:rPr>
-              <a:t>11 / 19</a:t>
+              <a:t>10 / 19</a:t>
             </a:r>
           </a:p>
         </p:txBody>
@@ -4021,7 +3920,7 @@
                 </a:solidFill>
                 <a:latin typeface="Calibri"/>
               </a:rPr>
-              <a:t>Importance-Ranked Complexity Slider</a:t>
+              <a:t>Interactive Visualization</a:t>
             </a:r>
           </a:p>
         </p:txBody>
@@ -4078,8 +3977,8 @@
         </p:nvSpPr>
         <p:spPr>
           <a:xfrm>
-            <a:off x="548640" y="1828800"/>
-            <a:ext cx="11064240" cy="1179810"/>
+            <a:off x="548640" y="1783080"/>
+            <a:ext cx="11064240" cy="2123658"/>
           </a:xfrm>
           <a:prstGeom prst="rect">
             <a:avLst/>
@@ -4094,11 +3993,11 @@
           <a:p>
             <a:pPr algn="l">
               <a:spcAft>
-                <a:spcPts val="1000"/>
+                <a:spcPts val="400"/>
               </a:spcAft>
             </a:pPr>
             <a:r>
-              <a:rPr sz="1800" b="1" dirty="0">
+              <a:rPr sz="1600" b="1" dirty="0">
                 <a:solidFill>
                   <a:srgbClr val="C9A227"/>
                 </a:solidFill>
@@ -4107,65 +4006,32 @@
               <a:t>•  </a:t>
             </a:r>
             <a:r>
-              <a:rPr sz="1800" b="1" dirty="0">
+              <a:rPr sz="1600" b="1" dirty="0">
                 <a:solidFill>
                   <a:srgbClr val="1F3A5F"/>
                 </a:solidFill>
                 <a:latin typeface="Calibri"/>
               </a:rPr>
-              <a:t>Node score</a:t>
-            </a:r>
-            <a:r>
-              <a:rPr sz="1800" dirty="0">
+              <a:t>5 layouts</a:t>
+            </a:r>
+            <a:r>
+              <a:rPr sz="1600" dirty="0">
                 <a:solidFill>
                   <a:srgbClr val="1A1A1A"/>
                 </a:solidFill>
                 <a:latin typeface="Calibri"/>
               </a:rPr>
-              <a:t>  </a:t>
-            </a:r>
-            <a:r>
-              <a:rPr sz="1800" dirty="0" err="1">
-                <a:solidFill>
-                  <a:srgbClr val="1A1A1A"/>
-                </a:solidFill>
-                <a:latin typeface="Calibri"/>
-              </a:rPr>
-              <a:t>score</a:t>
-            </a:r>
-            <a:r>
-              <a:rPr sz="1800" dirty="0">
-                <a:solidFill>
-                  <a:srgbClr val="1A1A1A"/>
-                </a:solidFill>
-                <a:latin typeface="Calibri"/>
-              </a:rPr>
-              <a:t> = degree + 2 × </a:t>
-            </a:r>
-            <a:r>
-              <a:rPr sz="1800" dirty="0" err="1">
-                <a:solidFill>
-                  <a:srgbClr val="1A1A1A"/>
-                </a:solidFill>
-                <a:latin typeface="Calibri"/>
-              </a:rPr>
-              <a:t>mention_count</a:t>
-            </a:r>
-            <a:endParaRPr sz="1800" dirty="0">
-              <a:solidFill>
-                <a:srgbClr val="1A1A1A"/>
-              </a:solidFill>
-              <a:latin typeface="Calibri"/>
-            </a:endParaRPr>
+              <a:t>  Force · Concentric · Hierarchy · Circle · Grid</a:t>
+            </a:r>
           </a:p>
           <a:p>
             <a:pPr algn="l">
               <a:spcAft>
-                <a:spcPts val="1000"/>
+                <a:spcPts val="400"/>
               </a:spcAft>
             </a:pPr>
             <a:r>
-              <a:rPr sz="1800" b="1" dirty="0">
+              <a:rPr sz="1600" b="1" dirty="0">
                 <a:solidFill>
                   <a:srgbClr val="C9A227"/>
                 </a:solidFill>
@@ -4174,32 +4040,32 @@
               <a:t>•  </a:t>
             </a:r>
             <a:r>
-              <a:rPr sz="1800" b="1" dirty="0">
+              <a:rPr sz="1600" b="1" dirty="0">
                 <a:solidFill>
                   <a:srgbClr val="1F3A5F"/>
                 </a:solidFill>
                 <a:latin typeface="Calibri"/>
               </a:rPr>
-              <a:t>Level 1</a:t>
-            </a:r>
-            <a:r>
-              <a:rPr sz="1800" dirty="0">
+              <a:t>Live search</a:t>
+            </a:r>
+            <a:r>
+              <a:rPr sz="1600" dirty="0">
                 <a:solidFill>
                   <a:srgbClr val="1A1A1A"/>
                 </a:solidFill>
                 <a:latin typeface="Calibri"/>
               </a:rPr>
-              <a:t>  only the most central + most-mentioned entities</a:t>
+              <a:t>  highlights matching nodes</a:t>
             </a:r>
           </a:p>
           <a:p>
             <a:pPr algn="l">
               <a:spcAft>
-                <a:spcPts val="1000"/>
+                <a:spcPts val="400"/>
               </a:spcAft>
             </a:pPr>
             <a:r>
-              <a:rPr sz="1800" b="1" dirty="0">
+              <a:rPr sz="1600" b="1" dirty="0">
                 <a:solidFill>
                   <a:srgbClr val="C9A227"/>
                 </a:solidFill>
@@ -4208,122 +4074,165 @@
               <a:t>•  </a:t>
             </a:r>
             <a:r>
-              <a:rPr sz="1800" b="1" dirty="0">
+              <a:rPr sz="1600" b="1" dirty="0">
                 <a:solidFill>
                   <a:srgbClr val="1F3A5F"/>
                 </a:solidFill>
                 <a:latin typeface="Calibri"/>
               </a:rPr>
-              <a:t>Max level</a:t>
-            </a:r>
-            <a:r>
-              <a:rPr sz="1800" dirty="0">
+              <a:t>Relation chips</a:t>
+            </a:r>
+            <a:r>
+              <a:rPr sz="1600" dirty="0">
                 <a:solidFill>
                   <a:srgbClr val="1A1A1A"/>
                 </a:solidFill>
                 <a:latin typeface="Calibri"/>
               </a:rPr>
-              <a:t>  the full graph</a:t>
-            </a:r>
-          </a:p>
-        </p:txBody>
-      </p:sp>
-      <p:sp>
-        <p:nvSpPr>
-          <p:cNvPr id="7" name="Rounded Rectangle 6"/>
-          <p:cNvSpPr/>
-          <p:nvPr/>
-        </p:nvSpPr>
-        <p:spPr>
-          <a:xfrm>
-            <a:off x="548640" y="4937760"/>
-            <a:ext cx="11064240" cy="1280160"/>
-          </a:xfrm>
-          <a:prstGeom prst="roundRect">
-            <a:avLst>
-              <a:gd name="adj" fmla="val 6000"/>
-            </a:avLst>
-          </a:prstGeom>
-          <a:solidFill>
-            <a:srgbClr val="F4F1EA"/>
-          </a:solidFill>
-          <a:ln w="6350">
-            <a:solidFill>
-              <a:srgbClr val="E3DED3"/>
-            </a:solidFill>
-          </a:ln>
-        </p:spPr>
-        <p:style>
-          <a:lnRef idx="1">
-            <a:schemeClr val="accent1"/>
-          </a:lnRef>
-          <a:fillRef idx="3">
-            <a:schemeClr val="accent1"/>
-          </a:fillRef>
-          <a:effectRef idx="2">
-            <a:schemeClr val="accent1"/>
-          </a:effectRef>
-          <a:fontRef idx="minor">
-            <a:schemeClr val="lt1"/>
-          </a:fontRef>
-        </p:style>
-        <p:txBody>
-          <a:bodyPr rtlCol="0" anchor="ctr"/>
-          <a:lstStyle/>
-          <a:p>
-            <a:pPr algn="ctr"/>
-            <a:endParaRPr/>
+              <a:t>  hide / show each of the 23 relations</a:t>
+            </a:r>
+          </a:p>
+          <a:p>
+            <a:pPr algn="l">
+              <a:spcAft>
+                <a:spcPts val="400"/>
+              </a:spcAft>
+            </a:pPr>
+            <a:r>
+              <a:rPr sz="1600" b="1" dirty="0">
+                <a:solidFill>
+                  <a:srgbClr val="C9A227"/>
+                </a:solidFill>
+                <a:latin typeface="Calibri"/>
+              </a:rPr>
+              <a:t>•  </a:t>
+            </a:r>
+            <a:r>
+              <a:rPr sz="1600" b="1" dirty="0">
+                <a:solidFill>
+                  <a:srgbClr val="1F3A5F"/>
+                </a:solidFill>
+                <a:latin typeface="Calibri"/>
+              </a:rPr>
+              <a:t>Hide individual entities</a:t>
+            </a:r>
+            <a:r>
+              <a:rPr sz="1600" dirty="0">
+                <a:solidFill>
+                  <a:srgbClr val="1A1A1A"/>
+                </a:solidFill>
+                <a:latin typeface="Calibri"/>
+              </a:rPr>
+              <a:t>  with one-click restore</a:t>
+            </a:r>
+          </a:p>
+          <a:p>
+            <a:pPr algn="l">
+              <a:spcAft>
+                <a:spcPts val="400"/>
+              </a:spcAft>
+            </a:pPr>
+            <a:r>
+              <a:rPr sz="1600" b="1" dirty="0">
+                <a:solidFill>
+                  <a:srgbClr val="C9A227"/>
+                </a:solidFill>
+                <a:latin typeface="Calibri"/>
+              </a:rPr>
+              <a:t>•  </a:t>
+            </a:r>
+            <a:r>
+              <a:rPr sz="1600" b="1" dirty="0">
+                <a:solidFill>
+                  <a:srgbClr val="1F3A5F"/>
+                </a:solidFill>
+                <a:latin typeface="Calibri"/>
+              </a:rPr>
+              <a:t>Edge labels</a:t>
+            </a:r>
+            <a:r>
+              <a:rPr sz="1600" dirty="0">
+                <a:solidFill>
+                  <a:srgbClr val="1A1A1A"/>
+                </a:solidFill>
+                <a:latin typeface="Calibri"/>
+              </a:rPr>
+              <a:t>  on hover or always</a:t>
+            </a:r>
+          </a:p>
+          <a:p>
+            <a:pPr algn="l">
+              <a:spcAft>
+                <a:spcPts val="400"/>
+              </a:spcAft>
+            </a:pPr>
+            <a:r>
+              <a:rPr sz="1600" b="1" dirty="0">
+                <a:solidFill>
+                  <a:srgbClr val="C9A227"/>
+                </a:solidFill>
+                <a:latin typeface="Calibri"/>
+              </a:rPr>
+              <a:t>•  </a:t>
+            </a:r>
+            <a:r>
+              <a:rPr sz="1600" b="1" dirty="0">
+                <a:solidFill>
+                  <a:srgbClr val="1F3A5F"/>
+                </a:solidFill>
+                <a:latin typeface="Calibri"/>
+              </a:rPr>
+              <a:t>Date nodes</a:t>
+            </a:r>
+            <a:r>
+              <a:rPr sz="1600" dirty="0">
+                <a:solidFill>
+                  <a:srgbClr val="1A1A1A"/>
+                </a:solidFill>
+                <a:latin typeface="Calibri"/>
+              </a:rPr>
+              <a:t>  on/off — clean ‘paper-ready’ view</a:t>
+            </a:r>
+          </a:p>
+          <a:p>
+            <a:pPr algn="l">
+              <a:spcAft>
+                <a:spcPts val="400"/>
+              </a:spcAft>
+            </a:pPr>
+            <a:r>
+              <a:rPr sz="1600" b="1" dirty="0">
+                <a:solidFill>
+                  <a:srgbClr val="C9A227"/>
+                </a:solidFill>
+                <a:latin typeface="Calibri"/>
+              </a:rPr>
+              <a:t>•  </a:t>
+            </a:r>
+            <a:r>
+              <a:rPr sz="1600" b="1" dirty="0">
+                <a:solidFill>
+                  <a:srgbClr val="1F3A5F"/>
+                </a:solidFill>
+                <a:latin typeface="Calibri"/>
+              </a:rPr>
+              <a:t>Zoom · Fit · PNG</a:t>
+            </a:r>
+            <a:r>
+              <a:rPr sz="1600" dirty="0">
+                <a:solidFill>
+                  <a:srgbClr val="1A1A1A"/>
+                </a:solidFill>
+                <a:latin typeface="Calibri"/>
+              </a:rPr>
+              <a:t>  standard controls in the toolbar</a:t>
+            </a:r>
           </a:p>
         </p:txBody>
       </p:sp>
       <p:sp>
         <p:nvSpPr>
           <p:cNvPr id="8" name="TextBox 7"/>
-          <p:cNvSpPr txBox="1"/>
-          <p:nvPr/>
-        </p:nvSpPr>
-        <p:spPr>
-          <a:xfrm>
-            <a:off x="868680" y="5074920"/>
-            <a:ext cx="10515600" cy="1097280"/>
-          </a:xfrm>
-          <a:prstGeom prst="rect">
-            <a:avLst/>
-          </a:prstGeom>
-          <a:noFill/>
-        </p:spPr>
-        <p:txBody>
-          <a:bodyPr wrap="square">
-            <a:spAutoFit/>
-          </a:bodyPr>
-          <a:lstStyle/>
-          <a:p>
-            <a:r>
-              <a:rPr sz="1400" b="1" dirty="0">
-                <a:solidFill>
-                  <a:srgbClr val="C9A227"/>
-                </a:solidFill>
-                <a:latin typeface="Calibri"/>
-              </a:rPr>
-              <a:t>Use case</a:t>
-            </a:r>
-          </a:p>
-          <a:p>
-            <a:r>
-              <a:rPr sz="1500" dirty="0">
-                <a:solidFill>
-                  <a:srgbClr val="1A1A1A"/>
-                </a:solidFill>
-                <a:latin typeface="Calibri"/>
-              </a:rPr>
-              <a:t>Scan the big picture at level 1, then open up gradually — without losing the underlying graph.</a:t>
-            </a:r>
-          </a:p>
-        </p:txBody>
-      </p:sp>
-      <p:sp>
-        <p:nvSpPr>
-          <p:cNvPr id="10" name="TextBox 9"/>
           <p:cNvSpPr txBox="1"/>
           <p:nvPr/>
         </p:nvSpPr>
@@ -4351,7 +4260,7 @@
                 </a:solidFill>
                 <a:latin typeface="Calibri"/>
               </a:rPr>
-              <a:t>12 / 19</a:t>
+              <a:t>11 / 19</a:t>
             </a:r>
           </a:p>
         </p:txBody>
@@ -4455,7 +4364,7 @@
                 </a:solidFill>
                 <a:latin typeface="Calibri"/>
               </a:rPr>
-              <a:t>RESULTS</a:t>
+              <a:t>UI</a:t>
             </a:r>
           </a:p>
         </p:txBody>
@@ -4490,7 +4399,7 @@
                 </a:solidFill>
                 <a:latin typeface="Calibri"/>
               </a:rPr>
-              <a:t>Evaluation — Three Passages</a:t>
+              <a:t>Importance-Ranked Complexity Slider</a:t>
             </a:r>
           </a:p>
         </p:txBody>
@@ -4541,24 +4450,184 @@
       </p:sp>
       <p:sp>
         <p:nvSpPr>
-          <p:cNvPr id="6" name="Rectangle 5"/>
+          <p:cNvPr id="6" name="TextBox 5"/>
+          <p:cNvSpPr txBox="1"/>
+          <p:nvPr/>
+        </p:nvSpPr>
+        <p:spPr>
+          <a:xfrm>
+            <a:off x="548640" y="1828800"/>
+            <a:ext cx="11064240" cy="1179810"/>
+          </a:xfrm>
+          <a:prstGeom prst="rect">
+            <a:avLst/>
+          </a:prstGeom>
+          <a:noFill/>
+        </p:spPr>
+        <p:txBody>
+          <a:bodyPr wrap="square" lIns="0">
+            <a:spAutoFit/>
+          </a:bodyPr>
+          <a:lstStyle/>
+          <a:p>
+            <a:pPr algn="l">
+              <a:spcAft>
+                <a:spcPts val="1000"/>
+              </a:spcAft>
+            </a:pPr>
+            <a:r>
+              <a:rPr sz="1800" b="1" dirty="0">
+                <a:solidFill>
+                  <a:srgbClr val="C9A227"/>
+                </a:solidFill>
+                <a:latin typeface="Calibri"/>
+              </a:rPr>
+              <a:t>•  </a:t>
+            </a:r>
+            <a:r>
+              <a:rPr sz="1800" b="1" dirty="0">
+                <a:solidFill>
+                  <a:srgbClr val="1F3A5F"/>
+                </a:solidFill>
+                <a:latin typeface="Calibri"/>
+              </a:rPr>
+              <a:t>Node score</a:t>
+            </a:r>
+            <a:r>
+              <a:rPr sz="1800" dirty="0">
+                <a:solidFill>
+                  <a:srgbClr val="1A1A1A"/>
+                </a:solidFill>
+                <a:latin typeface="Calibri"/>
+              </a:rPr>
+              <a:t>  </a:t>
+            </a:r>
+            <a:r>
+              <a:rPr sz="1800" dirty="0" err="1">
+                <a:solidFill>
+                  <a:srgbClr val="1A1A1A"/>
+                </a:solidFill>
+                <a:latin typeface="Calibri"/>
+              </a:rPr>
+              <a:t>score</a:t>
+            </a:r>
+            <a:r>
+              <a:rPr sz="1800" dirty="0">
+                <a:solidFill>
+                  <a:srgbClr val="1A1A1A"/>
+                </a:solidFill>
+                <a:latin typeface="Calibri"/>
+              </a:rPr>
+              <a:t> = degree + 2 × </a:t>
+            </a:r>
+            <a:r>
+              <a:rPr sz="1800" dirty="0" err="1">
+                <a:solidFill>
+                  <a:srgbClr val="1A1A1A"/>
+                </a:solidFill>
+                <a:latin typeface="Calibri"/>
+              </a:rPr>
+              <a:t>mention_count</a:t>
+            </a:r>
+            <a:endParaRPr sz="1800" dirty="0">
+              <a:solidFill>
+                <a:srgbClr val="1A1A1A"/>
+              </a:solidFill>
+              <a:latin typeface="Calibri"/>
+            </a:endParaRPr>
+          </a:p>
+          <a:p>
+            <a:pPr algn="l">
+              <a:spcAft>
+                <a:spcPts val="1000"/>
+              </a:spcAft>
+            </a:pPr>
+            <a:r>
+              <a:rPr sz="1800" b="1" dirty="0">
+                <a:solidFill>
+                  <a:srgbClr val="C9A227"/>
+                </a:solidFill>
+                <a:latin typeface="Calibri"/>
+              </a:rPr>
+              <a:t>•  </a:t>
+            </a:r>
+            <a:r>
+              <a:rPr sz="1800" b="1" dirty="0">
+                <a:solidFill>
+                  <a:srgbClr val="1F3A5F"/>
+                </a:solidFill>
+                <a:latin typeface="Calibri"/>
+              </a:rPr>
+              <a:t>Level 1</a:t>
+            </a:r>
+            <a:r>
+              <a:rPr sz="1800" dirty="0">
+                <a:solidFill>
+                  <a:srgbClr val="1A1A1A"/>
+                </a:solidFill>
+                <a:latin typeface="Calibri"/>
+              </a:rPr>
+              <a:t>  only the most central + most-mentioned entities</a:t>
+            </a:r>
+          </a:p>
+          <a:p>
+            <a:pPr algn="l">
+              <a:spcAft>
+                <a:spcPts val="1000"/>
+              </a:spcAft>
+            </a:pPr>
+            <a:r>
+              <a:rPr sz="1800" b="1" dirty="0">
+                <a:solidFill>
+                  <a:srgbClr val="C9A227"/>
+                </a:solidFill>
+                <a:latin typeface="Calibri"/>
+              </a:rPr>
+              <a:t>•  </a:t>
+            </a:r>
+            <a:r>
+              <a:rPr sz="1800" b="1" dirty="0">
+                <a:solidFill>
+                  <a:srgbClr val="1F3A5F"/>
+                </a:solidFill>
+                <a:latin typeface="Calibri"/>
+              </a:rPr>
+              <a:t>Max level</a:t>
+            </a:r>
+            <a:r>
+              <a:rPr sz="1800" dirty="0">
+                <a:solidFill>
+                  <a:srgbClr val="1A1A1A"/>
+                </a:solidFill>
+                <a:latin typeface="Calibri"/>
+              </a:rPr>
+              <a:t>  the full graph</a:t>
+            </a:r>
+          </a:p>
+        </p:txBody>
+      </p:sp>
+      <p:sp>
+        <p:nvSpPr>
+          <p:cNvPr id="7" name="Rounded Rectangle 6"/>
           <p:cNvSpPr/>
           <p:nvPr/>
         </p:nvSpPr>
         <p:spPr>
           <a:xfrm>
-            <a:off x="548640" y="1828800"/>
-            <a:ext cx="4297680" cy="502920"/>
-          </a:xfrm>
-          <a:prstGeom prst="rect">
-            <a:avLst/>
+            <a:off x="548640" y="4937760"/>
+            <a:ext cx="11064240" cy="1280160"/>
+          </a:xfrm>
+          <a:prstGeom prst="roundRect">
+            <a:avLst>
+              <a:gd name="adj" fmla="val 6000"/>
+            </a:avLst>
           </a:prstGeom>
           <a:solidFill>
-            <a:srgbClr val="1F3A5F"/>
+            <a:srgbClr val="F4F1EA"/>
           </a:solidFill>
           <a:ln w="6350">
             <a:solidFill>
-              <a:srgbClr val="1F3A5F"/>
+              <a:srgbClr val="E3DED3"/>
             </a:solidFill>
           </a:ln>
         </p:spPr>
@@ -4577,665 +4646,24 @@
           </a:fontRef>
         </p:style>
         <p:txBody>
-          <a:bodyPr lIns="76200" rIns="76200" rtlCol="0" anchor="ctr"/>
-          <a:lstStyle/>
-          <a:p>
-            <a:pPr algn="l"/>
-            <a:r>
-              <a:rPr sz="1400" b="1">
-                <a:solidFill>
-                  <a:srgbClr val="FFFFFF"/>
-                </a:solidFill>
-                <a:latin typeface="Calibri"/>
-              </a:rPr>
-              <a:t>Passage</a:t>
-            </a:r>
-          </a:p>
-        </p:txBody>
-      </p:sp>
-      <p:sp>
-        <p:nvSpPr>
-          <p:cNvPr id="7" name="Rectangle 6"/>
-          <p:cNvSpPr/>
-          <p:nvPr/>
-        </p:nvSpPr>
-        <p:spPr>
-          <a:xfrm>
-            <a:off x="4846320" y="1828800"/>
-            <a:ext cx="1554480" cy="502920"/>
-          </a:xfrm>
-          <a:prstGeom prst="rect">
-            <a:avLst/>
-          </a:prstGeom>
-          <a:solidFill>
-            <a:srgbClr val="1F3A5F"/>
-          </a:solidFill>
-          <a:ln w="6350">
-            <a:solidFill>
-              <a:srgbClr val="1F3A5F"/>
-            </a:solidFill>
-          </a:ln>
-        </p:spPr>
-        <p:style>
-          <a:lnRef idx="1">
-            <a:schemeClr val="accent1"/>
-          </a:lnRef>
-          <a:fillRef idx="3">
-            <a:schemeClr val="accent1"/>
-          </a:fillRef>
-          <a:effectRef idx="2">
-            <a:schemeClr val="accent1"/>
-          </a:effectRef>
-          <a:fontRef idx="minor">
-            <a:schemeClr val="lt1"/>
-          </a:fontRef>
-        </p:style>
-        <p:txBody>
-          <a:bodyPr lIns="76200" rIns="76200" rtlCol="0" anchor="ctr"/>
+          <a:bodyPr rtlCol="0" anchor="ctr"/>
           <a:lstStyle/>
           <a:p>
             <a:pPr algn="ctr"/>
-            <a:r>
-              <a:rPr sz="1400" b="1">
-                <a:solidFill>
-                  <a:srgbClr val="FFFFFF"/>
-                </a:solidFill>
-                <a:latin typeface="Calibri"/>
-              </a:rPr>
-              <a:t>Entities</a:t>
-            </a:r>
-          </a:p>
-        </p:txBody>
-      </p:sp>
-      <p:sp>
-        <p:nvSpPr>
-          <p:cNvPr id="8" name="Rectangle 7"/>
-          <p:cNvSpPr/>
-          <p:nvPr/>
-        </p:nvSpPr>
-        <p:spPr>
-          <a:xfrm>
-            <a:off x="6400800" y="1828800"/>
-            <a:ext cx="1554480" cy="502920"/>
-          </a:xfrm>
-          <a:prstGeom prst="rect">
-            <a:avLst/>
-          </a:prstGeom>
-          <a:solidFill>
-            <a:srgbClr val="1F3A5F"/>
-          </a:solidFill>
-          <a:ln w="6350">
-            <a:solidFill>
-              <a:srgbClr val="1F3A5F"/>
-            </a:solidFill>
-          </a:ln>
-        </p:spPr>
-        <p:style>
-          <a:lnRef idx="1">
-            <a:schemeClr val="accent1"/>
-          </a:lnRef>
-          <a:fillRef idx="3">
-            <a:schemeClr val="accent1"/>
-          </a:fillRef>
-          <a:effectRef idx="2">
-            <a:schemeClr val="accent1"/>
-          </a:effectRef>
-          <a:fontRef idx="minor">
-            <a:schemeClr val="lt1"/>
-          </a:fontRef>
-        </p:style>
-        <p:txBody>
-          <a:bodyPr lIns="76200" rIns="76200" rtlCol="0" anchor="ctr"/>
-          <a:lstStyle/>
-          <a:p>
-            <a:pPr algn="ctr"/>
-            <a:r>
-              <a:rPr sz="1400" b="1">
-                <a:solidFill>
-                  <a:srgbClr val="FFFFFF"/>
-                </a:solidFill>
-                <a:latin typeface="Calibri"/>
-              </a:rPr>
-              <a:t>Edges</a:t>
-            </a:r>
-          </a:p>
-        </p:txBody>
-      </p:sp>
-      <p:sp>
-        <p:nvSpPr>
-          <p:cNvPr id="11" name="Rectangle 10"/>
-          <p:cNvSpPr/>
-          <p:nvPr/>
-        </p:nvSpPr>
-        <p:spPr>
-          <a:xfrm>
-            <a:off x="548640" y="2331720"/>
-            <a:ext cx="4297680" cy="502920"/>
-          </a:xfrm>
-          <a:prstGeom prst="rect">
-            <a:avLst/>
-          </a:prstGeom>
-          <a:solidFill>
-            <a:srgbClr val="F4F1EA"/>
-          </a:solidFill>
-          <a:ln w="6350">
-            <a:solidFill>
-              <a:srgbClr val="1F3A5F"/>
-            </a:solidFill>
-          </a:ln>
-        </p:spPr>
-        <p:style>
-          <a:lnRef idx="1">
-            <a:schemeClr val="accent1"/>
-          </a:lnRef>
-          <a:fillRef idx="3">
-            <a:schemeClr val="accent1"/>
-          </a:fillRef>
-          <a:effectRef idx="2">
-            <a:schemeClr val="accent1"/>
-          </a:effectRef>
-          <a:fontRef idx="minor">
-            <a:schemeClr val="lt1"/>
-          </a:fontRef>
-        </p:style>
-        <p:txBody>
-          <a:bodyPr lIns="76200" rIns="76200" rtlCol="0" anchor="ctr"/>
-          <a:lstStyle/>
-          <a:p>
-            <a:pPr algn="l"/>
-            <a:r>
-              <a:rPr sz="1400" b="1">
-                <a:solidFill>
-                  <a:srgbClr val="1A1A1A"/>
-                </a:solidFill>
-                <a:latin typeface="Calibri"/>
-              </a:rPr>
-              <a:t>Microsoft (short, 4 sentences)</a:t>
-            </a:r>
-          </a:p>
-        </p:txBody>
-      </p:sp>
-      <p:sp>
-        <p:nvSpPr>
-          <p:cNvPr id="12" name="Rectangle 11"/>
-          <p:cNvSpPr/>
-          <p:nvPr/>
-        </p:nvSpPr>
-        <p:spPr>
-          <a:xfrm>
-            <a:off x="4846320" y="2331720"/>
-            <a:ext cx="1554480" cy="502920"/>
-          </a:xfrm>
-          <a:prstGeom prst="rect">
-            <a:avLst/>
-          </a:prstGeom>
-          <a:solidFill>
-            <a:srgbClr val="F4F1EA"/>
-          </a:solidFill>
-          <a:ln w="6350">
-            <a:solidFill>
-              <a:srgbClr val="1F3A5F"/>
-            </a:solidFill>
-          </a:ln>
-        </p:spPr>
-        <p:style>
-          <a:lnRef idx="1">
-            <a:schemeClr val="accent1"/>
-          </a:lnRef>
-          <a:fillRef idx="3">
-            <a:schemeClr val="accent1"/>
-          </a:fillRef>
-          <a:effectRef idx="2">
-            <a:schemeClr val="accent1"/>
-          </a:effectRef>
-          <a:fontRef idx="minor">
-            <a:schemeClr val="lt1"/>
-          </a:fontRef>
-        </p:style>
-        <p:txBody>
-          <a:bodyPr lIns="76200" rIns="76200" rtlCol="0" anchor="ctr"/>
-          <a:lstStyle/>
-          <a:p>
-            <a:pPr algn="ctr"/>
-            <a:r>
-              <a:rPr sz="1400" b="0">
-                <a:solidFill>
-                  <a:srgbClr val="1A1A1A"/>
-                </a:solidFill>
-                <a:latin typeface="Calibri"/>
-              </a:rPr>
-              <a:t>6</a:t>
-            </a:r>
-          </a:p>
-        </p:txBody>
-      </p:sp>
-      <p:sp>
-        <p:nvSpPr>
-          <p:cNvPr id="13" name="Rectangle 12"/>
-          <p:cNvSpPr/>
-          <p:nvPr/>
-        </p:nvSpPr>
-        <p:spPr>
-          <a:xfrm>
-            <a:off x="6400800" y="2331720"/>
-            <a:ext cx="1554480" cy="502920"/>
-          </a:xfrm>
-          <a:prstGeom prst="rect">
-            <a:avLst/>
-          </a:prstGeom>
-          <a:solidFill>
-            <a:srgbClr val="F4F1EA"/>
-          </a:solidFill>
-          <a:ln w="6350">
-            <a:solidFill>
-              <a:srgbClr val="1F3A5F"/>
-            </a:solidFill>
-          </a:ln>
-        </p:spPr>
-        <p:style>
-          <a:lnRef idx="1">
-            <a:schemeClr val="accent1"/>
-          </a:lnRef>
-          <a:fillRef idx="3">
-            <a:schemeClr val="accent1"/>
-          </a:fillRef>
-          <a:effectRef idx="2">
-            <a:schemeClr val="accent1"/>
-          </a:effectRef>
-          <a:fontRef idx="minor">
-            <a:schemeClr val="lt1"/>
-          </a:fontRef>
-        </p:style>
-        <p:txBody>
-          <a:bodyPr lIns="76200" rIns="76200" rtlCol="0" anchor="ctr"/>
-          <a:lstStyle/>
-          <a:p>
-            <a:pPr algn="ctr"/>
-            <a:r>
-              <a:rPr sz="1400" b="0">
-                <a:solidFill>
-                  <a:srgbClr val="1A1A1A"/>
-                </a:solidFill>
-                <a:latin typeface="Calibri"/>
-              </a:rPr>
-              <a:t>5</a:t>
-            </a:r>
-          </a:p>
-        </p:txBody>
-      </p:sp>
-      <p:sp>
-        <p:nvSpPr>
-          <p:cNvPr id="16" name="Rectangle 15"/>
-          <p:cNvSpPr/>
-          <p:nvPr/>
-        </p:nvSpPr>
-        <p:spPr>
-          <a:xfrm>
-            <a:off x="548640" y="2834640"/>
-            <a:ext cx="4297680" cy="502920"/>
-          </a:xfrm>
-          <a:prstGeom prst="rect">
-            <a:avLst/>
-          </a:prstGeom>
-          <a:solidFill>
-            <a:srgbClr val="FFFFFF"/>
-          </a:solidFill>
-          <a:ln w="6350">
-            <a:solidFill>
-              <a:srgbClr val="1F3A5F"/>
-            </a:solidFill>
-          </a:ln>
-        </p:spPr>
-        <p:style>
-          <a:lnRef idx="1">
-            <a:schemeClr val="accent1"/>
-          </a:lnRef>
-          <a:fillRef idx="3">
-            <a:schemeClr val="accent1"/>
-          </a:fillRef>
-          <a:effectRef idx="2">
-            <a:schemeClr val="accent1"/>
-          </a:effectRef>
-          <a:fontRef idx="minor">
-            <a:schemeClr val="lt1"/>
-          </a:fontRef>
-        </p:style>
-        <p:txBody>
-          <a:bodyPr lIns="76200" rIns="76200" rtlCol="0" anchor="ctr"/>
-          <a:lstStyle/>
-          <a:p>
-            <a:pPr algn="l"/>
-            <a:r>
-              <a:rPr lang="en-US" sz="1400" b="1" dirty="0">
-                <a:solidFill>
-                  <a:srgbClr val="1A1A1A"/>
-                </a:solidFill>
-                <a:latin typeface="Calibri"/>
-              </a:rPr>
-              <a:t>Climate Science </a:t>
-            </a:r>
-            <a:r>
-              <a:rPr sz="1400" b="1" dirty="0">
-                <a:solidFill>
-                  <a:srgbClr val="1A1A1A"/>
-                </a:solidFill>
-                <a:latin typeface="Calibri"/>
-              </a:rPr>
-              <a:t>(</a:t>
-            </a:r>
-            <a:r>
-              <a:rPr lang="en-US" sz="1400" b="1" dirty="0">
-                <a:solidFill>
-                  <a:srgbClr val="1A1A1A"/>
-                </a:solidFill>
-                <a:latin typeface="Calibri"/>
-              </a:rPr>
-              <a:t>Concept heavy</a:t>
-            </a:r>
-            <a:r>
-              <a:rPr sz="1400" b="1" dirty="0">
-                <a:solidFill>
-                  <a:srgbClr val="1A1A1A"/>
-                </a:solidFill>
-                <a:latin typeface="Calibri"/>
-              </a:rPr>
-              <a:t>)</a:t>
-            </a:r>
-          </a:p>
-        </p:txBody>
-      </p:sp>
-      <p:sp>
-        <p:nvSpPr>
-          <p:cNvPr id="17" name="Rectangle 16"/>
-          <p:cNvSpPr/>
-          <p:nvPr/>
-        </p:nvSpPr>
-        <p:spPr>
-          <a:xfrm>
-            <a:off x="4846320" y="2834640"/>
-            <a:ext cx="1554480" cy="502920"/>
-          </a:xfrm>
-          <a:prstGeom prst="rect">
-            <a:avLst/>
-          </a:prstGeom>
-          <a:solidFill>
-            <a:srgbClr val="FFFFFF"/>
-          </a:solidFill>
-          <a:ln w="6350">
-            <a:solidFill>
-              <a:srgbClr val="1F3A5F"/>
-            </a:solidFill>
-          </a:ln>
-        </p:spPr>
-        <p:style>
-          <a:lnRef idx="1">
-            <a:schemeClr val="accent1"/>
-          </a:lnRef>
-          <a:fillRef idx="3">
-            <a:schemeClr val="accent1"/>
-          </a:fillRef>
-          <a:effectRef idx="2">
-            <a:schemeClr val="accent1"/>
-          </a:effectRef>
-          <a:fontRef idx="minor">
-            <a:schemeClr val="lt1"/>
-          </a:fontRef>
-        </p:style>
-        <p:txBody>
-          <a:bodyPr lIns="76200" rIns="76200" rtlCol="0" anchor="ctr"/>
-          <a:lstStyle/>
-          <a:p>
-            <a:pPr algn="ctr"/>
-            <a:r>
-              <a:rPr lang="en-US" sz="1400" b="0" dirty="0">
-                <a:solidFill>
-                  <a:srgbClr val="1A1A1A"/>
-                </a:solidFill>
-                <a:latin typeface="Calibri"/>
-              </a:rPr>
-              <a:t>25</a:t>
-            </a:r>
-            <a:endParaRPr sz="1400" b="0" dirty="0">
-              <a:solidFill>
-                <a:srgbClr val="1A1A1A"/>
-              </a:solidFill>
-              <a:latin typeface="Calibri"/>
-            </a:endParaRPr>
-          </a:p>
-        </p:txBody>
-      </p:sp>
-      <p:sp>
-        <p:nvSpPr>
-          <p:cNvPr id="18" name="Rectangle 17"/>
-          <p:cNvSpPr/>
-          <p:nvPr/>
-        </p:nvSpPr>
-        <p:spPr>
-          <a:xfrm>
-            <a:off x="6400800" y="2834640"/>
-            <a:ext cx="1554480" cy="502920"/>
-          </a:xfrm>
-          <a:prstGeom prst="rect">
-            <a:avLst/>
-          </a:prstGeom>
-          <a:solidFill>
-            <a:srgbClr val="FFFFFF"/>
-          </a:solidFill>
-          <a:ln w="6350">
-            <a:solidFill>
-              <a:srgbClr val="1F3A5F"/>
-            </a:solidFill>
-          </a:ln>
-        </p:spPr>
-        <p:style>
-          <a:lnRef idx="1">
-            <a:schemeClr val="accent1"/>
-          </a:lnRef>
-          <a:fillRef idx="3">
-            <a:schemeClr val="accent1"/>
-          </a:fillRef>
-          <a:effectRef idx="2">
-            <a:schemeClr val="accent1"/>
-          </a:effectRef>
-          <a:fontRef idx="minor">
-            <a:schemeClr val="lt1"/>
-          </a:fontRef>
-        </p:style>
-        <p:txBody>
-          <a:bodyPr lIns="76200" rIns="76200" rtlCol="0" anchor="ctr"/>
-          <a:lstStyle/>
-          <a:p>
-            <a:pPr algn="ctr"/>
-            <a:r>
-              <a:rPr lang="en-US" sz="1400" b="0" dirty="0">
-                <a:solidFill>
-                  <a:srgbClr val="1A1A1A"/>
-                </a:solidFill>
-                <a:latin typeface="Calibri"/>
-              </a:rPr>
-              <a:t>20</a:t>
-            </a:r>
-            <a:endParaRPr sz="1400" b="0" dirty="0">
-              <a:solidFill>
-                <a:srgbClr val="1A1A1A"/>
-              </a:solidFill>
-              <a:latin typeface="Calibri"/>
-            </a:endParaRPr>
-          </a:p>
-        </p:txBody>
-      </p:sp>
-      <p:sp>
-        <p:nvSpPr>
-          <p:cNvPr id="21" name="Rectangle 20"/>
-          <p:cNvSpPr/>
-          <p:nvPr/>
-        </p:nvSpPr>
-        <p:spPr>
-          <a:xfrm>
-            <a:off x="548640" y="3337560"/>
-            <a:ext cx="4297680" cy="502920"/>
-          </a:xfrm>
-          <a:prstGeom prst="rect">
-            <a:avLst/>
-          </a:prstGeom>
-          <a:solidFill>
-            <a:srgbClr val="F4F1EA"/>
-          </a:solidFill>
-          <a:ln w="6350">
-            <a:solidFill>
-              <a:srgbClr val="1F3A5F"/>
-            </a:solidFill>
-          </a:ln>
-        </p:spPr>
-        <p:style>
-          <a:lnRef idx="1">
-            <a:schemeClr val="accent1"/>
-          </a:lnRef>
-          <a:fillRef idx="3">
-            <a:schemeClr val="accent1"/>
-          </a:fillRef>
-          <a:effectRef idx="2">
-            <a:schemeClr val="accent1"/>
-          </a:effectRef>
-          <a:fontRef idx="minor">
-            <a:schemeClr val="lt1"/>
-          </a:fontRef>
-        </p:style>
-        <p:txBody>
-          <a:bodyPr lIns="76200" rIns="76200" rtlCol="0" anchor="ctr"/>
-          <a:lstStyle/>
-          <a:p>
-            <a:pPr algn="l"/>
-            <a:r>
-              <a:rPr sz="1400" b="1">
-                <a:solidFill>
-                  <a:srgbClr val="1A1A1A"/>
-                </a:solidFill>
-                <a:latin typeface="Calibri"/>
-              </a:rPr>
-              <a:t>Mark Twain (biographical)</a:t>
-            </a:r>
-          </a:p>
-        </p:txBody>
-      </p:sp>
-      <p:sp>
-        <p:nvSpPr>
-          <p:cNvPr id="22" name="Rectangle 21"/>
-          <p:cNvSpPr/>
-          <p:nvPr/>
-        </p:nvSpPr>
-        <p:spPr>
-          <a:xfrm>
-            <a:off x="4846320" y="3337560"/>
-            <a:ext cx="1554480" cy="502920"/>
-          </a:xfrm>
-          <a:prstGeom prst="rect">
-            <a:avLst/>
-          </a:prstGeom>
-          <a:solidFill>
-            <a:srgbClr val="F4F1EA"/>
-          </a:solidFill>
-          <a:ln w="6350">
-            <a:solidFill>
-              <a:srgbClr val="1F3A5F"/>
-            </a:solidFill>
-          </a:ln>
-        </p:spPr>
-        <p:style>
-          <a:lnRef idx="1">
-            <a:schemeClr val="accent1"/>
-          </a:lnRef>
-          <a:fillRef idx="3">
-            <a:schemeClr val="accent1"/>
-          </a:fillRef>
-          <a:effectRef idx="2">
-            <a:schemeClr val="accent1"/>
-          </a:effectRef>
-          <a:fontRef idx="minor">
-            <a:schemeClr val="lt1"/>
-          </a:fontRef>
-        </p:style>
-        <p:txBody>
-          <a:bodyPr lIns="76200" rIns="76200" rtlCol="0" anchor="ctr"/>
-          <a:lstStyle/>
-          <a:p>
-            <a:pPr algn="ctr"/>
-            <a:r>
-              <a:rPr sz="1400" b="0">
-                <a:solidFill>
-                  <a:srgbClr val="1A1A1A"/>
-                </a:solidFill>
-                <a:latin typeface="Calibri"/>
-              </a:rPr>
-              <a:t>14</a:t>
-            </a:r>
-          </a:p>
-        </p:txBody>
-      </p:sp>
-      <p:sp>
-        <p:nvSpPr>
-          <p:cNvPr id="23" name="Rectangle 22"/>
-          <p:cNvSpPr/>
-          <p:nvPr/>
-        </p:nvSpPr>
-        <p:spPr>
-          <a:xfrm>
-            <a:off x="6400800" y="3337560"/>
-            <a:ext cx="1554480" cy="502920"/>
-          </a:xfrm>
-          <a:prstGeom prst="rect">
-            <a:avLst/>
-          </a:prstGeom>
-          <a:solidFill>
-            <a:srgbClr val="F4F1EA"/>
-          </a:solidFill>
-          <a:ln w="6350">
-            <a:solidFill>
-              <a:srgbClr val="1F3A5F"/>
-            </a:solidFill>
-          </a:ln>
-        </p:spPr>
-        <p:style>
-          <a:lnRef idx="1">
-            <a:schemeClr val="accent1"/>
-          </a:lnRef>
-          <a:fillRef idx="3">
-            <a:schemeClr val="accent1"/>
-          </a:fillRef>
-          <a:effectRef idx="2">
-            <a:schemeClr val="accent1"/>
-          </a:effectRef>
-          <a:fontRef idx="minor">
-            <a:schemeClr val="lt1"/>
-          </a:fontRef>
-        </p:style>
-        <p:txBody>
-          <a:bodyPr lIns="76200" rIns="76200" rtlCol="0" anchor="ctr"/>
-          <a:lstStyle/>
-          <a:p>
-            <a:pPr algn="ctr"/>
-            <a:r>
-              <a:rPr sz="1400" b="0">
-                <a:solidFill>
-                  <a:srgbClr val="1A1A1A"/>
-                </a:solidFill>
-                <a:latin typeface="Calibri"/>
-              </a:rPr>
-              <a:t>17</a:t>
-            </a:r>
-          </a:p>
-        </p:txBody>
-      </p:sp>
-      <p:sp>
-        <p:nvSpPr>
-          <p:cNvPr id="26" name="TextBox 25"/>
+            <a:endParaRPr/>
+          </a:p>
+        </p:txBody>
+      </p:sp>
+      <p:sp>
+        <p:nvSpPr>
+          <p:cNvPr id="8" name="TextBox 7"/>
           <p:cNvSpPr txBox="1"/>
           <p:nvPr/>
         </p:nvSpPr>
         <p:spPr>
           <a:xfrm>
-            <a:off x="548640" y="4297680"/>
-            <a:ext cx="11064240" cy="4389120"/>
+            <a:off x="868680" y="5074920"/>
+            <a:ext cx="10515600" cy="1097280"/>
           </a:xfrm>
           <a:prstGeom prst="rect">
             <a:avLst/>
@@ -5243,25 +4671,22 @@
           <a:noFill/>
         </p:spPr>
         <p:txBody>
-          <a:bodyPr wrap="square" lIns="0">
+          <a:bodyPr wrap="square">
             <a:spAutoFit/>
           </a:bodyPr>
           <a:lstStyle/>
           <a:p>
-            <a:pPr algn="l">
-              <a:spcAft>
-                <a:spcPts val="400"/>
-              </a:spcAft>
-            </a:pPr>
-            <a:r>
-              <a:rPr sz="1500" b="1" dirty="0">
+            <a:r>
+              <a:rPr sz="1400" b="1" dirty="0">
                 <a:solidFill>
                   <a:srgbClr val="C9A227"/>
                 </a:solidFill>
                 <a:latin typeface="Calibri"/>
               </a:rPr>
-              <a:t>•  </a:t>
-            </a:r>
+              <a:t>Use case</a:t>
+            </a:r>
+          </a:p>
+          <a:p>
             <a:r>
               <a:rPr sz="1500" dirty="0">
                 <a:solidFill>
@@ -5269,64 +4694,14 @@
                 </a:solidFill>
                 <a:latin typeface="Calibri"/>
               </a:rPr>
-              <a:t>Short, clear text  →  small, accurate graph</a:t>
-            </a:r>
-          </a:p>
-          <a:p>
-            <a:pPr algn="l">
-              <a:spcAft>
-                <a:spcPts val="400"/>
-              </a:spcAft>
-            </a:pPr>
-            <a:r>
-              <a:rPr sz="1500" b="1" dirty="0">
-                <a:solidFill>
-                  <a:srgbClr val="C9A227"/>
-                </a:solidFill>
-                <a:latin typeface="Calibri"/>
-              </a:rPr>
-              <a:t>•  </a:t>
-            </a:r>
-            <a:r>
-              <a:rPr sz="1500" dirty="0">
-                <a:solidFill>
-                  <a:srgbClr val="1A1A1A"/>
-                </a:solidFill>
-                <a:latin typeface="Calibri"/>
-              </a:rPr>
-              <a:t>Long encyclopedic text  →  complexity slider becomes essential</a:t>
-            </a:r>
-          </a:p>
-          <a:p>
-            <a:pPr algn="l">
-              <a:spcAft>
-                <a:spcPts val="400"/>
-              </a:spcAft>
-            </a:pPr>
-            <a:r>
-              <a:rPr sz="1500" b="1" dirty="0">
-                <a:solidFill>
-                  <a:srgbClr val="C9A227"/>
-                </a:solidFill>
-                <a:latin typeface="Calibri"/>
-              </a:rPr>
-              <a:t>•  </a:t>
-            </a:r>
-            <a:r>
-              <a:rPr sz="1500" dirty="0">
-                <a:solidFill>
-                  <a:srgbClr val="1A1A1A"/>
-                </a:solidFill>
-                <a:latin typeface="Calibri"/>
-              </a:rPr>
-              <a:t>Biographical text  →  aliases and event reification both trigger</a:t>
-            </a:r>
-          </a:p>
-        </p:txBody>
-      </p:sp>
-      <p:sp>
-        <p:nvSpPr>
-          <p:cNvPr id="28" name="TextBox 27"/>
+              <a:t>Scan the big picture at level 1, then open up gradually — without losing the underlying graph.</a:t>
+            </a:r>
+          </a:p>
+        </p:txBody>
+      </p:sp>
+      <p:sp>
+        <p:nvSpPr>
+          <p:cNvPr id="10" name="TextBox 9"/>
           <p:cNvSpPr txBox="1"/>
           <p:nvPr/>
         </p:nvSpPr>
@@ -5354,7 +4729,7 @@
                 </a:solidFill>
                 <a:latin typeface="Calibri"/>
               </a:rPr>
-              <a:t>13 / 19</a:t>
+              <a:t>12 / 19</a:t>
             </a:r>
           </a:p>
         </p:txBody>
@@ -5458,6 +4833,1009 @@
                 </a:solidFill>
                 <a:latin typeface="Calibri"/>
               </a:rPr>
+              <a:t>RESULTS</a:t>
+            </a:r>
+          </a:p>
+        </p:txBody>
+      </p:sp>
+      <p:sp>
+        <p:nvSpPr>
+          <p:cNvPr id="4" name="TextBox 3"/>
+          <p:cNvSpPr txBox="1"/>
+          <p:nvPr/>
+        </p:nvSpPr>
+        <p:spPr>
+          <a:xfrm>
+            <a:off x="457200" y="713232"/>
+            <a:ext cx="11247120" cy="822960"/>
+          </a:xfrm>
+          <a:prstGeom prst="rect">
+            <a:avLst/>
+          </a:prstGeom>
+          <a:noFill/>
+        </p:spPr>
+        <p:txBody>
+          <a:bodyPr wrap="none" lIns="0">
+            <a:spAutoFit/>
+          </a:bodyPr>
+          <a:lstStyle/>
+          <a:p>
+            <a:pPr algn="l"/>
+            <a:r>
+              <a:rPr sz="3000" b="1">
+                <a:solidFill>
+                  <a:srgbClr val="1F3A5F"/>
+                </a:solidFill>
+                <a:latin typeface="Calibri"/>
+              </a:rPr>
+              <a:t>Evaluation — Three Passages</a:t>
+            </a:r>
+          </a:p>
+        </p:txBody>
+      </p:sp>
+      <p:sp>
+        <p:nvSpPr>
+          <p:cNvPr id="5" name="Rectangle 4"/>
+          <p:cNvSpPr/>
+          <p:nvPr/>
+        </p:nvSpPr>
+        <p:spPr>
+          <a:xfrm>
+            <a:off x="502920" y="1508760"/>
+            <a:ext cx="548640" cy="54864"/>
+          </a:xfrm>
+          <a:prstGeom prst="rect">
+            <a:avLst/>
+          </a:prstGeom>
+          <a:solidFill>
+            <a:srgbClr val="C9A227"/>
+          </a:solidFill>
+          <a:ln>
+            <a:noFill/>
+          </a:ln>
+        </p:spPr>
+        <p:style>
+          <a:lnRef idx="1">
+            <a:schemeClr val="accent1"/>
+          </a:lnRef>
+          <a:fillRef idx="3">
+            <a:schemeClr val="accent1"/>
+          </a:fillRef>
+          <a:effectRef idx="2">
+            <a:schemeClr val="accent1"/>
+          </a:effectRef>
+          <a:fontRef idx="minor">
+            <a:schemeClr val="lt1"/>
+          </a:fontRef>
+        </p:style>
+        <p:txBody>
+          <a:bodyPr rtlCol="0" anchor="ctr"/>
+          <a:lstStyle/>
+          <a:p>
+            <a:pPr algn="ctr"/>
+            <a:endParaRPr/>
+          </a:p>
+        </p:txBody>
+      </p:sp>
+      <p:sp>
+        <p:nvSpPr>
+          <p:cNvPr id="6" name="Rectangle 5"/>
+          <p:cNvSpPr/>
+          <p:nvPr/>
+        </p:nvSpPr>
+        <p:spPr>
+          <a:xfrm>
+            <a:off x="548640" y="1828800"/>
+            <a:ext cx="4297680" cy="502920"/>
+          </a:xfrm>
+          <a:prstGeom prst="rect">
+            <a:avLst/>
+          </a:prstGeom>
+          <a:solidFill>
+            <a:srgbClr val="1F3A5F"/>
+          </a:solidFill>
+          <a:ln w="6350">
+            <a:solidFill>
+              <a:srgbClr val="1F3A5F"/>
+            </a:solidFill>
+          </a:ln>
+        </p:spPr>
+        <p:style>
+          <a:lnRef idx="1">
+            <a:schemeClr val="accent1"/>
+          </a:lnRef>
+          <a:fillRef idx="3">
+            <a:schemeClr val="accent1"/>
+          </a:fillRef>
+          <a:effectRef idx="2">
+            <a:schemeClr val="accent1"/>
+          </a:effectRef>
+          <a:fontRef idx="minor">
+            <a:schemeClr val="lt1"/>
+          </a:fontRef>
+        </p:style>
+        <p:txBody>
+          <a:bodyPr lIns="76200" rIns="76200" rtlCol="0" anchor="ctr"/>
+          <a:lstStyle/>
+          <a:p>
+            <a:pPr algn="l"/>
+            <a:r>
+              <a:rPr sz="1400" b="1">
+                <a:solidFill>
+                  <a:srgbClr val="FFFFFF"/>
+                </a:solidFill>
+                <a:latin typeface="Calibri"/>
+              </a:rPr>
+              <a:t>Passage</a:t>
+            </a:r>
+          </a:p>
+        </p:txBody>
+      </p:sp>
+      <p:sp>
+        <p:nvSpPr>
+          <p:cNvPr id="7" name="Rectangle 6"/>
+          <p:cNvSpPr/>
+          <p:nvPr/>
+        </p:nvSpPr>
+        <p:spPr>
+          <a:xfrm>
+            <a:off x="4846320" y="1828800"/>
+            <a:ext cx="1554480" cy="502920"/>
+          </a:xfrm>
+          <a:prstGeom prst="rect">
+            <a:avLst/>
+          </a:prstGeom>
+          <a:solidFill>
+            <a:srgbClr val="1F3A5F"/>
+          </a:solidFill>
+          <a:ln w="6350">
+            <a:solidFill>
+              <a:srgbClr val="1F3A5F"/>
+            </a:solidFill>
+          </a:ln>
+        </p:spPr>
+        <p:style>
+          <a:lnRef idx="1">
+            <a:schemeClr val="accent1"/>
+          </a:lnRef>
+          <a:fillRef idx="3">
+            <a:schemeClr val="accent1"/>
+          </a:fillRef>
+          <a:effectRef idx="2">
+            <a:schemeClr val="accent1"/>
+          </a:effectRef>
+          <a:fontRef idx="minor">
+            <a:schemeClr val="lt1"/>
+          </a:fontRef>
+        </p:style>
+        <p:txBody>
+          <a:bodyPr lIns="76200" rIns="76200" rtlCol="0" anchor="ctr"/>
+          <a:lstStyle/>
+          <a:p>
+            <a:pPr algn="ctr"/>
+            <a:r>
+              <a:rPr sz="1400" b="1">
+                <a:solidFill>
+                  <a:srgbClr val="FFFFFF"/>
+                </a:solidFill>
+                <a:latin typeface="Calibri"/>
+              </a:rPr>
+              <a:t>Entities</a:t>
+            </a:r>
+          </a:p>
+        </p:txBody>
+      </p:sp>
+      <p:sp>
+        <p:nvSpPr>
+          <p:cNvPr id="8" name="Rectangle 7"/>
+          <p:cNvSpPr/>
+          <p:nvPr/>
+        </p:nvSpPr>
+        <p:spPr>
+          <a:xfrm>
+            <a:off x="6400800" y="1828800"/>
+            <a:ext cx="1554480" cy="502920"/>
+          </a:xfrm>
+          <a:prstGeom prst="rect">
+            <a:avLst/>
+          </a:prstGeom>
+          <a:solidFill>
+            <a:srgbClr val="1F3A5F"/>
+          </a:solidFill>
+          <a:ln w="6350">
+            <a:solidFill>
+              <a:srgbClr val="1F3A5F"/>
+            </a:solidFill>
+          </a:ln>
+        </p:spPr>
+        <p:style>
+          <a:lnRef idx="1">
+            <a:schemeClr val="accent1"/>
+          </a:lnRef>
+          <a:fillRef idx="3">
+            <a:schemeClr val="accent1"/>
+          </a:fillRef>
+          <a:effectRef idx="2">
+            <a:schemeClr val="accent1"/>
+          </a:effectRef>
+          <a:fontRef idx="minor">
+            <a:schemeClr val="lt1"/>
+          </a:fontRef>
+        </p:style>
+        <p:txBody>
+          <a:bodyPr lIns="76200" rIns="76200" rtlCol="0" anchor="ctr"/>
+          <a:lstStyle/>
+          <a:p>
+            <a:pPr algn="ctr"/>
+            <a:r>
+              <a:rPr sz="1400" b="1">
+                <a:solidFill>
+                  <a:srgbClr val="FFFFFF"/>
+                </a:solidFill>
+                <a:latin typeface="Calibri"/>
+              </a:rPr>
+              <a:t>Edges</a:t>
+            </a:r>
+          </a:p>
+        </p:txBody>
+      </p:sp>
+      <p:sp>
+        <p:nvSpPr>
+          <p:cNvPr id="11" name="Rectangle 10"/>
+          <p:cNvSpPr/>
+          <p:nvPr/>
+        </p:nvSpPr>
+        <p:spPr>
+          <a:xfrm>
+            <a:off x="548640" y="2331720"/>
+            <a:ext cx="4297680" cy="502920"/>
+          </a:xfrm>
+          <a:prstGeom prst="rect">
+            <a:avLst/>
+          </a:prstGeom>
+          <a:solidFill>
+            <a:srgbClr val="F4F1EA"/>
+          </a:solidFill>
+          <a:ln w="6350">
+            <a:solidFill>
+              <a:srgbClr val="1F3A5F"/>
+            </a:solidFill>
+          </a:ln>
+        </p:spPr>
+        <p:style>
+          <a:lnRef idx="1">
+            <a:schemeClr val="accent1"/>
+          </a:lnRef>
+          <a:fillRef idx="3">
+            <a:schemeClr val="accent1"/>
+          </a:fillRef>
+          <a:effectRef idx="2">
+            <a:schemeClr val="accent1"/>
+          </a:effectRef>
+          <a:fontRef idx="minor">
+            <a:schemeClr val="lt1"/>
+          </a:fontRef>
+        </p:style>
+        <p:txBody>
+          <a:bodyPr lIns="76200" rIns="76200" rtlCol="0" anchor="ctr"/>
+          <a:lstStyle/>
+          <a:p>
+            <a:pPr algn="l"/>
+            <a:r>
+              <a:rPr sz="1400" b="1">
+                <a:solidFill>
+                  <a:srgbClr val="1A1A1A"/>
+                </a:solidFill>
+                <a:latin typeface="Calibri"/>
+              </a:rPr>
+              <a:t>Microsoft (short, 4 sentences)</a:t>
+            </a:r>
+          </a:p>
+        </p:txBody>
+      </p:sp>
+      <p:sp>
+        <p:nvSpPr>
+          <p:cNvPr id="12" name="Rectangle 11"/>
+          <p:cNvSpPr/>
+          <p:nvPr/>
+        </p:nvSpPr>
+        <p:spPr>
+          <a:xfrm>
+            <a:off x="4846320" y="2331720"/>
+            <a:ext cx="1554480" cy="502920"/>
+          </a:xfrm>
+          <a:prstGeom prst="rect">
+            <a:avLst/>
+          </a:prstGeom>
+          <a:solidFill>
+            <a:srgbClr val="F4F1EA"/>
+          </a:solidFill>
+          <a:ln w="6350">
+            <a:solidFill>
+              <a:srgbClr val="1F3A5F"/>
+            </a:solidFill>
+          </a:ln>
+        </p:spPr>
+        <p:style>
+          <a:lnRef idx="1">
+            <a:schemeClr val="accent1"/>
+          </a:lnRef>
+          <a:fillRef idx="3">
+            <a:schemeClr val="accent1"/>
+          </a:fillRef>
+          <a:effectRef idx="2">
+            <a:schemeClr val="accent1"/>
+          </a:effectRef>
+          <a:fontRef idx="minor">
+            <a:schemeClr val="lt1"/>
+          </a:fontRef>
+        </p:style>
+        <p:txBody>
+          <a:bodyPr lIns="76200" rIns="76200" rtlCol="0" anchor="ctr"/>
+          <a:lstStyle/>
+          <a:p>
+            <a:pPr algn="ctr"/>
+            <a:r>
+              <a:rPr sz="1400" b="0">
+                <a:solidFill>
+                  <a:srgbClr val="1A1A1A"/>
+                </a:solidFill>
+                <a:latin typeface="Calibri"/>
+              </a:rPr>
+              <a:t>6</a:t>
+            </a:r>
+          </a:p>
+        </p:txBody>
+      </p:sp>
+      <p:sp>
+        <p:nvSpPr>
+          <p:cNvPr id="13" name="Rectangle 12"/>
+          <p:cNvSpPr/>
+          <p:nvPr/>
+        </p:nvSpPr>
+        <p:spPr>
+          <a:xfrm>
+            <a:off x="6400800" y="2331720"/>
+            <a:ext cx="1554480" cy="502920"/>
+          </a:xfrm>
+          <a:prstGeom prst="rect">
+            <a:avLst/>
+          </a:prstGeom>
+          <a:solidFill>
+            <a:srgbClr val="F4F1EA"/>
+          </a:solidFill>
+          <a:ln w="6350">
+            <a:solidFill>
+              <a:srgbClr val="1F3A5F"/>
+            </a:solidFill>
+          </a:ln>
+        </p:spPr>
+        <p:style>
+          <a:lnRef idx="1">
+            <a:schemeClr val="accent1"/>
+          </a:lnRef>
+          <a:fillRef idx="3">
+            <a:schemeClr val="accent1"/>
+          </a:fillRef>
+          <a:effectRef idx="2">
+            <a:schemeClr val="accent1"/>
+          </a:effectRef>
+          <a:fontRef idx="minor">
+            <a:schemeClr val="lt1"/>
+          </a:fontRef>
+        </p:style>
+        <p:txBody>
+          <a:bodyPr lIns="76200" rIns="76200" rtlCol="0" anchor="ctr"/>
+          <a:lstStyle/>
+          <a:p>
+            <a:pPr algn="ctr"/>
+            <a:r>
+              <a:rPr sz="1400" b="0">
+                <a:solidFill>
+                  <a:srgbClr val="1A1A1A"/>
+                </a:solidFill>
+                <a:latin typeface="Calibri"/>
+              </a:rPr>
+              <a:t>5</a:t>
+            </a:r>
+          </a:p>
+        </p:txBody>
+      </p:sp>
+      <p:sp>
+        <p:nvSpPr>
+          <p:cNvPr id="16" name="Rectangle 15"/>
+          <p:cNvSpPr/>
+          <p:nvPr/>
+        </p:nvSpPr>
+        <p:spPr>
+          <a:xfrm>
+            <a:off x="548640" y="2834640"/>
+            <a:ext cx="4297680" cy="502920"/>
+          </a:xfrm>
+          <a:prstGeom prst="rect">
+            <a:avLst/>
+          </a:prstGeom>
+          <a:solidFill>
+            <a:srgbClr val="FFFFFF"/>
+          </a:solidFill>
+          <a:ln w="6350">
+            <a:solidFill>
+              <a:srgbClr val="1F3A5F"/>
+            </a:solidFill>
+          </a:ln>
+        </p:spPr>
+        <p:style>
+          <a:lnRef idx="1">
+            <a:schemeClr val="accent1"/>
+          </a:lnRef>
+          <a:fillRef idx="3">
+            <a:schemeClr val="accent1"/>
+          </a:fillRef>
+          <a:effectRef idx="2">
+            <a:schemeClr val="accent1"/>
+          </a:effectRef>
+          <a:fontRef idx="minor">
+            <a:schemeClr val="lt1"/>
+          </a:fontRef>
+        </p:style>
+        <p:txBody>
+          <a:bodyPr lIns="76200" rIns="76200" rtlCol="0" anchor="ctr"/>
+          <a:lstStyle/>
+          <a:p>
+            <a:pPr algn="l"/>
+            <a:r>
+              <a:rPr lang="en-US" sz="1400" b="1" dirty="0">
+                <a:solidFill>
+                  <a:srgbClr val="1A1A1A"/>
+                </a:solidFill>
+                <a:latin typeface="Calibri"/>
+              </a:rPr>
+              <a:t>Climate Science </a:t>
+            </a:r>
+            <a:r>
+              <a:rPr sz="1400" b="1" dirty="0">
+                <a:solidFill>
+                  <a:srgbClr val="1A1A1A"/>
+                </a:solidFill>
+                <a:latin typeface="Calibri"/>
+              </a:rPr>
+              <a:t>(</a:t>
+            </a:r>
+            <a:r>
+              <a:rPr lang="en-US" sz="1400" b="1" dirty="0">
+                <a:solidFill>
+                  <a:srgbClr val="1A1A1A"/>
+                </a:solidFill>
+                <a:latin typeface="Calibri"/>
+              </a:rPr>
+              <a:t>Concept heavy</a:t>
+            </a:r>
+            <a:r>
+              <a:rPr sz="1400" b="1" dirty="0">
+                <a:solidFill>
+                  <a:srgbClr val="1A1A1A"/>
+                </a:solidFill>
+                <a:latin typeface="Calibri"/>
+              </a:rPr>
+              <a:t>)</a:t>
+            </a:r>
+          </a:p>
+        </p:txBody>
+      </p:sp>
+      <p:sp>
+        <p:nvSpPr>
+          <p:cNvPr id="17" name="Rectangle 16"/>
+          <p:cNvSpPr/>
+          <p:nvPr/>
+        </p:nvSpPr>
+        <p:spPr>
+          <a:xfrm>
+            <a:off x="4846320" y="2834640"/>
+            <a:ext cx="1554480" cy="502920"/>
+          </a:xfrm>
+          <a:prstGeom prst="rect">
+            <a:avLst/>
+          </a:prstGeom>
+          <a:solidFill>
+            <a:srgbClr val="FFFFFF"/>
+          </a:solidFill>
+          <a:ln w="6350">
+            <a:solidFill>
+              <a:srgbClr val="1F3A5F"/>
+            </a:solidFill>
+          </a:ln>
+        </p:spPr>
+        <p:style>
+          <a:lnRef idx="1">
+            <a:schemeClr val="accent1"/>
+          </a:lnRef>
+          <a:fillRef idx="3">
+            <a:schemeClr val="accent1"/>
+          </a:fillRef>
+          <a:effectRef idx="2">
+            <a:schemeClr val="accent1"/>
+          </a:effectRef>
+          <a:fontRef idx="minor">
+            <a:schemeClr val="lt1"/>
+          </a:fontRef>
+        </p:style>
+        <p:txBody>
+          <a:bodyPr lIns="76200" rIns="76200" rtlCol="0" anchor="ctr"/>
+          <a:lstStyle/>
+          <a:p>
+            <a:pPr algn="ctr"/>
+            <a:r>
+              <a:rPr lang="en-US" sz="1400" b="0" dirty="0">
+                <a:solidFill>
+                  <a:srgbClr val="1A1A1A"/>
+                </a:solidFill>
+                <a:latin typeface="Calibri"/>
+              </a:rPr>
+              <a:t>25</a:t>
+            </a:r>
+            <a:endParaRPr sz="1400" b="0" dirty="0">
+              <a:solidFill>
+                <a:srgbClr val="1A1A1A"/>
+              </a:solidFill>
+              <a:latin typeface="Calibri"/>
+            </a:endParaRPr>
+          </a:p>
+        </p:txBody>
+      </p:sp>
+      <p:sp>
+        <p:nvSpPr>
+          <p:cNvPr id="18" name="Rectangle 17"/>
+          <p:cNvSpPr/>
+          <p:nvPr/>
+        </p:nvSpPr>
+        <p:spPr>
+          <a:xfrm>
+            <a:off x="6400800" y="2834640"/>
+            <a:ext cx="1554480" cy="502920"/>
+          </a:xfrm>
+          <a:prstGeom prst="rect">
+            <a:avLst/>
+          </a:prstGeom>
+          <a:solidFill>
+            <a:srgbClr val="FFFFFF"/>
+          </a:solidFill>
+          <a:ln w="6350">
+            <a:solidFill>
+              <a:srgbClr val="1F3A5F"/>
+            </a:solidFill>
+          </a:ln>
+        </p:spPr>
+        <p:style>
+          <a:lnRef idx="1">
+            <a:schemeClr val="accent1"/>
+          </a:lnRef>
+          <a:fillRef idx="3">
+            <a:schemeClr val="accent1"/>
+          </a:fillRef>
+          <a:effectRef idx="2">
+            <a:schemeClr val="accent1"/>
+          </a:effectRef>
+          <a:fontRef idx="minor">
+            <a:schemeClr val="lt1"/>
+          </a:fontRef>
+        </p:style>
+        <p:txBody>
+          <a:bodyPr lIns="76200" rIns="76200" rtlCol="0" anchor="ctr"/>
+          <a:lstStyle/>
+          <a:p>
+            <a:pPr algn="ctr"/>
+            <a:r>
+              <a:rPr lang="en-US" sz="1400" b="0" dirty="0">
+                <a:solidFill>
+                  <a:srgbClr val="1A1A1A"/>
+                </a:solidFill>
+                <a:latin typeface="Calibri"/>
+              </a:rPr>
+              <a:t>20</a:t>
+            </a:r>
+            <a:endParaRPr sz="1400" b="0" dirty="0">
+              <a:solidFill>
+                <a:srgbClr val="1A1A1A"/>
+              </a:solidFill>
+              <a:latin typeface="Calibri"/>
+            </a:endParaRPr>
+          </a:p>
+        </p:txBody>
+      </p:sp>
+      <p:sp>
+        <p:nvSpPr>
+          <p:cNvPr id="21" name="Rectangle 20"/>
+          <p:cNvSpPr/>
+          <p:nvPr/>
+        </p:nvSpPr>
+        <p:spPr>
+          <a:xfrm>
+            <a:off x="548640" y="3337560"/>
+            <a:ext cx="4297680" cy="502920"/>
+          </a:xfrm>
+          <a:prstGeom prst="rect">
+            <a:avLst/>
+          </a:prstGeom>
+          <a:solidFill>
+            <a:srgbClr val="F4F1EA"/>
+          </a:solidFill>
+          <a:ln w="6350">
+            <a:solidFill>
+              <a:srgbClr val="1F3A5F"/>
+            </a:solidFill>
+          </a:ln>
+        </p:spPr>
+        <p:style>
+          <a:lnRef idx="1">
+            <a:schemeClr val="accent1"/>
+          </a:lnRef>
+          <a:fillRef idx="3">
+            <a:schemeClr val="accent1"/>
+          </a:fillRef>
+          <a:effectRef idx="2">
+            <a:schemeClr val="accent1"/>
+          </a:effectRef>
+          <a:fontRef idx="minor">
+            <a:schemeClr val="lt1"/>
+          </a:fontRef>
+        </p:style>
+        <p:txBody>
+          <a:bodyPr lIns="76200" rIns="76200" rtlCol="0" anchor="ctr"/>
+          <a:lstStyle/>
+          <a:p>
+            <a:pPr algn="l"/>
+            <a:r>
+              <a:rPr sz="1400" b="1">
+                <a:solidFill>
+                  <a:srgbClr val="1A1A1A"/>
+                </a:solidFill>
+                <a:latin typeface="Calibri"/>
+              </a:rPr>
+              <a:t>Mark Twain (biographical)</a:t>
+            </a:r>
+          </a:p>
+        </p:txBody>
+      </p:sp>
+      <p:sp>
+        <p:nvSpPr>
+          <p:cNvPr id="22" name="Rectangle 21"/>
+          <p:cNvSpPr/>
+          <p:nvPr/>
+        </p:nvSpPr>
+        <p:spPr>
+          <a:xfrm>
+            <a:off x="4846320" y="3337560"/>
+            <a:ext cx="1554480" cy="502920"/>
+          </a:xfrm>
+          <a:prstGeom prst="rect">
+            <a:avLst/>
+          </a:prstGeom>
+          <a:solidFill>
+            <a:srgbClr val="F4F1EA"/>
+          </a:solidFill>
+          <a:ln w="6350">
+            <a:solidFill>
+              <a:srgbClr val="1F3A5F"/>
+            </a:solidFill>
+          </a:ln>
+        </p:spPr>
+        <p:style>
+          <a:lnRef idx="1">
+            <a:schemeClr val="accent1"/>
+          </a:lnRef>
+          <a:fillRef idx="3">
+            <a:schemeClr val="accent1"/>
+          </a:fillRef>
+          <a:effectRef idx="2">
+            <a:schemeClr val="accent1"/>
+          </a:effectRef>
+          <a:fontRef idx="minor">
+            <a:schemeClr val="lt1"/>
+          </a:fontRef>
+        </p:style>
+        <p:txBody>
+          <a:bodyPr lIns="76200" rIns="76200" rtlCol="0" anchor="ctr"/>
+          <a:lstStyle/>
+          <a:p>
+            <a:pPr algn="ctr"/>
+            <a:r>
+              <a:rPr sz="1400" b="0">
+                <a:solidFill>
+                  <a:srgbClr val="1A1A1A"/>
+                </a:solidFill>
+                <a:latin typeface="Calibri"/>
+              </a:rPr>
+              <a:t>14</a:t>
+            </a:r>
+          </a:p>
+        </p:txBody>
+      </p:sp>
+      <p:sp>
+        <p:nvSpPr>
+          <p:cNvPr id="23" name="Rectangle 22"/>
+          <p:cNvSpPr/>
+          <p:nvPr/>
+        </p:nvSpPr>
+        <p:spPr>
+          <a:xfrm>
+            <a:off x="6400800" y="3337560"/>
+            <a:ext cx="1554480" cy="502920"/>
+          </a:xfrm>
+          <a:prstGeom prst="rect">
+            <a:avLst/>
+          </a:prstGeom>
+          <a:solidFill>
+            <a:srgbClr val="F4F1EA"/>
+          </a:solidFill>
+          <a:ln w="6350">
+            <a:solidFill>
+              <a:srgbClr val="1F3A5F"/>
+            </a:solidFill>
+          </a:ln>
+        </p:spPr>
+        <p:style>
+          <a:lnRef idx="1">
+            <a:schemeClr val="accent1"/>
+          </a:lnRef>
+          <a:fillRef idx="3">
+            <a:schemeClr val="accent1"/>
+          </a:fillRef>
+          <a:effectRef idx="2">
+            <a:schemeClr val="accent1"/>
+          </a:effectRef>
+          <a:fontRef idx="minor">
+            <a:schemeClr val="lt1"/>
+          </a:fontRef>
+        </p:style>
+        <p:txBody>
+          <a:bodyPr lIns="76200" rIns="76200" rtlCol="0" anchor="ctr"/>
+          <a:lstStyle/>
+          <a:p>
+            <a:pPr algn="ctr"/>
+            <a:r>
+              <a:rPr sz="1400" b="0">
+                <a:solidFill>
+                  <a:srgbClr val="1A1A1A"/>
+                </a:solidFill>
+                <a:latin typeface="Calibri"/>
+              </a:rPr>
+              <a:t>17</a:t>
+            </a:r>
+          </a:p>
+        </p:txBody>
+      </p:sp>
+      <p:sp>
+        <p:nvSpPr>
+          <p:cNvPr id="26" name="TextBox 25"/>
+          <p:cNvSpPr txBox="1"/>
+          <p:nvPr/>
+        </p:nvSpPr>
+        <p:spPr>
+          <a:xfrm>
+            <a:off x="548640" y="4297680"/>
+            <a:ext cx="11064240" cy="4389120"/>
+          </a:xfrm>
+          <a:prstGeom prst="rect">
+            <a:avLst/>
+          </a:prstGeom>
+          <a:noFill/>
+        </p:spPr>
+        <p:txBody>
+          <a:bodyPr wrap="square" lIns="0">
+            <a:spAutoFit/>
+          </a:bodyPr>
+          <a:lstStyle/>
+          <a:p>
+            <a:pPr algn="l">
+              <a:spcAft>
+                <a:spcPts val="400"/>
+              </a:spcAft>
+            </a:pPr>
+            <a:r>
+              <a:rPr sz="1500" b="1" dirty="0">
+                <a:solidFill>
+                  <a:srgbClr val="C9A227"/>
+                </a:solidFill>
+                <a:latin typeface="Calibri"/>
+              </a:rPr>
+              <a:t>•  </a:t>
+            </a:r>
+            <a:r>
+              <a:rPr sz="1500" dirty="0">
+                <a:solidFill>
+                  <a:srgbClr val="1A1A1A"/>
+                </a:solidFill>
+                <a:latin typeface="Calibri"/>
+              </a:rPr>
+              <a:t>Short, clear text  →  small, accurate graph</a:t>
+            </a:r>
+          </a:p>
+          <a:p>
+            <a:pPr algn="l">
+              <a:spcAft>
+                <a:spcPts val="400"/>
+              </a:spcAft>
+            </a:pPr>
+            <a:r>
+              <a:rPr sz="1500" b="1" dirty="0">
+                <a:solidFill>
+                  <a:srgbClr val="C9A227"/>
+                </a:solidFill>
+                <a:latin typeface="Calibri"/>
+              </a:rPr>
+              <a:t>•  </a:t>
+            </a:r>
+            <a:r>
+              <a:rPr sz="1500" dirty="0">
+                <a:solidFill>
+                  <a:srgbClr val="1A1A1A"/>
+                </a:solidFill>
+                <a:latin typeface="Calibri"/>
+              </a:rPr>
+              <a:t>Long encyclopedic text  →  complexity slider becomes essential</a:t>
+            </a:r>
+          </a:p>
+          <a:p>
+            <a:pPr algn="l">
+              <a:spcAft>
+                <a:spcPts val="400"/>
+              </a:spcAft>
+            </a:pPr>
+            <a:r>
+              <a:rPr sz="1500" b="1" dirty="0">
+                <a:solidFill>
+                  <a:srgbClr val="C9A227"/>
+                </a:solidFill>
+                <a:latin typeface="Calibri"/>
+              </a:rPr>
+              <a:t>•  </a:t>
+            </a:r>
+            <a:r>
+              <a:rPr sz="1500" dirty="0">
+                <a:solidFill>
+                  <a:srgbClr val="1A1A1A"/>
+                </a:solidFill>
+                <a:latin typeface="Calibri"/>
+              </a:rPr>
+              <a:t>Biographical text  →  aliases and event reification both trigger</a:t>
+            </a:r>
+          </a:p>
+        </p:txBody>
+      </p:sp>
+      <p:sp>
+        <p:nvSpPr>
+          <p:cNvPr id="28" name="TextBox 27"/>
+          <p:cNvSpPr txBox="1"/>
+          <p:nvPr/>
+        </p:nvSpPr>
+        <p:spPr>
+          <a:xfrm>
+            <a:off x="11247120" y="6446520"/>
+            <a:ext cx="822960" cy="320040"/>
+          </a:xfrm>
+          <a:prstGeom prst="rect">
+            <a:avLst/>
+          </a:prstGeom>
+          <a:noFill/>
+        </p:spPr>
+        <p:txBody>
+          <a:bodyPr wrap="none" lIns="0" rIns="0">
+            <a:spAutoFit/>
+          </a:bodyPr>
+          <a:lstStyle/>
+          <a:p>
+            <a:pPr algn="r"/>
+            <a:r>
+              <a:rPr sz="900">
+                <a:solidFill>
+                  <a:srgbClr val="6B6B6B"/>
+                </a:solidFill>
+                <a:latin typeface="Calibri"/>
+              </a:rPr>
+              <a:t>13 / 19</a:t>
+            </a:r>
+          </a:p>
+        </p:txBody>
+      </p:sp>
+    </p:spTree>
+  </p:cSld>
+  <p:clrMapOvr>
+    <a:masterClrMapping/>
+  </p:clrMapOvr>
+</p:sld>
+</file>
+
+<file path=ppt/slides/slide14.xml><?xml version="1.0" encoding="utf-8"?>
+<p:sld xmlns:a="http://schemas.openxmlformats.org/drawingml/2006/main" xmlns:r="http://schemas.openxmlformats.org/officeDocument/2006/relationships" xmlns:p="http://schemas.openxmlformats.org/presentationml/2006/main">
+  <p:cSld>
+    <p:spTree>
+      <p:nvGrpSpPr>
+        <p:cNvPr id="1" name=""/>
+        <p:cNvGrpSpPr/>
+        <p:nvPr/>
+      </p:nvGrpSpPr>
+      <p:grpSpPr>
+        <a:xfrm>
+          <a:off x="0" y="0"/>
+          <a:ext cx="0" cy="0"/>
+          <a:chOff x="0" y="0"/>
+          <a:chExt cx="0" cy="0"/>
+        </a:xfrm>
+      </p:grpSpPr>
+      <p:sp>
+        <p:nvSpPr>
+          <p:cNvPr id="2" name="Rectangle 1"/>
+          <p:cNvSpPr/>
+          <p:nvPr/>
+        </p:nvSpPr>
+        <p:spPr>
+          <a:xfrm>
+            <a:off x="0" y="0"/>
+            <a:ext cx="12191695" cy="164592"/>
+          </a:xfrm>
+          <a:prstGeom prst="rect">
+            <a:avLst/>
+          </a:prstGeom>
+          <a:solidFill>
+            <a:srgbClr val="1F3A5F"/>
+          </a:solidFill>
+          <a:ln>
+            <a:noFill/>
+          </a:ln>
+        </p:spPr>
+        <p:style>
+          <a:lnRef idx="1">
+            <a:schemeClr val="accent1"/>
+          </a:lnRef>
+          <a:fillRef idx="3">
+            <a:schemeClr val="accent1"/>
+          </a:fillRef>
+          <a:effectRef idx="2">
+            <a:schemeClr val="accent1"/>
+          </a:effectRef>
+          <a:fontRef idx="minor">
+            <a:schemeClr val="lt1"/>
+          </a:fontRef>
+        </p:style>
+        <p:txBody>
+          <a:bodyPr rtlCol="0" anchor="ctr"/>
+          <a:lstStyle/>
+          <a:p>
+            <a:pPr algn="ctr"/>
+            <a:endParaRPr/>
+          </a:p>
+        </p:txBody>
+      </p:sp>
+      <p:sp>
+        <p:nvSpPr>
+          <p:cNvPr id="3" name="TextBox 2"/>
+          <p:cNvSpPr txBox="1"/>
+          <p:nvPr/>
+        </p:nvSpPr>
+        <p:spPr>
+          <a:xfrm>
+            <a:off x="502920" y="384048"/>
+            <a:ext cx="10972800" cy="365760"/>
+          </a:xfrm>
+          <a:prstGeom prst="rect">
+            <a:avLst/>
+          </a:prstGeom>
+          <a:noFill/>
+        </p:spPr>
+        <p:txBody>
+          <a:bodyPr wrap="none" lIns="0">
+            <a:spAutoFit/>
+          </a:bodyPr>
+          <a:lstStyle/>
+          <a:p>
+            <a:pPr algn="l"/>
+            <a:r>
+              <a:rPr sz="1100" b="1">
+                <a:solidFill>
+                  <a:srgbClr val="C9A227"/>
+                </a:solidFill>
+                <a:latin typeface="Calibri"/>
+              </a:rPr>
               <a:t>FINDINGS</a:t>
             </a:r>
           </a:p>
@@ -5724,7 +6102,7 @@
 </p:sld>
 </file>
 
-<file path=ppt/slides/slide14.xml><?xml version="1.0" encoding="utf-8"?>
+<file path=ppt/slides/slide15.xml><?xml version="1.0" encoding="utf-8"?>
 <p:sld xmlns:a="http://schemas.openxmlformats.org/drawingml/2006/main" xmlns:r="http://schemas.openxmlformats.org/officeDocument/2006/relationships" xmlns:p="http://schemas.openxmlformats.org/presentationml/2006/main">
   <p:cSld>
     <p:spTree>
@@ -6019,7 +6397,7 @@
 </p:sld>
 </file>
 
-<file path=ppt/slides/slide15.xml><?xml version="1.0" encoding="utf-8"?>
+<file path=ppt/slides/slide16.xml><?xml version="1.0" encoding="utf-8"?>
 <p:sld xmlns:a="http://schemas.openxmlformats.org/drawingml/2006/main" xmlns:r="http://schemas.openxmlformats.org/officeDocument/2006/relationships" xmlns:p="http://schemas.openxmlformats.org/presentationml/2006/main">
   <p:cSld>
     <p:spTree>
@@ -6523,7 +6901,7 @@
 </p:sld>
 </file>
 
-<file path=ppt/slides/slide16.xml><?xml version="1.0" encoding="utf-8"?>
+<file path=ppt/slides/slide17.xml><?xml version="1.0" encoding="utf-8"?>
 <p:sld xmlns:a="http://schemas.openxmlformats.org/drawingml/2006/main" xmlns:r="http://schemas.openxmlformats.org/officeDocument/2006/relationships" xmlns:p="http://schemas.openxmlformats.org/presentationml/2006/main">
   <p:cSld>
     <p:spTree>
@@ -6904,372 +7282,6 @@
         <p14:creationId xmlns:p14="http://schemas.microsoft.com/office/powerpoint/2010/main" val="1127919708"/>
       </p:ext>
     </p:extLst>
-  </p:cSld>
-  <p:clrMapOvr>
-    <a:masterClrMapping/>
-  </p:clrMapOvr>
-</p:sld>
-</file>
-
-<file path=ppt/slides/slide17.xml><?xml version="1.0" encoding="utf-8"?>
-<p:sld xmlns:a="http://schemas.openxmlformats.org/drawingml/2006/main" xmlns:r="http://schemas.openxmlformats.org/officeDocument/2006/relationships" xmlns:p="http://schemas.openxmlformats.org/presentationml/2006/main">
-  <p:cSld>
-    <p:spTree>
-      <p:nvGrpSpPr>
-        <p:cNvPr id="1" name=""/>
-        <p:cNvGrpSpPr/>
-        <p:nvPr/>
-      </p:nvGrpSpPr>
-      <p:grpSpPr>
-        <a:xfrm>
-          <a:off x="0" y="0"/>
-          <a:ext cx="0" cy="0"/>
-          <a:chOff x="0" y="0"/>
-          <a:chExt cx="0" cy="0"/>
-        </a:xfrm>
-      </p:grpSpPr>
-      <p:sp>
-        <p:nvSpPr>
-          <p:cNvPr id="2" name="Rectangle 1"/>
-          <p:cNvSpPr/>
-          <p:nvPr/>
-        </p:nvSpPr>
-        <p:spPr>
-          <a:xfrm>
-            <a:off x="0" y="0"/>
-            <a:ext cx="12191695" cy="164592"/>
-          </a:xfrm>
-          <a:prstGeom prst="rect">
-            <a:avLst/>
-          </a:prstGeom>
-          <a:solidFill>
-            <a:srgbClr val="1F3A5F"/>
-          </a:solidFill>
-          <a:ln>
-            <a:noFill/>
-          </a:ln>
-        </p:spPr>
-        <p:style>
-          <a:lnRef idx="1">
-            <a:schemeClr val="accent1"/>
-          </a:lnRef>
-          <a:fillRef idx="3">
-            <a:schemeClr val="accent1"/>
-          </a:fillRef>
-          <a:effectRef idx="2">
-            <a:schemeClr val="accent1"/>
-          </a:effectRef>
-          <a:fontRef idx="minor">
-            <a:schemeClr val="lt1"/>
-          </a:fontRef>
-        </p:style>
-        <p:txBody>
-          <a:bodyPr rtlCol="0" anchor="ctr"/>
-          <a:lstStyle/>
-          <a:p>
-            <a:pPr algn="ctr"/>
-            <a:endParaRPr/>
-          </a:p>
-        </p:txBody>
-      </p:sp>
-      <p:sp>
-        <p:nvSpPr>
-          <p:cNvPr id="3" name="TextBox 2"/>
-          <p:cNvSpPr txBox="1"/>
-          <p:nvPr/>
-        </p:nvSpPr>
-        <p:spPr>
-          <a:xfrm>
-            <a:off x="502920" y="384048"/>
-            <a:ext cx="10972800" cy="365760"/>
-          </a:xfrm>
-          <a:prstGeom prst="rect">
-            <a:avLst/>
-          </a:prstGeom>
-          <a:noFill/>
-        </p:spPr>
-        <p:txBody>
-          <a:bodyPr wrap="none" lIns="0">
-            <a:spAutoFit/>
-          </a:bodyPr>
-          <a:lstStyle/>
-          <a:p>
-            <a:pPr algn="l"/>
-            <a:r>
-              <a:rPr sz="1100" b="1">
-                <a:solidFill>
-                  <a:srgbClr val="C9A227"/>
-                </a:solidFill>
-                <a:latin typeface="Calibri"/>
-              </a:rPr>
-              <a:t>ROADMAP</a:t>
-            </a:r>
-          </a:p>
-        </p:txBody>
-      </p:sp>
-      <p:sp>
-        <p:nvSpPr>
-          <p:cNvPr id="4" name="TextBox 3"/>
-          <p:cNvSpPr txBox="1"/>
-          <p:nvPr/>
-        </p:nvSpPr>
-        <p:spPr>
-          <a:xfrm>
-            <a:off x="457200" y="713232"/>
-            <a:ext cx="11247120" cy="822960"/>
-          </a:xfrm>
-          <a:prstGeom prst="rect">
-            <a:avLst/>
-          </a:prstGeom>
-          <a:noFill/>
-        </p:spPr>
-        <p:txBody>
-          <a:bodyPr wrap="none" lIns="0">
-            <a:spAutoFit/>
-          </a:bodyPr>
-          <a:lstStyle/>
-          <a:p>
-            <a:pPr algn="l"/>
-            <a:r>
-              <a:rPr sz="3000" b="1">
-                <a:solidFill>
-                  <a:srgbClr val="1F3A5F"/>
-                </a:solidFill>
-                <a:latin typeface="Calibri"/>
-              </a:rPr>
-              <a:t>Future Work</a:t>
-            </a:r>
-          </a:p>
-        </p:txBody>
-      </p:sp>
-      <p:sp>
-        <p:nvSpPr>
-          <p:cNvPr id="5" name="Rectangle 4"/>
-          <p:cNvSpPr/>
-          <p:nvPr/>
-        </p:nvSpPr>
-        <p:spPr>
-          <a:xfrm>
-            <a:off x="502920" y="1508760"/>
-            <a:ext cx="548640" cy="54864"/>
-          </a:xfrm>
-          <a:prstGeom prst="rect">
-            <a:avLst/>
-          </a:prstGeom>
-          <a:solidFill>
-            <a:srgbClr val="C9A227"/>
-          </a:solidFill>
-          <a:ln>
-            <a:noFill/>
-          </a:ln>
-        </p:spPr>
-        <p:style>
-          <a:lnRef idx="1">
-            <a:schemeClr val="accent1"/>
-          </a:lnRef>
-          <a:fillRef idx="3">
-            <a:schemeClr val="accent1"/>
-          </a:fillRef>
-          <a:effectRef idx="2">
-            <a:schemeClr val="accent1"/>
-          </a:effectRef>
-          <a:fontRef idx="minor">
-            <a:schemeClr val="lt1"/>
-          </a:fontRef>
-        </p:style>
-        <p:txBody>
-          <a:bodyPr rtlCol="0" anchor="ctr"/>
-          <a:lstStyle/>
-          <a:p>
-            <a:pPr algn="ctr"/>
-            <a:endParaRPr/>
-          </a:p>
-        </p:txBody>
-      </p:sp>
-      <p:sp>
-        <p:nvSpPr>
-          <p:cNvPr id="6" name="TextBox 5"/>
-          <p:cNvSpPr txBox="1"/>
-          <p:nvPr/>
-        </p:nvSpPr>
-        <p:spPr>
-          <a:xfrm>
-            <a:off x="548640" y="1828800"/>
-            <a:ext cx="11064240" cy="4389120"/>
-          </a:xfrm>
-          <a:prstGeom prst="rect">
-            <a:avLst/>
-          </a:prstGeom>
-          <a:noFill/>
-        </p:spPr>
-        <p:txBody>
-          <a:bodyPr wrap="square" lIns="0">
-            <a:spAutoFit/>
-          </a:bodyPr>
-          <a:lstStyle/>
-          <a:p>
-            <a:pPr algn="l">
-              <a:spcAft>
-                <a:spcPts val="800"/>
-              </a:spcAft>
-            </a:pPr>
-            <a:r>
-              <a:rPr sz="1800" b="1">
-                <a:solidFill>
-                  <a:srgbClr val="C9A227"/>
-                </a:solidFill>
-                <a:latin typeface="Calibri"/>
-              </a:rPr>
-              <a:t>•  </a:t>
-            </a:r>
-            <a:r>
-              <a:rPr sz="1800">
-                <a:solidFill>
-                  <a:srgbClr val="1A1A1A"/>
-                </a:solidFill>
-                <a:latin typeface="Calibri"/>
-              </a:rPr>
-              <a:t>Quantitative evaluation against gold-standard datasets (TACRED, DocRED).</a:t>
-            </a:r>
-          </a:p>
-          <a:p>
-            <a:pPr algn="l">
-              <a:spcAft>
-                <a:spcPts val="800"/>
-              </a:spcAft>
-            </a:pPr>
-            <a:r>
-              <a:rPr sz="1800" b="1">
-                <a:solidFill>
-                  <a:srgbClr val="C9A227"/>
-                </a:solidFill>
-                <a:latin typeface="Calibri"/>
-              </a:rPr>
-              <a:t>•  </a:t>
-            </a:r>
-            <a:r>
-              <a:rPr sz="1800">
-                <a:solidFill>
-                  <a:srgbClr val="1A1A1A"/>
-                </a:solidFill>
-                <a:latin typeface="Calibri"/>
-              </a:rPr>
-              <a:t>Cross-document entity linking — merge nodes across multiple texts.</a:t>
-            </a:r>
-          </a:p>
-          <a:p>
-            <a:pPr algn="l">
-              <a:spcAft>
-                <a:spcPts val="800"/>
-              </a:spcAft>
-            </a:pPr>
-            <a:r>
-              <a:rPr sz="1800" b="1">
-                <a:solidFill>
-                  <a:srgbClr val="C9A227"/>
-                </a:solidFill>
-                <a:latin typeface="Calibri"/>
-              </a:rPr>
-              <a:t>•  </a:t>
-            </a:r>
-            <a:r>
-              <a:rPr sz="1800">
-                <a:solidFill>
-                  <a:srgbClr val="1A1A1A"/>
-                </a:solidFill>
-                <a:latin typeface="Calibri"/>
-              </a:rPr>
-              <a:t>Domain-specific vocabularies loaded as plug-ins.</a:t>
-            </a:r>
-          </a:p>
-          <a:p>
-            <a:pPr algn="l">
-              <a:spcAft>
-                <a:spcPts val="800"/>
-              </a:spcAft>
-            </a:pPr>
-            <a:r>
-              <a:rPr sz="1800" b="1">
-                <a:solidFill>
-                  <a:srgbClr val="C9A227"/>
-                </a:solidFill>
-                <a:latin typeface="Calibri"/>
-              </a:rPr>
-              <a:t>•  </a:t>
-            </a:r>
-            <a:r>
-              <a:rPr sz="1800">
-                <a:solidFill>
-                  <a:srgbClr val="1A1A1A"/>
-                </a:solidFill>
-                <a:latin typeface="Calibri"/>
-              </a:rPr>
-              <a:t>Confidence calibration via a separate scoring model.</a:t>
-            </a:r>
-          </a:p>
-          <a:p>
-            <a:pPr algn="l">
-              <a:spcAft>
-                <a:spcPts val="800"/>
-              </a:spcAft>
-            </a:pPr>
-            <a:r>
-              <a:rPr sz="1800" b="1">
-                <a:solidFill>
-                  <a:srgbClr val="C9A227"/>
-                </a:solidFill>
-                <a:latin typeface="Calibri"/>
-              </a:rPr>
-              <a:t>•  </a:t>
-            </a:r>
-            <a:r>
-              <a:rPr sz="1800">
-                <a:solidFill>
-                  <a:srgbClr val="1A1A1A"/>
-                </a:solidFill>
-                <a:latin typeface="Calibri"/>
-              </a:rPr>
-              <a:t>Multi-language extraction.</a:t>
-            </a:r>
-          </a:p>
-        </p:txBody>
-      </p:sp>
-      <p:sp>
-        <p:nvSpPr>
-          <p:cNvPr id="8" name="TextBox 7"/>
-          <p:cNvSpPr txBox="1"/>
-          <p:nvPr/>
-        </p:nvSpPr>
-        <p:spPr>
-          <a:xfrm>
-            <a:off x="11247120" y="6446520"/>
-            <a:ext cx="822960" cy="320040"/>
-          </a:xfrm>
-          <a:prstGeom prst="rect">
-            <a:avLst/>
-          </a:prstGeom>
-          <a:noFill/>
-        </p:spPr>
-        <p:txBody>
-          <a:bodyPr wrap="none" lIns="0" rIns="0">
-            <a:spAutoFit/>
-          </a:bodyPr>
-          <a:lstStyle/>
-          <a:p>
-            <a:pPr algn="r"/>
-            <a:r>
-              <a:rPr sz="900">
-                <a:solidFill>
-                  <a:srgbClr val="6B6B6B"/>
-                </a:solidFill>
-                <a:latin typeface="Calibri"/>
-              </a:rPr>
-              <a:t>18 / 19</a:t>
-            </a:r>
-          </a:p>
-        </p:txBody>
-      </p:sp>
-    </p:spTree>
   </p:cSld>
   <p:clrMapOvr>
     <a:masterClrMapping/>
@@ -7368,7 +7380,7 @@
                 </a:solidFill>
                 <a:latin typeface="Calibri"/>
               </a:rPr>
-              <a:t>WRAP-UP</a:t>
+              <a:t>ROADMAP</a:t>
             </a:r>
           </a:p>
         </p:txBody>
@@ -7403,7 +7415,7 @@
                 </a:solidFill>
                 <a:latin typeface="Calibri"/>
               </a:rPr>
-              <a:t>Summary</a:t>
+              <a:t>Future Work</a:t>
             </a:r>
           </a:p>
         </p:txBody>
@@ -7480,7 +7492,7 @@
               </a:spcAft>
             </a:pPr>
             <a:r>
-              <a:rPr sz="1700" b="1">
+              <a:rPr sz="1800" b="1" dirty="0">
                 <a:solidFill>
                   <a:srgbClr val="C9A227"/>
                 </a:solidFill>
@@ -7489,13 +7501,31 @@
               <a:t>•  </a:t>
             </a:r>
             <a:r>
-              <a:rPr sz="1700">
+              <a:rPr sz="1800" dirty="0">
                 <a:solidFill>
                   <a:srgbClr val="1A1A1A"/>
                 </a:solidFill>
                 <a:latin typeface="Calibri"/>
               </a:rPr>
-              <a:t>Working LLM-based knowledge graph extractor.</a:t>
+              <a:t>Quantitative evaluation against gold-standard datasets (TACRED, </a:t>
+            </a:r>
+            <a:r>
+              <a:rPr sz="1800" dirty="0" err="1">
+                <a:solidFill>
+                  <a:srgbClr val="1A1A1A"/>
+                </a:solidFill>
+                <a:latin typeface="Calibri"/>
+              </a:rPr>
+              <a:t>DocRED</a:t>
+            </a:r>
+            <a:r>
+              <a:rPr sz="1800" dirty="0">
+                <a:solidFill>
+                  <a:srgbClr val="1A1A1A"/>
+                </a:solidFill>
+                <a:latin typeface="Calibri"/>
+              </a:rPr>
+              <a:t>).</a:t>
             </a:r>
           </a:p>
           <a:p>
@@ -7505,7 +7535,7 @@
               </a:spcAft>
             </a:pPr>
             <a:r>
-              <a:rPr sz="1700" b="1">
+              <a:rPr sz="1800" b="1" dirty="0">
                 <a:solidFill>
                   <a:srgbClr val="C9A227"/>
                 </a:solidFill>
@@ -7514,13 +7544,13 @@
               <a:t>•  </a:t>
             </a:r>
             <a:r>
-              <a:rPr sz="1700">
+              <a:rPr sz="1800" dirty="0">
                 <a:solidFill>
                   <a:srgbClr val="1A1A1A"/>
                 </a:solidFill>
                 <a:latin typeface="Calibri"/>
               </a:rPr>
-              <a:t>Hybrid schema: open entity types, closed relation vocabulary.</a:t>
+              <a:t>Cross-document entity linking — merge nodes across multiple texts.</a:t>
             </a:r>
           </a:p>
           <a:p>
@@ -7530,7 +7560,7 @@
               </a:spcAft>
             </a:pPr>
             <a:r>
-              <a:rPr sz="1700" b="1">
+              <a:rPr sz="1800" b="1" dirty="0">
                 <a:solidFill>
                   <a:srgbClr val="C9A227"/>
                 </a:solidFill>
@@ -7539,13 +7569,13 @@
               <a:t>•  </a:t>
             </a:r>
             <a:r>
-              <a:rPr sz="1700">
+              <a:rPr sz="1800" dirty="0">
                 <a:solidFill>
                   <a:srgbClr val="1A1A1A"/>
                 </a:solidFill>
                 <a:latin typeface="Calibri"/>
               </a:rPr>
-              <a:t>Provenance, confidence, aliases, and event reification built in.</a:t>
+              <a:t>Domain-specific vocabularies loaded as plug-ins.</a:t>
             </a:r>
           </a:p>
           <a:p>
@@ -7555,7 +7585,7 @@
               </a:spcAft>
             </a:pPr>
             <a:r>
-              <a:rPr sz="1700" b="1">
+              <a:rPr sz="1800" b="1" dirty="0">
                 <a:solidFill>
                   <a:srgbClr val="C9A227"/>
                 </a:solidFill>
@@ -7564,13 +7594,13 @@
               <a:t>•  </a:t>
             </a:r>
             <a:r>
-              <a:rPr sz="1700">
+              <a:rPr sz="1800" dirty="0">
                 <a:solidFill>
                   <a:srgbClr val="1A1A1A"/>
                 </a:solidFill>
                 <a:latin typeface="Calibri"/>
               </a:rPr>
-              <a:t>Interactive visualization with layouts, filters, search, and importance ranking.</a:t>
+              <a:t>Confidence calibration via a separate scoring model.</a:t>
             </a:r>
           </a:p>
           <a:p>
@@ -7580,7 +7610,7 @@
               </a:spcAft>
             </a:pPr>
             <a:r>
-              <a:rPr sz="1700" b="1">
+              <a:rPr sz="1800" b="1" dirty="0">
                 <a:solidFill>
                   <a:srgbClr val="C9A227"/>
                 </a:solidFill>
@@ -7589,55 +7619,20 @@
               <a:t>•  </a:t>
             </a:r>
             <a:r>
-              <a:rPr sz="1700">
+              <a:rPr sz="1800" dirty="0">
                 <a:solidFill>
                   <a:srgbClr val="1A1A1A"/>
                 </a:solidFill>
                 <a:latin typeface="Calibri"/>
               </a:rPr>
-              <a:t>Reproducible: source code, prompt, schema, and exports all available.</a:t>
-            </a:r>
-          </a:p>
-        </p:txBody>
-      </p:sp>
-      <p:sp>
-        <p:nvSpPr>
-          <p:cNvPr id="7" name="TextBox 6"/>
-          <p:cNvSpPr txBox="1"/>
-          <p:nvPr/>
-        </p:nvSpPr>
-        <p:spPr>
-          <a:xfrm>
-            <a:off x="548640" y="5486400"/>
-            <a:ext cx="11064240" cy="430887"/>
-          </a:xfrm>
-          <a:prstGeom prst="rect">
-            <a:avLst/>
-          </a:prstGeom>
-          <a:noFill/>
-        </p:spPr>
-        <p:txBody>
-          <a:bodyPr wrap="square">
-            <a:spAutoFit/>
-          </a:bodyPr>
-          <a:lstStyle/>
-          <a:p>
-            <a:pPr algn="ctr"/>
-            <a:r>
-              <a:rPr sz="2200" b="1" dirty="0">
-                <a:solidFill>
-                  <a:srgbClr val="1F3A5F"/>
-                </a:solidFill>
-                <a:latin typeface="Calibri"/>
-              </a:rPr>
-              <a:t>Thank you.</a:t>
-            </a:r>
-          </a:p>
-        </p:txBody>
-      </p:sp>
-      <p:sp>
-        <p:nvSpPr>
-          <p:cNvPr id="9" name="TextBox 8"/>
+              <a:t>Multi-language extraction.</a:t>
+            </a:r>
+          </a:p>
+        </p:txBody>
+      </p:sp>
+      <p:sp>
+        <p:nvSpPr>
+          <p:cNvPr id="8" name="TextBox 7"/>
           <p:cNvSpPr txBox="1"/>
           <p:nvPr/>
         </p:nvSpPr>
@@ -7665,7 +7660,7 @@
                 </a:solidFill>
                 <a:latin typeface="Calibri"/>
               </a:rPr>
-              <a:t>19 / 19</a:t>
+              <a:t>18 / 19</a:t>
             </a:r>
           </a:p>
         </p:txBody>
@@ -7679,7 +7674,7 @@
 </file>
 
 <file path=ppt/slides/slide19.xml><?xml version="1.0" encoding="utf-8"?>
-<p:sld xmlns:a="http://schemas.openxmlformats.org/drawingml/2006/main" xmlns:p="http://schemas.openxmlformats.org/presentationml/2006/main" xmlns:r="http://schemas.openxmlformats.org/officeDocument/2006/relationships">
+<p:sld xmlns:a="http://schemas.openxmlformats.org/drawingml/2006/main" xmlns:r="http://schemas.openxmlformats.org/officeDocument/2006/relationships" xmlns:p="http://schemas.openxmlformats.org/presentationml/2006/main">
   <p:cSld>
     <p:spTree>
       <p:nvGrpSpPr>
@@ -7687,7 +7682,14 @@
         <p:cNvGrpSpPr/>
         <p:nvPr/>
       </p:nvGrpSpPr>
-      <p:grpSpPr/>
+      <p:grpSpPr>
+        <a:xfrm>
+          <a:off x="0" y="0"/>
+          <a:ext cx="0" cy="0"/>
+          <a:chOff x="0" y="0"/>
+          <a:chExt cx="0" cy="0"/>
+        </a:xfrm>
+      </p:grpSpPr>
       <p:sp>
         <p:nvSpPr>
           <p:cNvPr id="2" name="Rectangle 1"/>
@@ -7697,7 +7699,7 @@
         <p:spPr>
           <a:xfrm>
             <a:off x="0" y="0"/>
-            <a:ext cx="12192000" cy="164592"/>
+            <a:ext cx="12191695" cy="164592"/>
           </a:xfrm>
           <a:prstGeom prst="rect">
             <a:avLst/>
@@ -7728,6 +7730,7 @@
           <a:lstStyle/>
           <a:p>
             <a:pPr algn="ctr"/>
+            <a:endParaRPr/>
           </a:p>
         </p:txBody>
       </p:sp>
@@ -7753,6 +7756,7 @@
           </a:bodyPr>
           <a:lstStyle/>
           <a:p>
+            <a:pPr algn="l"/>
             <a:r>
               <a:rPr sz="1100" b="1">
                 <a:solidFill>
@@ -7760,7 +7764,7 @@
                 </a:solidFill>
                 <a:latin typeface="Calibri"/>
               </a:rPr>
-              <a:t>CONTENTS</a:t>
+              <a:t>WRAP-UP</a:t>
             </a:r>
           </a:p>
         </p:txBody>
@@ -7782,11 +7786,12 @@
           <a:noFill/>
         </p:spPr>
         <p:txBody>
-          <a:bodyPr wrap="none">
+          <a:bodyPr wrap="none" lIns="0">
             <a:spAutoFit/>
           </a:bodyPr>
           <a:lstStyle/>
           <a:p>
+            <a:pPr algn="l"/>
             <a:r>
               <a:rPr sz="3000" b="1">
                 <a:solidFill>
@@ -7794,7 +7799,7 @@
                 </a:solidFill>
                 <a:latin typeface="Calibri"/>
               </a:rPr>
-              <a:t>Table of Contents</a:t>
+              <a:t>Summary</a:t>
             </a:r>
           </a:p>
         </p:txBody>
@@ -7839,6 +7844,7 @@
           <a:lstStyle/>
           <a:p>
             <a:pPr algn="ctr"/>
+            <a:endParaRPr/>
           </a:p>
         </p:txBody>
       </p:sp>
@@ -7851,7 +7857,7 @@
         <p:spPr>
           <a:xfrm>
             <a:off x="548640" y="1828800"/>
-            <a:ext cx="5486400" cy="384048"/>
+            <a:ext cx="11064240" cy="4389120"/>
           </a:xfrm>
           <a:prstGeom prst="rect">
             <a:avLst/>
@@ -7859,28 +7865,133 @@
           <a:noFill/>
         </p:spPr>
         <p:txBody>
-          <a:bodyPr wrap="none" lIns="0" rIns="0" tIns="38100" bIns="38100">
+          <a:bodyPr wrap="square" lIns="0">
             <a:spAutoFit/>
           </a:bodyPr>
           <a:lstStyle/>
           <a:p>
-            <a:r>
-              <a:rPr sz="1500" b="1">
+            <a:pPr algn="l">
+              <a:spcAft>
+                <a:spcPts val="800"/>
+              </a:spcAft>
+            </a:pPr>
+            <a:r>
+              <a:rPr sz="1700" b="1" dirty="0">
                 <a:solidFill>
                   <a:srgbClr val="C9A227"/>
                 </a:solidFill>
                 <a:latin typeface="Calibri"/>
               </a:rPr>
-              <a:t> 3.</a:t>
-            </a:r>
-            <a:r>
-              <a:rPr sz="1500">
+              <a:t>•  </a:t>
+            </a:r>
+            <a:r>
+              <a:rPr sz="1700" dirty="0">
                 <a:solidFill>
                   <a:srgbClr val="1A1A1A"/>
                 </a:solidFill>
                 <a:latin typeface="Calibri"/>
               </a:rPr>
-              <a:t>   The Problem</a:t>
+              <a:t>Working LLM-based knowledge graph extractor.</a:t>
+            </a:r>
+          </a:p>
+          <a:p>
+            <a:pPr algn="l">
+              <a:spcAft>
+                <a:spcPts val="800"/>
+              </a:spcAft>
+            </a:pPr>
+            <a:r>
+              <a:rPr sz="1700" b="1" dirty="0">
+                <a:solidFill>
+                  <a:srgbClr val="C9A227"/>
+                </a:solidFill>
+                <a:latin typeface="Calibri"/>
+              </a:rPr>
+              <a:t>•  </a:t>
+            </a:r>
+            <a:r>
+              <a:rPr sz="1700" dirty="0">
+                <a:solidFill>
+                  <a:srgbClr val="1A1A1A"/>
+                </a:solidFill>
+                <a:latin typeface="Calibri"/>
+              </a:rPr>
+              <a:t>Hybrid schema: open entity types, closed relation vocabulary.</a:t>
+            </a:r>
+          </a:p>
+          <a:p>
+            <a:pPr algn="l">
+              <a:spcAft>
+                <a:spcPts val="800"/>
+              </a:spcAft>
+            </a:pPr>
+            <a:r>
+              <a:rPr sz="1700" b="1" dirty="0">
+                <a:solidFill>
+                  <a:srgbClr val="C9A227"/>
+                </a:solidFill>
+                <a:latin typeface="Calibri"/>
+              </a:rPr>
+              <a:t>•  </a:t>
+            </a:r>
+            <a:r>
+              <a:rPr sz="1700" dirty="0">
+                <a:solidFill>
+                  <a:srgbClr val="1A1A1A"/>
+                </a:solidFill>
+                <a:latin typeface="Calibri"/>
+              </a:rPr>
+              <a:t>Provenance, confidence, aliases, and event reification built in.</a:t>
+            </a:r>
+          </a:p>
+          <a:p>
+            <a:pPr algn="l">
+              <a:spcAft>
+                <a:spcPts val="800"/>
+              </a:spcAft>
+            </a:pPr>
+            <a:r>
+              <a:rPr sz="1700" b="1" dirty="0">
+                <a:solidFill>
+                  <a:srgbClr val="C9A227"/>
+                </a:solidFill>
+                <a:latin typeface="Calibri"/>
+              </a:rPr>
+              <a:t>•  </a:t>
+            </a:r>
+            <a:r>
+              <a:rPr sz="1700" dirty="0">
+                <a:solidFill>
+                  <a:srgbClr val="1A1A1A"/>
+                </a:solidFill>
+                <a:latin typeface="Calibri"/>
+              </a:rPr>
+              <a:t>Interactive visualization with layouts, filters, search, and importance ranking.</a:t>
+            </a:r>
+          </a:p>
+          <a:p>
+            <a:pPr algn="l">
+              <a:spcAft>
+                <a:spcPts val="800"/>
+              </a:spcAft>
+            </a:pPr>
+            <a:r>
+              <a:rPr sz="1700" b="1" dirty="0">
+                <a:solidFill>
+                  <a:srgbClr val="C9A227"/>
+                </a:solidFill>
+                <a:latin typeface="Calibri"/>
+              </a:rPr>
+              <a:t>•  </a:t>
+            </a:r>
+            <a:r>
+              <a:rPr sz="1700" dirty="0">
+                <a:solidFill>
+                  <a:srgbClr val="1A1A1A"/>
+                </a:solidFill>
+                <a:latin typeface="Calibri"/>
+              </a:rPr>
+              <a:t>Reproducible: source code, prompt, schema, and exports all available.</a:t>
             </a:r>
           </a:p>
         </p:txBody>
@@ -7893,8 +8004,8 @@
         </p:nvSpPr>
         <p:spPr>
           <a:xfrm>
-            <a:off x="548640" y="2212848"/>
-            <a:ext cx="5486400" cy="384048"/>
+            <a:off x="548640" y="5486400"/>
+            <a:ext cx="11064240" cy="430887"/>
           </a:xfrm>
           <a:prstGeom prst="rect">
             <a:avLst/>
@@ -7902,42 +8013,34 @@
           <a:noFill/>
         </p:spPr>
         <p:txBody>
-          <a:bodyPr wrap="none" lIns="0" rIns="0" tIns="38100" bIns="38100">
+          <a:bodyPr wrap="square">
             <a:spAutoFit/>
           </a:bodyPr>
           <a:lstStyle/>
           <a:p>
-            <a:r>
-              <a:rPr sz="1500" b="1">
-                <a:solidFill>
-                  <a:srgbClr val="C9A227"/>
-                </a:solidFill>
-                <a:latin typeface="Calibri"/>
-              </a:rPr>
-              <a:t> 4.</a:t>
-            </a:r>
-            <a:r>
-              <a:rPr sz="1500">
-                <a:solidFill>
-                  <a:srgbClr val="1A1A1A"/>
-                </a:solidFill>
-                <a:latin typeface="Calibri"/>
-              </a:rPr>
-              <a:t>   A Short History</a:t>
-            </a:r>
-          </a:p>
-        </p:txBody>
-      </p:sp>
-      <p:sp>
-        <p:nvSpPr>
-          <p:cNvPr id="8" name="TextBox 7"/>
+            <a:pPr algn="ctr"/>
+            <a:r>
+              <a:rPr sz="2200" b="1" dirty="0">
+                <a:solidFill>
+                  <a:srgbClr val="1F3A5F"/>
+                </a:solidFill>
+                <a:latin typeface="Calibri"/>
+              </a:rPr>
+              <a:t>Thank you.</a:t>
+            </a:r>
+          </a:p>
+        </p:txBody>
+      </p:sp>
+      <p:sp>
+        <p:nvSpPr>
+          <p:cNvPr id="9" name="TextBox 8"/>
           <p:cNvSpPr txBox="1"/>
           <p:nvPr/>
         </p:nvSpPr>
         <p:spPr>
           <a:xfrm>
-            <a:off x="548640" y="2596896"/>
-            <a:ext cx="5486400" cy="384048"/>
+            <a:off x="11247120" y="6446520"/>
+            <a:ext cx="822960" cy="320040"/>
           </a:xfrm>
           <a:prstGeom prst="rect">
             <a:avLst/>
@@ -7945,656 +8048,12 @@
           <a:noFill/>
         </p:spPr>
         <p:txBody>
-          <a:bodyPr wrap="none" lIns="0" rIns="0" tIns="38100" bIns="38100">
+          <a:bodyPr wrap="none" lIns="0" rIns="0">
             <a:spAutoFit/>
           </a:bodyPr>
           <a:lstStyle/>
           <a:p>
-            <a:r>
-              <a:rPr sz="1500" b="1">
-                <a:solidFill>
-                  <a:srgbClr val="C9A227"/>
-                </a:solidFill>
-                <a:latin typeface="Calibri"/>
-              </a:rPr>
-              <a:t> 5.</a:t>
-            </a:r>
-            <a:r>
-              <a:rPr sz="1500">
-                <a:solidFill>
-                  <a:srgbClr val="1A1A1A"/>
-                </a:solidFill>
-                <a:latin typeface="Calibri"/>
-              </a:rPr>
-              <a:t>   Project Goals</a:t>
-            </a:r>
-          </a:p>
-        </p:txBody>
-      </p:sp>
-      <p:sp>
-        <p:nvSpPr>
-          <p:cNvPr id="9" name="TextBox 8"/>
-          <p:cNvSpPr txBox="1"/>
-          <p:nvPr/>
-        </p:nvSpPr>
-        <p:spPr>
-          <a:xfrm>
-            <a:off x="548640" y="2980944"/>
-            <a:ext cx="5486400" cy="384048"/>
-          </a:xfrm>
-          <a:prstGeom prst="rect">
-            <a:avLst/>
-          </a:prstGeom>
-          <a:noFill/>
-        </p:spPr>
-        <p:txBody>
-          <a:bodyPr wrap="none" lIns="0" rIns="0" tIns="38100" bIns="38100">
-            <a:spAutoFit/>
-          </a:bodyPr>
-          <a:lstStyle/>
-          <a:p>
-            <a:r>
-              <a:rPr sz="1500" b="1">
-                <a:solidFill>
-                  <a:srgbClr val="C9A227"/>
-                </a:solidFill>
-                <a:latin typeface="Calibri"/>
-              </a:rPr>
-              <a:t> 6.</a:t>
-            </a:r>
-            <a:r>
-              <a:rPr sz="1500">
-                <a:solidFill>
-                  <a:srgbClr val="1A1A1A"/>
-                </a:solidFill>
-                <a:latin typeface="Calibri"/>
-              </a:rPr>
-              <a:t>   System Architecture</a:t>
-            </a:r>
-          </a:p>
-        </p:txBody>
-      </p:sp>
-      <p:sp>
-        <p:nvSpPr>
-          <p:cNvPr id="10" name="TextBox 9"/>
-          <p:cNvSpPr txBox="1"/>
-          <p:nvPr/>
-        </p:nvSpPr>
-        <p:spPr>
-          <a:xfrm>
-            <a:off x="548640" y="3364992"/>
-            <a:ext cx="5486400" cy="384048"/>
-          </a:xfrm>
-          <a:prstGeom prst="rect">
-            <a:avLst/>
-          </a:prstGeom>
-          <a:noFill/>
-        </p:spPr>
-        <p:txBody>
-          <a:bodyPr wrap="none" lIns="0" rIns="0" tIns="38100" bIns="38100">
-            <a:spAutoFit/>
-          </a:bodyPr>
-          <a:lstStyle/>
-          <a:p>
-            <a:r>
-              <a:rPr sz="1500" b="1">
-                <a:solidFill>
-                  <a:srgbClr val="C9A227"/>
-                </a:solidFill>
-                <a:latin typeface="Calibri"/>
-              </a:rPr>
-              <a:t> 7.</a:t>
-            </a:r>
-            <a:r>
-              <a:rPr sz="1500">
-                <a:solidFill>
-                  <a:srgbClr val="1A1A1A"/>
-                </a:solidFill>
-                <a:latin typeface="Calibri"/>
-              </a:rPr>
-              <a:t>   Hybrid Schema</a:t>
-            </a:r>
-          </a:p>
-        </p:txBody>
-      </p:sp>
-      <p:sp>
-        <p:nvSpPr>
-          <p:cNvPr id="11" name="TextBox 10"/>
-          <p:cNvSpPr txBox="1"/>
-          <p:nvPr/>
-        </p:nvSpPr>
-        <p:spPr>
-          <a:xfrm>
-            <a:off x="548640" y="3749040"/>
-            <a:ext cx="5486400" cy="384048"/>
-          </a:xfrm>
-          <a:prstGeom prst="rect">
-            <a:avLst/>
-          </a:prstGeom>
-          <a:noFill/>
-        </p:spPr>
-        <p:txBody>
-          <a:bodyPr wrap="none" lIns="0" rIns="0" tIns="38100" bIns="38100">
-            <a:spAutoFit/>
-          </a:bodyPr>
-          <a:lstStyle/>
-          <a:p>
-            <a:r>
-              <a:rPr sz="1500" b="1">
-                <a:solidFill>
-                  <a:srgbClr val="C9A227"/>
-                </a:solidFill>
-                <a:latin typeface="Calibri"/>
-              </a:rPr>
-              <a:t> 8.</a:t>
-            </a:r>
-            <a:r>
-              <a:rPr sz="1500">
-                <a:solidFill>
-                  <a:srgbClr val="1A1A1A"/>
-                </a:solidFill>
-                <a:latin typeface="Calibri"/>
-              </a:rPr>
-              <a:t>   The Prompt</a:t>
-            </a:r>
-          </a:p>
-        </p:txBody>
-      </p:sp>
-      <p:sp>
-        <p:nvSpPr>
-          <p:cNvPr id="12" name="TextBox 11"/>
-          <p:cNvSpPr txBox="1"/>
-          <p:nvPr/>
-        </p:nvSpPr>
-        <p:spPr>
-          <a:xfrm>
-            <a:off x="548640" y="4133088"/>
-            <a:ext cx="5486400" cy="384048"/>
-          </a:xfrm>
-          <a:prstGeom prst="rect">
-            <a:avLst/>
-          </a:prstGeom>
-          <a:noFill/>
-        </p:spPr>
-        <p:txBody>
-          <a:bodyPr wrap="none" lIns="0" rIns="0" tIns="38100" bIns="38100">
-            <a:spAutoFit/>
-          </a:bodyPr>
-          <a:lstStyle/>
-          <a:p>
-            <a:r>
-              <a:rPr sz="1500" b="1">
-                <a:solidFill>
-                  <a:srgbClr val="C9A227"/>
-                </a:solidFill>
-                <a:latin typeface="Calibri"/>
-              </a:rPr>
-              <a:t> 9.</a:t>
-            </a:r>
-            <a:r>
-              <a:rPr sz="1500">
-                <a:solidFill>
-                  <a:srgbClr val="1A1A1A"/>
-                </a:solidFill>
-                <a:latin typeface="Calibri"/>
-              </a:rPr>
-              <a:t>   Aliases and Deduplication</a:t>
-            </a:r>
-          </a:p>
-        </p:txBody>
-      </p:sp>
-      <p:sp>
-        <p:nvSpPr>
-          <p:cNvPr id="13" name="TextBox 12"/>
-          <p:cNvSpPr txBox="1"/>
-          <p:nvPr/>
-        </p:nvSpPr>
-        <p:spPr>
-          <a:xfrm>
-            <a:off x="548640" y="4517136"/>
-            <a:ext cx="5486400" cy="384048"/>
-          </a:xfrm>
-          <a:prstGeom prst="rect">
-            <a:avLst/>
-          </a:prstGeom>
-          <a:noFill/>
-        </p:spPr>
-        <p:txBody>
-          <a:bodyPr wrap="none" lIns="0" rIns="0" tIns="38100" bIns="38100">
-            <a:spAutoFit/>
-          </a:bodyPr>
-          <a:lstStyle/>
-          <a:p>
-            <a:r>
-              <a:rPr sz="1500" b="1">
-                <a:solidFill>
-                  <a:srgbClr val="C9A227"/>
-                </a:solidFill>
-                <a:latin typeface="Calibri"/>
-              </a:rPr>
-              <a:t>10.</a:t>
-            </a:r>
-            <a:r>
-              <a:rPr sz="1500">
-                <a:solidFill>
-                  <a:srgbClr val="1A1A1A"/>
-                </a:solidFill>
-                <a:latin typeface="Calibri"/>
-              </a:rPr>
-              <a:t>   Provenance and Output Formats</a:t>
-            </a:r>
-          </a:p>
-        </p:txBody>
-      </p:sp>
-      <p:sp>
-        <p:nvSpPr>
-          <p:cNvPr id="14" name="TextBox 13"/>
-          <p:cNvSpPr txBox="1"/>
-          <p:nvPr/>
-        </p:nvSpPr>
-        <p:spPr>
-          <a:xfrm>
-            <a:off x="548640" y="4901184"/>
-            <a:ext cx="5486400" cy="384048"/>
-          </a:xfrm>
-          <a:prstGeom prst="rect">
-            <a:avLst/>
-          </a:prstGeom>
-          <a:noFill/>
-        </p:spPr>
-        <p:txBody>
-          <a:bodyPr wrap="none" lIns="0" rIns="0" tIns="38100" bIns="38100">
-            <a:spAutoFit/>
-          </a:bodyPr>
-          <a:lstStyle/>
-          <a:p>
-            <a:r>
-              <a:rPr sz="1500" b="1">
-                <a:solidFill>
-                  <a:srgbClr val="C9A227"/>
-                </a:solidFill>
-                <a:latin typeface="Calibri"/>
-              </a:rPr>
-              <a:t>11.</a:t>
-            </a:r>
-            <a:r>
-              <a:rPr sz="1500">
-                <a:solidFill>
-                  <a:srgbClr val="1A1A1A"/>
-                </a:solidFill>
-                <a:latin typeface="Calibri"/>
-              </a:rPr>
-              <a:t>   Interactive Visualization</a:t>
-            </a:r>
-          </a:p>
-        </p:txBody>
-      </p:sp>
-      <p:sp>
-        <p:nvSpPr>
-          <p:cNvPr id="15" name="TextBox 14"/>
-          <p:cNvSpPr txBox="1"/>
-          <p:nvPr/>
-        </p:nvSpPr>
-        <p:spPr>
-          <a:xfrm>
-            <a:off x="6217920" y="1828800"/>
-            <a:ext cx="5486400" cy="384048"/>
-          </a:xfrm>
-          <a:prstGeom prst="rect">
-            <a:avLst/>
-          </a:prstGeom>
-          <a:noFill/>
-        </p:spPr>
-        <p:txBody>
-          <a:bodyPr wrap="none" lIns="0" rIns="0" tIns="38100" bIns="38100">
-            <a:spAutoFit/>
-          </a:bodyPr>
-          <a:lstStyle/>
-          <a:p>
-            <a:r>
-              <a:rPr sz="1500" b="1">
-                <a:solidFill>
-                  <a:srgbClr val="C9A227"/>
-                </a:solidFill>
-                <a:latin typeface="Calibri"/>
-              </a:rPr>
-              <a:t>12.</a:t>
-            </a:r>
-            <a:r>
-              <a:rPr sz="1500">
-                <a:solidFill>
-                  <a:srgbClr val="1A1A1A"/>
-                </a:solidFill>
-                <a:latin typeface="Calibri"/>
-              </a:rPr>
-              <a:t>   Complexity Slider</a:t>
-            </a:r>
-          </a:p>
-        </p:txBody>
-      </p:sp>
-      <p:sp>
-        <p:nvSpPr>
-          <p:cNvPr id="16" name="TextBox 15"/>
-          <p:cNvSpPr txBox="1"/>
-          <p:nvPr/>
-        </p:nvSpPr>
-        <p:spPr>
-          <a:xfrm>
-            <a:off x="6217920" y="2212848"/>
-            <a:ext cx="5486400" cy="384048"/>
-          </a:xfrm>
-          <a:prstGeom prst="rect">
-            <a:avLst/>
-          </a:prstGeom>
-          <a:noFill/>
-        </p:spPr>
-        <p:txBody>
-          <a:bodyPr wrap="none" lIns="0" rIns="0" tIns="38100" bIns="38100">
-            <a:spAutoFit/>
-          </a:bodyPr>
-          <a:lstStyle/>
-          <a:p>
-            <a:r>
-              <a:rPr sz="1500" b="1">
-                <a:solidFill>
-                  <a:srgbClr val="C9A227"/>
-                </a:solidFill>
-                <a:latin typeface="Calibri"/>
-              </a:rPr>
-              <a:t>13.</a:t>
-            </a:r>
-            <a:r>
-              <a:rPr sz="1500">
-                <a:solidFill>
-                  <a:srgbClr val="1A1A1A"/>
-                </a:solidFill>
-                <a:latin typeface="Calibri"/>
-              </a:rPr>
-              <a:t>   Evaluation — Three Passages</a:t>
-            </a:r>
-          </a:p>
-        </p:txBody>
-      </p:sp>
-      <p:sp>
-        <p:nvSpPr>
-          <p:cNvPr id="17" name="TextBox 16"/>
-          <p:cNvSpPr txBox="1"/>
-          <p:nvPr/>
-        </p:nvSpPr>
-        <p:spPr>
-          <a:xfrm>
-            <a:off x="6217920" y="2596896"/>
-            <a:ext cx="5486400" cy="384048"/>
-          </a:xfrm>
-          <a:prstGeom prst="rect">
-            <a:avLst/>
-          </a:prstGeom>
-          <a:noFill/>
-        </p:spPr>
-        <p:txBody>
-          <a:bodyPr wrap="none" lIns="0" rIns="0" tIns="38100" bIns="38100">
-            <a:spAutoFit/>
-          </a:bodyPr>
-          <a:lstStyle/>
-          <a:p>
-            <a:r>
-              <a:rPr sz="1500" b="1">
-                <a:solidFill>
-                  <a:srgbClr val="C9A227"/>
-                </a:solidFill>
-                <a:latin typeface="Calibri"/>
-              </a:rPr>
-              <a:t>14.</a:t>
-            </a:r>
-            <a:r>
-              <a:rPr sz="1500">
-                <a:solidFill>
-                  <a:srgbClr val="1A1A1A"/>
-                </a:solidFill>
-                <a:latin typeface="Calibri"/>
-              </a:rPr>
-              <a:t>   Real Example — Microsoft</a:t>
-            </a:r>
-          </a:p>
-        </p:txBody>
-      </p:sp>
-      <p:sp>
-        <p:nvSpPr>
-          <p:cNvPr id="18" name="TextBox 17"/>
-          <p:cNvSpPr txBox="1"/>
-          <p:nvPr/>
-        </p:nvSpPr>
-        <p:spPr>
-          <a:xfrm>
-            <a:off x="6217920" y="2980944"/>
-            <a:ext cx="5486400" cy="384048"/>
-          </a:xfrm>
-          <a:prstGeom prst="rect">
-            <a:avLst/>
-          </a:prstGeom>
-          <a:noFill/>
-        </p:spPr>
-        <p:txBody>
-          <a:bodyPr wrap="none" lIns="0" rIns="0" tIns="38100" bIns="38100">
-            <a:spAutoFit/>
-          </a:bodyPr>
-          <a:lstStyle/>
-          <a:p>
-            <a:r>
-              <a:rPr sz="1500" b="1">
-                <a:solidFill>
-                  <a:srgbClr val="C9A227"/>
-                </a:solidFill>
-                <a:latin typeface="Calibri"/>
-              </a:rPr>
-              <a:t>15.</a:t>
-            </a:r>
-            <a:r>
-              <a:rPr sz="1500">
-                <a:solidFill>
-                  <a:srgbClr val="1A1A1A"/>
-                </a:solidFill>
-                <a:latin typeface="Calibri"/>
-              </a:rPr>
-              <a:t>   Real Example — Climate Science</a:t>
-            </a:r>
-          </a:p>
-        </p:txBody>
-      </p:sp>
-      <p:sp>
-        <p:nvSpPr>
-          <p:cNvPr id="19" name="TextBox 18"/>
-          <p:cNvSpPr txBox="1"/>
-          <p:nvPr/>
-        </p:nvSpPr>
-        <p:spPr>
-          <a:xfrm>
-            <a:off x="6217920" y="3364992"/>
-            <a:ext cx="5486400" cy="384048"/>
-          </a:xfrm>
-          <a:prstGeom prst="rect">
-            <a:avLst/>
-          </a:prstGeom>
-          <a:noFill/>
-        </p:spPr>
-        <p:txBody>
-          <a:bodyPr wrap="none" lIns="0" rIns="0" tIns="38100" bIns="38100">
-            <a:spAutoFit/>
-          </a:bodyPr>
-          <a:lstStyle/>
-          <a:p>
-            <a:r>
-              <a:rPr sz="1500" b="1">
-                <a:solidFill>
-                  <a:srgbClr val="C9A227"/>
-                </a:solidFill>
-                <a:latin typeface="Calibri"/>
-              </a:rPr>
-              <a:t>16.</a:t>
-            </a:r>
-            <a:r>
-              <a:rPr sz="1500">
-                <a:solidFill>
-                  <a:srgbClr val="1A1A1A"/>
-                </a:solidFill>
-                <a:latin typeface="Calibri"/>
-              </a:rPr>
-              <a:t>   Real Example — Mark Twain</a:t>
-            </a:r>
-          </a:p>
-        </p:txBody>
-      </p:sp>
-      <p:sp>
-        <p:nvSpPr>
-          <p:cNvPr id="20" name="TextBox 19"/>
-          <p:cNvSpPr txBox="1"/>
-          <p:nvPr/>
-        </p:nvSpPr>
-        <p:spPr>
-          <a:xfrm>
-            <a:off x="6217920" y="3749040"/>
-            <a:ext cx="5486400" cy="384048"/>
-          </a:xfrm>
-          <a:prstGeom prst="rect">
-            <a:avLst/>
-          </a:prstGeom>
-          <a:noFill/>
-        </p:spPr>
-        <p:txBody>
-          <a:bodyPr wrap="none" lIns="0" rIns="0" tIns="38100" bIns="38100">
-            <a:spAutoFit/>
-          </a:bodyPr>
-          <a:lstStyle/>
-          <a:p>
-            <a:r>
-              <a:rPr sz="1500" b="1">
-                <a:solidFill>
-                  <a:srgbClr val="C9A227"/>
-                </a:solidFill>
-                <a:latin typeface="Calibri"/>
-              </a:rPr>
-              <a:t>17.</a:t>
-            </a:r>
-            <a:r>
-              <a:rPr sz="1500">
-                <a:solidFill>
-                  <a:srgbClr val="1A1A1A"/>
-                </a:solidFill>
-                <a:latin typeface="Calibri"/>
-              </a:rPr>
-              <a:t>   What Worked</a:t>
-            </a:r>
-          </a:p>
-        </p:txBody>
-      </p:sp>
-      <p:sp>
-        <p:nvSpPr>
-          <p:cNvPr id="21" name="TextBox 20"/>
-          <p:cNvSpPr txBox="1"/>
-          <p:nvPr/>
-        </p:nvSpPr>
-        <p:spPr>
-          <a:xfrm>
-            <a:off x="6217920" y="4133088"/>
-            <a:ext cx="5486400" cy="384048"/>
-          </a:xfrm>
-          <a:prstGeom prst="rect">
-            <a:avLst/>
-          </a:prstGeom>
-          <a:noFill/>
-        </p:spPr>
-        <p:txBody>
-          <a:bodyPr wrap="none" lIns="0" rIns="0" tIns="38100" bIns="38100">
-            <a:spAutoFit/>
-          </a:bodyPr>
-          <a:lstStyle/>
-          <a:p>
-            <a:r>
-              <a:rPr sz="1500" b="1">
-                <a:solidFill>
-                  <a:srgbClr val="C9A227"/>
-                </a:solidFill>
-                <a:latin typeface="Calibri"/>
-              </a:rPr>
-              <a:t>18.</a:t>
-            </a:r>
-            <a:r>
-              <a:rPr sz="1500">
-                <a:solidFill>
-                  <a:srgbClr val="1A1A1A"/>
-                </a:solidFill>
-                <a:latin typeface="Calibri"/>
-              </a:rPr>
-              <a:t>   Future Work</a:t>
-            </a:r>
-          </a:p>
-        </p:txBody>
-      </p:sp>
-      <p:sp>
-        <p:nvSpPr>
-          <p:cNvPr id="22" name="TextBox 21"/>
-          <p:cNvSpPr txBox="1"/>
-          <p:nvPr/>
-        </p:nvSpPr>
-        <p:spPr>
-          <a:xfrm>
-            <a:off x="6217920" y="4517136"/>
-            <a:ext cx="5486400" cy="384048"/>
-          </a:xfrm>
-          <a:prstGeom prst="rect">
-            <a:avLst/>
-          </a:prstGeom>
-          <a:noFill/>
-        </p:spPr>
-        <p:txBody>
-          <a:bodyPr wrap="none" lIns="0" rIns="0" tIns="38100" bIns="38100">
-            <a:spAutoFit/>
-          </a:bodyPr>
-          <a:lstStyle/>
-          <a:p>
-            <a:r>
-              <a:rPr sz="1500" b="1">
-                <a:solidFill>
-                  <a:srgbClr val="C9A227"/>
-                </a:solidFill>
-                <a:latin typeface="Calibri"/>
-              </a:rPr>
-              <a:t>19.</a:t>
-            </a:r>
-            <a:r>
-              <a:rPr sz="1500">
-                <a:solidFill>
-                  <a:srgbClr val="1A1A1A"/>
-                </a:solidFill>
-                <a:latin typeface="Calibri"/>
-              </a:rPr>
-              <a:t>   Summary</a:t>
-            </a:r>
-          </a:p>
-        </p:txBody>
-      </p:sp>
-      <p:sp>
-        <p:nvSpPr>
-          <p:cNvPr id="23" name="TextBox 22"/>
-          <p:cNvSpPr txBox="1"/>
-          <p:nvPr/>
-        </p:nvSpPr>
-        <p:spPr>
-          <a:xfrm>
-            <a:off x="365760" y="6446520"/>
-            <a:ext cx="5486400" cy="320040"/>
-          </a:xfrm>
-          <a:prstGeom prst="rect">
-            <a:avLst/>
-          </a:prstGeom>
-          <a:noFill/>
-        </p:spPr>
-        <p:txBody>
-          <a:bodyPr wrap="none">
-            <a:spAutoFit/>
-          </a:bodyPr>
-          <a:lstStyle/>
-          <a:p>
+            <a:pPr algn="r"/>
             <a:r>
               <a:rPr sz="900">
                 <a:solidFill>
@@ -8602,42 +8061,7 @@
                 </a:solidFill>
                 <a:latin typeface="Calibri"/>
               </a:rPr>
-              <a:t>CSCE526301  ·  LLM-Powered Knowledge Graph Extractor</a:t>
-            </a:r>
-          </a:p>
-        </p:txBody>
-      </p:sp>
-      <p:sp>
-        <p:nvSpPr>
-          <p:cNvPr id="24" name="TextBox 23"/>
-          <p:cNvSpPr txBox="1"/>
-          <p:nvPr/>
-        </p:nvSpPr>
-        <p:spPr>
-          <a:xfrm>
-            <a:off x="11247120" y="6446520"/>
-            <a:ext cx="822960" cy="320040"/>
-          </a:xfrm>
-          <a:prstGeom prst="rect">
-            <a:avLst/>
-          </a:prstGeom>
-          <a:noFill/>
-        </p:spPr>
-        <p:txBody>
-          <a:bodyPr wrap="none">
-            <a:spAutoFit/>
-          </a:bodyPr>
-          <a:lstStyle/>
-          <a:p>
-            <a:pPr algn="r"/>
-            <a:r>
-              <a:rPr sz="900">
-                <a:solidFill>
-                  <a:srgbClr val="6B6B6B"/>
-                </a:solidFill>
-                <a:latin typeface="Calibri"/>
-              </a:rPr>
-              <a:t>2 / 19</a:t>
+              <a:t>19 / 19</a:t>
             </a:r>
           </a:p>
         </p:txBody>
@@ -8676,7 +8100,7 @@
         <p:spPr>
           <a:xfrm>
             <a:off x="0" y="0"/>
-            <a:ext cx="12191695" cy="164592"/>
+            <a:ext cx="12192000" cy="164592"/>
           </a:xfrm>
           <a:prstGeom prst="rect">
             <a:avLst/>
@@ -8733,7 +8157,6 @@
           </a:bodyPr>
           <a:lstStyle/>
           <a:p>
-            <a:pPr algn="l"/>
             <a:r>
               <a:rPr sz="1100" b="1">
                 <a:solidFill>
@@ -8741,7 +8164,7 @@
                 </a:solidFill>
                 <a:latin typeface="Calibri"/>
               </a:rPr>
-              <a:t>MOTIVATION</a:t>
+              <a:t>CONTENTS</a:t>
             </a:r>
           </a:p>
         </p:txBody>
@@ -8763,12 +8186,11 @@
           <a:noFill/>
         </p:spPr>
         <p:txBody>
-          <a:bodyPr wrap="none" lIns="0">
+          <a:bodyPr wrap="none">
             <a:spAutoFit/>
           </a:bodyPr>
           <a:lstStyle/>
           <a:p>
-            <a:pPr algn="l"/>
             <a:r>
               <a:rPr sz="3000" b="1">
                 <a:solidFill>
@@ -8776,7 +8198,7 @@
                 </a:solidFill>
                 <a:latin typeface="Calibri"/>
               </a:rPr>
-              <a:t>The Problem</a:t>
+              <a:t>Table of Contents</a:t>
             </a:r>
           </a:p>
         </p:txBody>
@@ -8834,7 +8256,7 @@
         <p:spPr>
           <a:xfrm>
             <a:off x="548640" y="1828800"/>
-            <a:ext cx="11064240" cy="4389120"/>
+            <a:ext cx="5486400" cy="384048"/>
           </a:xfrm>
           <a:prstGeom prst="rect">
             <a:avLst/>
@@ -8842,141 +8264,72 @@
           <a:noFill/>
         </p:spPr>
         <p:txBody>
-          <a:bodyPr wrap="square" lIns="0">
+          <a:bodyPr wrap="none" lIns="0" tIns="38100" rIns="0" bIns="38100">
             <a:spAutoFit/>
           </a:bodyPr>
           <a:lstStyle/>
           <a:p>
-            <a:pPr algn="l">
-              <a:spcAft>
-                <a:spcPts val="800"/>
-              </a:spcAft>
-            </a:pPr>
-            <a:r>
-              <a:rPr sz="1800" b="1">
+            <a:r>
+              <a:rPr sz="1500" b="1">
                 <a:solidFill>
                   <a:srgbClr val="C9A227"/>
                 </a:solidFill>
                 <a:latin typeface="Calibri"/>
               </a:rPr>
-              <a:t>•  </a:t>
-            </a:r>
-            <a:r>
-              <a:rPr sz="1800" b="1">
-                <a:solidFill>
-                  <a:srgbClr val="1F3A5F"/>
-                </a:solidFill>
-                <a:latin typeface="Calibri"/>
-              </a:rPr>
-              <a:t>Knowledge Acquisition Bottleneck</a:t>
-            </a:r>
-            <a:r>
-              <a:rPr sz="1800">
+              <a:t> 3.</a:t>
+            </a:r>
+            <a:r>
+              <a:rPr sz="1500">
                 <a:solidFill>
                   <a:srgbClr val="1A1A1A"/>
                 </a:solidFill>
                 <a:latin typeface="Calibri"/>
               </a:rPr>
-              <a:t>  (Feigenbaum, 1977)</a:t>
-            </a:r>
-          </a:p>
-          <a:p>
-            <a:pPr algn="l">
-              <a:spcAft>
-                <a:spcPts val="800"/>
-              </a:spcAft>
-            </a:pPr>
-            <a:r>
-              <a:rPr sz="1800" b="1">
+              <a:t>   The Problem</a:t>
+            </a:r>
+          </a:p>
+        </p:txBody>
+      </p:sp>
+      <p:sp>
+        <p:nvSpPr>
+          <p:cNvPr id="7" name="TextBox 6"/>
+          <p:cNvSpPr txBox="1"/>
+          <p:nvPr/>
+        </p:nvSpPr>
+        <p:spPr>
+          <a:xfrm>
+            <a:off x="548640" y="2212848"/>
+            <a:ext cx="5486400" cy="384048"/>
+          </a:xfrm>
+          <a:prstGeom prst="rect">
+            <a:avLst/>
+          </a:prstGeom>
+          <a:noFill/>
+        </p:spPr>
+        <p:txBody>
+          <a:bodyPr wrap="none" lIns="0" tIns="38100" rIns="0" bIns="38100">
+            <a:spAutoFit/>
+          </a:bodyPr>
+          <a:lstStyle/>
+          <a:p>
+            <a:r>
+              <a:rPr sz="1500" b="1">
                 <a:solidFill>
                   <a:srgbClr val="C9A227"/>
                 </a:solidFill>
                 <a:latin typeface="Calibri"/>
               </a:rPr>
-              <a:t>•  </a:t>
-            </a:r>
-            <a:r>
-              <a:rPr sz="1800">
+              <a:t> 4.</a:t>
+            </a:r>
+            <a:r>
+              <a:rPr sz="1500">
                 <a:solidFill>
                   <a:srgbClr val="1A1A1A"/>
                 </a:solidFill>
                 <a:latin typeface="Calibri"/>
               </a:rPr>
-              <a:t>Knowledge graphs are useful for search, QA, and reasoning.</a:t>
-            </a:r>
-          </a:p>
-          <a:p>
-            <a:pPr algn="l">
-              <a:spcAft>
-                <a:spcPts val="800"/>
-              </a:spcAft>
-            </a:pPr>
-            <a:r>
-              <a:rPr sz="1800" b="1">
-                <a:solidFill>
-                  <a:srgbClr val="C9A227"/>
-                </a:solidFill>
-                <a:latin typeface="Calibri"/>
-              </a:rPr>
-              <a:t>•  </a:t>
-            </a:r>
-            <a:r>
-              <a:rPr sz="1800">
-                <a:solidFill>
-                  <a:srgbClr val="1A1A1A"/>
-                </a:solidFill>
-                <a:latin typeface="Calibri"/>
-              </a:rPr>
-              <a:t>But building them by hand is slow and expensive.</a:t>
-            </a:r>
-          </a:p>
-        </p:txBody>
-      </p:sp>
-      <p:sp>
-        <p:nvSpPr>
-          <p:cNvPr id="7" name="Rounded Rectangle 6"/>
-          <p:cNvSpPr/>
-          <p:nvPr/>
-        </p:nvSpPr>
-        <p:spPr>
-          <a:xfrm>
-            <a:off x="548640" y="4023360"/>
-            <a:ext cx="11064240" cy="2011680"/>
-          </a:xfrm>
-          <a:prstGeom prst="roundRect">
-            <a:avLst>
-              <a:gd name="adj" fmla="val 6000"/>
-            </a:avLst>
-          </a:prstGeom>
-          <a:solidFill>
-            <a:srgbClr val="F4F1EA"/>
-          </a:solidFill>
-          <a:ln w="6350">
-            <a:solidFill>
-              <a:srgbClr val="E3DED3"/>
-            </a:solidFill>
-          </a:ln>
-        </p:spPr>
-        <p:style>
-          <a:lnRef idx="1">
-            <a:schemeClr val="accent1"/>
-          </a:lnRef>
-          <a:fillRef idx="3">
-            <a:schemeClr val="accent1"/>
-          </a:fillRef>
-          <a:effectRef idx="2">
-            <a:schemeClr val="accent1"/>
-          </a:effectRef>
-          <a:fontRef idx="minor">
-            <a:schemeClr val="lt1"/>
-          </a:fontRef>
-        </p:style>
-        <p:txBody>
-          <a:bodyPr rtlCol="0" anchor="ctr"/>
-          <a:lstStyle/>
-          <a:p>
-            <a:pPr algn="ctr"/>
-            <a:endParaRPr/>
+              <a:t>   A Short History</a:t>
+            </a:r>
           </a:p>
         </p:txBody>
       </p:sp>
@@ -8988,8 +8341,8 @@
         </p:nvSpPr>
         <p:spPr>
           <a:xfrm>
-            <a:off x="868680" y="4160520"/>
-            <a:ext cx="10515600" cy="1828800"/>
+            <a:off x="548640" y="2596896"/>
+            <a:ext cx="5486400" cy="384048"/>
           </a:xfrm>
           <a:prstGeom prst="rect">
             <a:avLst/>
@@ -8997,30 +8350,71 @@
           <a:noFill/>
         </p:spPr>
         <p:txBody>
-          <a:bodyPr wrap="square" lIns="0">
+          <a:bodyPr wrap="none" lIns="0" tIns="38100" rIns="0" bIns="38100">
             <a:spAutoFit/>
           </a:bodyPr>
           <a:lstStyle/>
           <a:p>
             <a:r>
-              <a:rPr sz="1400" b="1">
+              <a:rPr sz="1500" b="1">
                 <a:solidFill>
                   <a:srgbClr val="C9A227"/>
                 </a:solidFill>
                 <a:latin typeface="Calibri"/>
               </a:rPr>
-              <a:t>Goal of this project</a:t>
-            </a:r>
-          </a:p>
-          <a:p>
-            <a:r>
-              <a:rPr sz="1800">
+              <a:t> 5.</a:t>
+            </a:r>
+            <a:r>
+              <a:rPr sz="1500">
                 <a:solidFill>
                   <a:srgbClr val="1A1A1A"/>
                 </a:solidFill>
                 <a:latin typeface="Calibri"/>
               </a:rPr>
-              <a:t>Take a paragraph of English text and return a clean, typed, evidence-backed knowledge graph the user can read and explore.</a:t>
+              <a:t>   Project Goals</a:t>
+            </a:r>
+          </a:p>
+        </p:txBody>
+      </p:sp>
+      <p:sp>
+        <p:nvSpPr>
+          <p:cNvPr id="9" name="TextBox 8"/>
+          <p:cNvSpPr txBox="1"/>
+          <p:nvPr/>
+        </p:nvSpPr>
+        <p:spPr>
+          <a:xfrm>
+            <a:off x="548640" y="2980944"/>
+            <a:ext cx="5486400" cy="384048"/>
+          </a:xfrm>
+          <a:prstGeom prst="rect">
+            <a:avLst/>
+          </a:prstGeom>
+          <a:noFill/>
+        </p:spPr>
+        <p:txBody>
+          <a:bodyPr wrap="none" lIns="0" tIns="38100" rIns="0" bIns="38100">
+            <a:spAutoFit/>
+          </a:bodyPr>
+          <a:lstStyle/>
+          <a:p>
+            <a:r>
+              <a:rPr sz="1500" b="1">
+                <a:solidFill>
+                  <a:srgbClr val="C9A227"/>
+                </a:solidFill>
+                <a:latin typeface="Calibri"/>
+              </a:rPr>
+              <a:t> 6.</a:t>
+            </a:r>
+            <a:r>
+              <a:rPr sz="1500">
+                <a:solidFill>
+                  <a:srgbClr val="1A1A1A"/>
+                </a:solidFill>
+                <a:latin typeface="Calibri"/>
+              </a:rPr>
+              <a:t>   System Architecture</a:t>
             </a:r>
           </a:p>
         </p:txBody>
@@ -9033,6 +8427,599 @@
         </p:nvSpPr>
         <p:spPr>
           <a:xfrm>
+            <a:off x="548640" y="3364992"/>
+            <a:ext cx="5486400" cy="384048"/>
+          </a:xfrm>
+          <a:prstGeom prst="rect">
+            <a:avLst/>
+          </a:prstGeom>
+          <a:noFill/>
+        </p:spPr>
+        <p:txBody>
+          <a:bodyPr wrap="none" lIns="0" tIns="38100" rIns="0" bIns="38100">
+            <a:spAutoFit/>
+          </a:bodyPr>
+          <a:lstStyle/>
+          <a:p>
+            <a:r>
+              <a:rPr sz="1500" b="1">
+                <a:solidFill>
+                  <a:srgbClr val="C9A227"/>
+                </a:solidFill>
+                <a:latin typeface="Calibri"/>
+              </a:rPr>
+              <a:t> 7.</a:t>
+            </a:r>
+            <a:r>
+              <a:rPr sz="1500">
+                <a:solidFill>
+                  <a:srgbClr val="1A1A1A"/>
+                </a:solidFill>
+                <a:latin typeface="Calibri"/>
+              </a:rPr>
+              <a:t>   Hybrid Schema</a:t>
+            </a:r>
+          </a:p>
+        </p:txBody>
+      </p:sp>
+      <p:sp>
+        <p:nvSpPr>
+          <p:cNvPr id="11" name="TextBox 10"/>
+          <p:cNvSpPr txBox="1"/>
+          <p:nvPr/>
+        </p:nvSpPr>
+        <p:spPr>
+          <a:xfrm>
+            <a:off x="548640" y="3749040"/>
+            <a:ext cx="5486400" cy="384048"/>
+          </a:xfrm>
+          <a:prstGeom prst="rect">
+            <a:avLst/>
+          </a:prstGeom>
+          <a:noFill/>
+        </p:spPr>
+        <p:txBody>
+          <a:bodyPr wrap="none" lIns="0" tIns="38100" rIns="0" bIns="38100">
+            <a:spAutoFit/>
+          </a:bodyPr>
+          <a:lstStyle/>
+          <a:p>
+            <a:r>
+              <a:rPr sz="1500" b="1">
+                <a:solidFill>
+                  <a:srgbClr val="C9A227"/>
+                </a:solidFill>
+                <a:latin typeface="Calibri"/>
+              </a:rPr>
+              <a:t> 8.</a:t>
+            </a:r>
+            <a:r>
+              <a:rPr sz="1500">
+                <a:solidFill>
+                  <a:srgbClr val="1A1A1A"/>
+                </a:solidFill>
+                <a:latin typeface="Calibri"/>
+              </a:rPr>
+              <a:t>   The Prompt</a:t>
+            </a:r>
+          </a:p>
+        </p:txBody>
+      </p:sp>
+      <p:sp>
+        <p:nvSpPr>
+          <p:cNvPr id="12" name="TextBox 11"/>
+          <p:cNvSpPr txBox="1"/>
+          <p:nvPr/>
+        </p:nvSpPr>
+        <p:spPr>
+          <a:xfrm>
+            <a:off x="548640" y="4133088"/>
+            <a:ext cx="5486400" cy="384048"/>
+          </a:xfrm>
+          <a:prstGeom prst="rect">
+            <a:avLst/>
+          </a:prstGeom>
+          <a:noFill/>
+        </p:spPr>
+        <p:txBody>
+          <a:bodyPr wrap="none" lIns="0" tIns="38100" rIns="0" bIns="38100">
+            <a:spAutoFit/>
+          </a:bodyPr>
+          <a:lstStyle/>
+          <a:p>
+            <a:r>
+              <a:rPr sz="1500" b="1">
+                <a:solidFill>
+                  <a:srgbClr val="C9A227"/>
+                </a:solidFill>
+                <a:latin typeface="Calibri"/>
+              </a:rPr>
+              <a:t> 9.</a:t>
+            </a:r>
+            <a:r>
+              <a:rPr sz="1500">
+                <a:solidFill>
+                  <a:srgbClr val="1A1A1A"/>
+                </a:solidFill>
+                <a:latin typeface="Calibri"/>
+              </a:rPr>
+              <a:t>   Aliases and Deduplication</a:t>
+            </a:r>
+          </a:p>
+        </p:txBody>
+      </p:sp>
+      <p:sp>
+        <p:nvSpPr>
+          <p:cNvPr id="13" name="TextBox 12"/>
+          <p:cNvSpPr txBox="1"/>
+          <p:nvPr/>
+        </p:nvSpPr>
+        <p:spPr>
+          <a:xfrm>
+            <a:off x="548640" y="4517136"/>
+            <a:ext cx="5486400" cy="384048"/>
+          </a:xfrm>
+          <a:prstGeom prst="rect">
+            <a:avLst/>
+          </a:prstGeom>
+          <a:noFill/>
+        </p:spPr>
+        <p:txBody>
+          <a:bodyPr wrap="none" lIns="0" tIns="38100" rIns="0" bIns="38100">
+            <a:spAutoFit/>
+          </a:bodyPr>
+          <a:lstStyle/>
+          <a:p>
+            <a:r>
+              <a:rPr sz="1500" b="1">
+                <a:solidFill>
+                  <a:srgbClr val="C9A227"/>
+                </a:solidFill>
+                <a:latin typeface="Calibri"/>
+              </a:rPr>
+              <a:t>10.</a:t>
+            </a:r>
+            <a:r>
+              <a:rPr sz="1500">
+                <a:solidFill>
+                  <a:srgbClr val="1A1A1A"/>
+                </a:solidFill>
+                <a:latin typeface="Calibri"/>
+              </a:rPr>
+              <a:t>   Provenance and Output Formats</a:t>
+            </a:r>
+          </a:p>
+        </p:txBody>
+      </p:sp>
+      <p:sp>
+        <p:nvSpPr>
+          <p:cNvPr id="14" name="TextBox 13"/>
+          <p:cNvSpPr txBox="1"/>
+          <p:nvPr/>
+        </p:nvSpPr>
+        <p:spPr>
+          <a:xfrm>
+            <a:off x="548640" y="4901184"/>
+            <a:ext cx="5486400" cy="384048"/>
+          </a:xfrm>
+          <a:prstGeom prst="rect">
+            <a:avLst/>
+          </a:prstGeom>
+          <a:noFill/>
+        </p:spPr>
+        <p:txBody>
+          <a:bodyPr wrap="none" lIns="0" tIns="38100" rIns="0" bIns="38100">
+            <a:spAutoFit/>
+          </a:bodyPr>
+          <a:lstStyle/>
+          <a:p>
+            <a:r>
+              <a:rPr sz="1500" b="1">
+                <a:solidFill>
+                  <a:srgbClr val="C9A227"/>
+                </a:solidFill>
+                <a:latin typeface="Calibri"/>
+              </a:rPr>
+              <a:t>11.</a:t>
+            </a:r>
+            <a:r>
+              <a:rPr sz="1500">
+                <a:solidFill>
+                  <a:srgbClr val="1A1A1A"/>
+                </a:solidFill>
+                <a:latin typeface="Calibri"/>
+              </a:rPr>
+              <a:t>   Interactive Visualization</a:t>
+            </a:r>
+          </a:p>
+        </p:txBody>
+      </p:sp>
+      <p:sp>
+        <p:nvSpPr>
+          <p:cNvPr id="15" name="TextBox 14"/>
+          <p:cNvSpPr txBox="1"/>
+          <p:nvPr/>
+        </p:nvSpPr>
+        <p:spPr>
+          <a:xfrm>
+            <a:off x="6217920" y="1828800"/>
+            <a:ext cx="5486400" cy="384048"/>
+          </a:xfrm>
+          <a:prstGeom prst="rect">
+            <a:avLst/>
+          </a:prstGeom>
+          <a:noFill/>
+        </p:spPr>
+        <p:txBody>
+          <a:bodyPr wrap="none" lIns="0" tIns="38100" rIns="0" bIns="38100">
+            <a:spAutoFit/>
+          </a:bodyPr>
+          <a:lstStyle/>
+          <a:p>
+            <a:r>
+              <a:rPr sz="1500" b="1">
+                <a:solidFill>
+                  <a:srgbClr val="C9A227"/>
+                </a:solidFill>
+                <a:latin typeface="Calibri"/>
+              </a:rPr>
+              <a:t>12.</a:t>
+            </a:r>
+            <a:r>
+              <a:rPr sz="1500">
+                <a:solidFill>
+                  <a:srgbClr val="1A1A1A"/>
+                </a:solidFill>
+                <a:latin typeface="Calibri"/>
+              </a:rPr>
+              <a:t>   Complexity Slider</a:t>
+            </a:r>
+          </a:p>
+        </p:txBody>
+      </p:sp>
+      <p:sp>
+        <p:nvSpPr>
+          <p:cNvPr id="16" name="TextBox 15"/>
+          <p:cNvSpPr txBox="1"/>
+          <p:nvPr/>
+        </p:nvSpPr>
+        <p:spPr>
+          <a:xfrm>
+            <a:off x="6217920" y="2212848"/>
+            <a:ext cx="5486400" cy="384048"/>
+          </a:xfrm>
+          <a:prstGeom prst="rect">
+            <a:avLst/>
+          </a:prstGeom>
+          <a:noFill/>
+        </p:spPr>
+        <p:txBody>
+          <a:bodyPr wrap="none" lIns="0" tIns="38100" rIns="0" bIns="38100">
+            <a:spAutoFit/>
+          </a:bodyPr>
+          <a:lstStyle/>
+          <a:p>
+            <a:r>
+              <a:rPr sz="1500" b="1">
+                <a:solidFill>
+                  <a:srgbClr val="C9A227"/>
+                </a:solidFill>
+                <a:latin typeface="Calibri"/>
+              </a:rPr>
+              <a:t>13.</a:t>
+            </a:r>
+            <a:r>
+              <a:rPr sz="1500">
+                <a:solidFill>
+                  <a:srgbClr val="1A1A1A"/>
+                </a:solidFill>
+                <a:latin typeface="Calibri"/>
+              </a:rPr>
+              <a:t>   Evaluation — Three Passages</a:t>
+            </a:r>
+          </a:p>
+        </p:txBody>
+      </p:sp>
+      <p:sp>
+        <p:nvSpPr>
+          <p:cNvPr id="17" name="TextBox 16"/>
+          <p:cNvSpPr txBox="1"/>
+          <p:nvPr/>
+        </p:nvSpPr>
+        <p:spPr>
+          <a:xfrm>
+            <a:off x="6217920" y="2596896"/>
+            <a:ext cx="5486400" cy="384048"/>
+          </a:xfrm>
+          <a:prstGeom prst="rect">
+            <a:avLst/>
+          </a:prstGeom>
+          <a:noFill/>
+        </p:spPr>
+        <p:txBody>
+          <a:bodyPr wrap="none" lIns="0" tIns="38100" rIns="0" bIns="38100">
+            <a:spAutoFit/>
+          </a:bodyPr>
+          <a:lstStyle/>
+          <a:p>
+            <a:r>
+              <a:rPr sz="1500" b="1">
+                <a:solidFill>
+                  <a:srgbClr val="C9A227"/>
+                </a:solidFill>
+                <a:latin typeface="Calibri"/>
+              </a:rPr>
+              <a:t>14.</a:t>
+            </a:r>
+            <a:r>
+              <a:rPr sz="1500">
+                <a:solidFill>
+                  <a:srgbClr val="1A1A1A"/>
+                </a:solidFill>
+                <a:latin typeface="Calibri"/>
+              </a:rPr>
+              <a:t>   Real Example — Microsoft</a:t>
+            </a:r>
+          </a:p>
+        </p:txBody>
+      </p:sp>
+      <p:sp>
+        <p:nvSpPr>
+          <p:cNvPr id="18" name="TextBox 17"/>
+          <p:cNvSpPr txBox="1"/>
+          <p:nvPr/>
+        </p:nvSpPr>
+        <p:spPr>
+          <a:xfrm>
+            <a:off x="6217920" y="2980944"/>
+            <a:ext cx="5486400" cy="384048"/>
+          </a:xfrm>
+          <a:prstGeom prst="rect">
+            <a:avLst/>
+          </a:prstGeom>
+          <a:noFill/>
+        </p:spPr>
+        <p:txBody>
+          <a:bodyPr wrap="none" lIns="0" tIns="38100" rIns="0" bIns="38100">
+            <a:spAutoFit/>
+          </a:bodyPr>
+          <a:lstStyle/>
+          <a:p>
+            <a:r>
+              <a:rPr sz="1500" b="1">
+                <a:solidFill>
+                  <a:srgbClr val="C9A227"/>
+                </a:solidFill>
+                <a:latin typeface="Calibri"/>
+              </a:rPr>
+              <a:t>15.</a:t>
+            </a:r>
+            <a:r>
+              <a:rPr sz="1500">
+                <a:solidFill>
+                  <a:srgbClr val="1A1A1A"/>
+                </a:solidFill>
+                <a:latin typeface="Calibri"/>
+              </a:rPr>
+              <a:t>   Real Example — Climate Science</a:t>
+            </a:r>
+          </a:p>
+        </p:txBody>
+      </p:sp>
+      <p:sp>
+        <p:nvSpPr>
+          <p:cNvPr id="19" name="TextBox 18"/>
+          <p:cNvSpPr txBox="1"/>
+          <p:nvPr/>
+        </p:nvSpPr>
+        <p:spPr>
+          <a:xfrm>
+            <a:off x="6217920" y="3364992"/>
+            <a:ext cx="5486400" cy="384048"/>
+          </a:xfrm>
+          <a:prstGeom prst="rect">
+            <a:avLst/>
+          </a:prstGeom>
+          <a:noFill/>
+        </p:spPr>
+        <p:txBody>
+          <a:bodyPr wrap="none" lIns="0" tIns="38100" rIns="0" bIns="38100">
+            <a:spAutoFit/>
+          </a:bodyPr>
+          <a:lstStyle/>
+          <a:p>
+            <a:r>
+              <a:rPr sz="1500" b="1">
+                <a:solidFill>
+                  <a:srgbClr val="C9A227"/>
+                </a:solidFill>
+                <a:latin typeface="Calibri"/>
+              </a:rPr>
+              <a:t>16.</a:t>
+            </a:r>
+            <a:r>
+              <a:rPr sz="1500">
+                <a:solidFill>
+                  <a:srgbClr val="1A1A1A"/>
+                </a:solidFill>
+                <a:latin typeface="Calibri"/>
+              </a:rPr>
+              <a:t>   Real Example — Mark Twain</a:t>
+            </a:r>
+          </a:p>
+        </p:txBody>
+      </p:sp>
+      <p:sp>
+        <p:nvSpPr>
+          <p:cNvPr id="20" name="TextBox 19"/>
+          <p:cNvSpPr txBox="1"/>
+          <p:nvPr/>
+        </p:nvSpPr>
+        <p:spPr>
+          <a:xfrm>
+            <a:off x="6217920" y="3749040"/>
+            <a:ext cx="5486400" cy="384048"/>
+          </a:xfrm>
+          <a:prstGeom prst="rect">
+            <a:avLst/>
+          </a:prstGeom>
+          <a:noFill/>
+        </p:spPr>
+        <p:txBody>
+          <a:bodyPr wrap="none" lIns="0" tIns="38100" rIns="0" bIns="38100">
+            <a:spAutoFit/>
+          </a:bodyPr>
+          <a:lstStyle/>
+          <a:p>
+            <a:r>
+              <a:rPr sz="1500" b="1">
+                <a:solidFill>
+                  <a:srgbClr val="C9A227"/>
+                </a:solidFill>
+                <a:latin typeface="Calibri"/>
+              </a:rPr>
+              <a:t>17.</a:t>
+            </a:r>
+            <a:r>
+              <a:rPr sz="1500">
+                <a:solidFill>
+                  <a:srgbClr val="1A1A1A"/>
+                </a:solidFill>
+                <a:latin typeface="Calibri"/>
+              </a:rPr>
+              <a:t>   What Worked</a:t>
+            </a:r>
+          </a:p>
+        </p:txBody>
+      </p:sp>
+      <p:sp>
+        <p:nvSpPr>
+          <p:cNvPr id="21" name="TextBox 20"/>
+          <p:cNvSpPr txBox="1"/>
+          <p:nvPr/>
+        </p:nvSpPr>
+        <p:spPr>
+          <a:xfrm>
+            <a:off x="6217920" y="4133088"/>
+            <a:ext cx="5486400" cy="384048"/>
+          </a:xfrm>
+          <a:prstGeom prst="rect">
+            <a:avLst/>
+          </a:prstGeom>
+          <a:noFill/>
+        </p:spPr>
+        <p:txBody>
+          <a:bodyPr wrap="none" lIns="0" tIns="38100" rIns="0" bIns="38100">
+            <a:spAutoFit/>
+          </a:bodyPr>
+          <a:lstStyle/>
+          <a:p>
+            <a:r>
+              <a:rPr sz="1500" b="1">
+                <a:solidFill>
+                  <a:srgbClr val="C9A227"/>
+                </a:solidFill>
+                <a:latin typeface="Calibri"/>
+              </a:rPr>
+              <a:t>18.</a:t>
+            </a:r>
+            <a:r>
+              <a:rPr sz="1500">
+                <a:solidFill>
+                  <a:srgbClr val="1A1A1A"/>
+                </a:solidFill>
+                <a:latin typeface="Calibri"/>
+              </a:rPr>
+              <a:t>   Future Work</a:t>
+            </a:r>
+          </a:p>
+        </p:txBody>
+      </p:sp>
+      <p:sp>
+        <p:nvSpPr>
+          <p:cNvPr id="22" name="TextBox 21"/>
+          <p:cNvSpPr txBox="1"/>
+          <p:nvPr/>
+        </p:nvSpPr>
+        <p:spPr>
+          <a:xfrm>
+            <a:off x="6217920" y="4517136"/>
+            <a:ext cx="5486400" cy="384048"/>
+          </a:xfrm>
+          <a:prstGeom prst="rect">
+            <a:avLst/>
+          </a:prstGeom>
+          <a:noFill/>
+        </p:spPr>
+        <p:txBody>
+          <a:bodyPr wrap="none" lIns="0" tIns="38100" rIns="0" bIns="38100">
+            <a:spAutoFit/>
+          </a:bodyPr>
+          <a:lstStyle/>
+          <a:p>
+            <a:r>
+              <a:rPr sz="1500" b="1">
+                <a:solidFill>
+                  <a:srgbClr val="C9A227"/>
+                </a:solidFill>
+                <a:latin typeface="Calibri"/>
+              </a:rPr>
+              <a:t>19.</a:t>
+            </a:r>
+            <a:r>
+              <a:rPr sz="1500">
+                <a:solidFill>
+                  <a:srgbClr val="1A1A1A"/>
+                </a:solidFill>
+                <a:latin typeface="Calibri"/>
+              </a:rPr>
+              <a:t>   Summary</a:t>
+            </a:r>
+          </a:p>
+        </p:txBody>
+      </p:sp>
+      <p:sp>
+        <p:nvSpPr>
+          <p:cNvPr id="23" name="TextBox 22"/>
+          <p:cNvSpPr txBox="1"/>
+          <p:nvPr/>
+        </p:nvSpPr>
+        <p:spPr>
+          <a:xfrm>
+            <a:off x="365760" y="6446520"/>
+            <a:ext cx="5486400" cy="320040"/>
+          </a:xfrm>
+          <a:prstGeom prst="rect">
+            <a:avLst/>
+          </a:prstGeom>
+          <a:noFill/>
+        </p:spPr>
+        <p:txBody>
+          <a:bodyPr wrap="none">
+            <a:spAutoFit/>
+          </a:bodyPr>
+          <a:lstStyle/>
+          <a:p>
+            <a:r>
+              <a:rPr sz="900">
+                <a:solidFill>
+                  <a:srgbClr val="6B6B6B"/>
+                </a:solidFill>
+                <a:latin typeface="Calibri"/>
+              </a:rPr>
+              <a:t>CSCE526301  ·  LLM-Powered Knowledge Graph Extractor</a:t>
+            </a:r>
+          </a:p>
+        </p:txBody>
+      </p:sp>
+      <p:sp>
+        <p:nvSpPr>
+          <p:cNvPr id="24" name="TextBox 23"/>
+          <p:cNvSpPr txBox="1"/>
+          <p:nvPr/>
+        </p:nvSpPr>
+        <p:spPr>
+          <a:xfrm>
             <a:off x="11247120" y="6446520"/>
             <a:ext cx="822960" cy="320040"/>
           </a:xfrm>
@@ -9042,7 +9029,7 @@
           <a:noFill/>
         </p:spPr>
         <p:txBody>
-          <a:bodyPr wrap="none" lIns="0" rIns="0">
+          <a:bodyPr wrap="none">
             <a:spAutoFit/>
           </a:bodyPr>
           <a:lstStyle/>
@@ -9055,7 +9042,7 @@
                 </a:solidFill>
                 <a:latin typeface="Calibri"/>
               </a:rPr>
-              <a:t>3 / 19</a:t>
+              <a:t>2 / 19</a:t>
             </a:r>
           </a:p>
         </p:txBody>
@@ -9159,7 +9146,7 @@
                 </a:solidFill>
                 <a:latin typeface="Calibri"/>
               </a:rPr>
-              <a:t>BACKGROUND</a:t>
+              <a:t>MOTIVATION</a:t>
             </a:r>
           </a:p>
         </p:txBody>
@@ -9194,7 +9181,7 @@
                 </a:solidFill>
                 <a:latin typeface="Calibri"/>
               </a:rPr>
-              <a:t>A Short History</a:t>
+              <a:t>The Problem</a:t>
             </a:r>
           </a:p>
         </p:txBody>
@@ -9271,7 +9258,7 @@
               </a:spcAft>
             </a:pPr>
             <a:r>
-              <a:rPr sz="1800" b="1">
+              <a:rPr sz="1800" b="1" dirty="0">
                 <a:solidFill>
                   <a:srgbClr val="C9A227"/>
                 </a:solidFill>
@@ -9280,22 +9267,22 @@
               <a:t>•  </a:t>
             </a:r>
             <a:r>
-              <a:rPr sz="1800" b="1">
+              <a:rPr sz="1800" b="1" dirty="0">
                 <a:solidFill>
                   <a:srgbClr val="1F3A5F"/>
                 </a:solidFill>
                 <a:latin typeface="Calibri"/>
               </a:rPr>
-              <a:t>Rule-based (1990s–2000s):</a:t>
-            </a:r>
-            <a:r>
-              <a:rPr sz="1800">
+              <a:t>Knowledge Acquisition Bottleneck</a:t>
+            </a:r>
+            <a:r>
+              <a:rPr sz="1800" dirty="0">
                 <a:solidFill>
                   <a:srgbClr val="1A1A1A"/>
                 </a:solidFill>
                 <a:latin typeface="Calibri"/>
               </a:rPr>
-              <a:t>  regex, parsers, hand-crafted patterns. Precise, brittle.</a:t>
+              <a:t>  (Feigenbaum, 1977)</a:t>
             </a:r>
           </a:p>
           <a:p>
@@ -9305,7 +9292,7 @@
               </a:spcAft>
             </a:pPr>
             <a:r>
-              <a:rPr sz="1800" b="1">
+              <a:rPr sz="1800" b="1" dirty="0">
                 <a:solidFill>
                   <a:srgbClr val="C9A227"/>
                 </a:solidFill>
@@ -9314,22 +9301,13 @@
               <a:t>•  </a:t>
             </a:r>
             <a:r>
-              <a:rPr sz="1800" b="1">
-                <a:solidFill>
-                  <a:srgbClr val="1F3A5F"/>
-                </a:solidFill>
-                <a:latin typeface="Calibri"/>
-              </a:rPr>
-              <a:t>Statistical / embeddings (2010s):</a:t>
-            </a:r>
-            <a:r>
-              <a:rPr sz="1800">
+              <a:rPr sz="1800" dirty="0">
                 <a:solidFill>
                   <a:srgbClr val="1A1A1A"/>
                 </a:solidFill>
                 <a:latin typeface="Calibri"/>
               </a:rPr>
-              <a:t>  TransE, RotatE. Learn from existing graphs, cannot read new text.</a:t>
+              <a:t>Knowledge graphs are useful for search, QA, and reasoning.</a:t>
             </a:r>
           </a:p>
           <a:p>
@@ -9339,7 +9317,7 @@
               </a:spcAft>
             </a:pPr>
             <a:r>
-              <a:rPr sz="1800" b="1">
+              <a:rPr sz="1800" b="1" dirty="0">
                 <a:solidFill>
                   <a:srgbClr val="C9A227"/>
                 </a:solidFill>
@@ -9348,22 +9326,13 @@
               <a:t>•  </a:t>
             </a:r>
             <a:r>
-              <a:rPr sz="1800" b="1">
-                <a:solidFill>
-                  <a:srgbClr val="1F3A5F"/>
-                </a:solidFill>
-                <a:latin typeface="Calibri"/>
-              </a:rPr>
-              <a:t>LLM-based (2020s):</a:t>
-            </a:r>
-            <a:r>
-              <a:rPr sz="1800">
+              <a:rPr sz="1800" dirty="0">
                 <a:solidFill>
                   <a:srgbClr val="1A1A1A"/>
                 </a:solidFill>
                 <a:latin typeface="Calibri"/>
               </a:rPr>
-              <a:t>  GPT, Claude, Gemini. Read free text, but hallucinate and invent relation names.</a:t>
+              <a:t>But building them by hand is slow and expensive.</a:t>
             </a:r>
           </a:p>
         </p:txBody>
@@ -9376,8 +9345,8 @@
         </p:nvSpPr>
         <p:spPr>
           <a:xfrm>
-            <a:off x="548640" y="5120640"/>
-            <a:ext cx="11064240" cy="914400"/>
+            <a:off x="548640" y="4023360"/>
+            <a:ext cx="11064240" cy="2011680"/>
           </a:xfrm>
           <a:prstGeom prst="roundRect">
             <a:avLst>
@@ -9424,8 +9393,8 @@
         </p:nvSpPr>
         <p:spPr>
           <a:xfrm>
-            <a:off x="868680" y="5257800"/>
-            <a:ext cx="10515600" cy="731520"/>
+            <a:off x="868680" y="4160520"/>
+            <a:ext cx="10515600" cy="1828800"/>
           </a:xfrm>
           <a:prstGeom prst="rect">
             <a:avLst/>
@@ -9433,20 +9402,30 @@
           <a:noFill/>
         </p:spPr>
         <p:txBody>
-          <a:bodyPr wrap="none">
+          <a:bodyPr wrap="square" lIns="0">
             <a:spAutoFit/>
           </a:bodyPr>
           <a:lstStyle/>
           <a:p>
-            <a:pPr algn="l"/>
-            <a:r>
-              <a:rPr sz="1500" b="0">
+            <a:r>
+              <a:rPr sz="1400" b="1">
+                <a:solidFill>
+                  <a:srgbClr val="C9A227"/>
+                </a:solidFill>
+                <a:latin typeface="Calibri"/>
+              </a:rPr>
+              <a:t>Goal of this project</a:t>
+            </a:r>
+          </a:p>
+          <a:p>
+            <a:r>
+              <a:rPr sz="1800">
                 <a:solidFill>
                   <a:srgbClr val="1A1A1A"/>
                 </a:solidFill>
                 <a:latin typeface="Calibri"/>
               </a:rPr>
-              <a:t>This project sits in the third generation — with explicit controls to keep the output usable.</a:t>
+              <a:t>Take a paragraph of English text and return a clean, typed, evidence-backed knowledge graph the user can read and explore.</a:t>
             </a:r>
           </a:p>
         </p:txBody>
@@ -9481,7 +9460,7 @@
                 </a:solidFill>
                 <a:latin typeface="Calibri"/>
               </a:rPr>
-              <a:t>4 / 19</a:t>
+              <a:t>3 / 19</a:t>
             </a:r>
           </a:p>
         </p:txBody>
@@ -9585,7 +9564,7 @@
                 </a:solidFill>
                 <a:latin typeface="Calibri"/>
               </a:rPr>
-              <a:t>SCOPE</a:t>
+              <a:t>BACKGROUND</a:t>
             </a:r>
           </a:p>
         </p:txBody>
@@ -9620,7 +9599,7 @@
                 </a:solidFill>
                 <a:latin typeface="Calibri"/>
               </a:rPr>
-              <a:t>Project Goals</a:t>
+              <a:t>A Short History</a:t>
             </a:r>
           </a:p>
         </p:txBody>
@@ -9677,8 +9656,8 @@
         </p:nvSpPr>
         <p:spPr>
           <a:xfrm>
-            <a:off x="502920" y="1828800"/>
-            <a:ext cx="11064240" cy="1605568"/>
+            <a:off x="548640" y="1828800"/>
+            <a:ext cx="11064240" cy="4389120"/>
           </a:xfrm>
           <a:prstGeom prst="rect">
             <a:avLst/>
@@ -9693,11 +9672,11 @@
           <a:p>
             <a:pPr algn="l">
               <a:spcAft>
-                <a:spcPts val="400"/>
+                <a:spcPts val="800"/>
               </a:spcAft>
             </a:pPr>
             <a:r>
-              <a:rPr sz="1700" b="1" dirty="0">
+              <a:rPr sz="1800" b="1">
                 <a:solidFill>
                   <a:srgbClr val="C9A227"/>
                 </a:solidFill>
@@ -9706,32 +9685,32 @@
               <a:t>•  </a:t>
             </a:r>
             <a:r>
-              <a:rPr sz="1700" b="1" dirty="0">
+              <a:rPr sz="1800" b="1">
                 <a:solidFill>
                   <a:srgbClr val="1F3A5F"/>
                 </a:solidFill>
                 <a:latin typeface="Calibri"/>
               </a:rPr>
-              <a:t>Open entity types</a:t>
-            </a:r>
-            <a:r>
-              <a:rPr sz="1700" dirty="0">
+              <a:t>Rule-based (1990s–2000s):</a:t>
+            </a:r>
+            <a:r>
+              <a:rPr sz="1800">
                 <a:solidFill>
                   <a:srgbClr val="1A1A1A"/>
                 </a:solidFill>
                 <a:latin typeface="Calibri"/>
               </a:rPr>
-              <a:t>  discover what the text is about</a:t>
+              <a:t>  regex, parsers, hand-crafted patterns. Precise, brittle.</a:t>
             </a:r>
           </a:p>
           <a:p>
             <a:pPr algn="l">
               <a:spcAft>
-                <a:spcPts val="400"/>
+                <a:spcPts val="800"/>
               </a:spcAft>
             </a:pPr>
             <a:r>
-              <a:rPr sz="1700" b="1" dirty="0">
+              <a:rPr sz="1800" b="1">
                 <a:solidFill>
                   <a:srgbClr val="C9A227"/>
                 </a:solidFill>
@@ -9740,32 +9719,32 @@
               <a:t>•  </a:t>
             </a:r>
             <a:r>
-              <a:rPr sz="1700" b="1" dirty="0">
+              <a:rPr sz="1800" b="1">
                 <a:solidFill>
                   <a:srgbClr val="1F3A5F"/>
                 </a:solidFill>
                 <a:latin typeface="Calibri"/>
               </a:rPr>
-              <a:t>Closed relation vocabulary</a:t>
-            </a:r>
-            <a:r>
-              <a:rPr sz="1700" dirty="0">
+              <a:t>Statistical / embeddings (2010s):</a:t>
+            </a:r>
+            <a:r>
+              <a:rPr sz="1800">
                 <a:solidFill>
                   <a:srgbClr val="1A1A1A"/>
                 </a:solidFill>
                 <a:latin typeface="Calibri"/>
               </a:rPr>
-              <a:t>  23 named relations</a:t>
+              <a:t>  TransE, RotatE. Learn from existing graphs, cannot read new text.</a:t>
             </a:r>
           </a:p>
           <a:p>
             <a:pPr algn="l">
               <a:spcAft>
-                <a:spcPts val="400"/>
+                <a:spcPts val="800"/>
               </a:spcAft>
             </a:pPr>
             <a:r>
-              <a:rPr sz="1700" b="1" dirty="0">
+              <a:rPr sz="1800" b="1">
                 <a:solidFill>
                   <a:srgbClr val="C9A227"/>
                 </a:solidFill>
@@ -9774,103 +9753,112 @@
               <a:t>•  </a:t>
             </a:r>
             <a:r>
-              <a:rPr sz="1700" b="1" dirty="0">
+              <a:rPr sz="1800" b="1">
                 <a:solidFill>
                   <a:srgbClr val="1F3A5F"/>
                 </a:solidFill>
                 <a:latin typeface="Calibri"/>
               </a:rPr>
-              <a:t>Evidence</a:t>
-            </a:r>
-            <a:r>
-              <a:rPr sz="1700" dirty="0">
+              <a:t>LLM-based (2020s):</a:t>
+            </a:r>
+            <a:r>
+              <a:rPr sz="1800">
                 <a:solidFill>
                   <a:srgbClr val="1A1A1A"/>
                 </a:solidFill>
                 <a:latin typeface="Calibri"/>
               </a:rPr>
-              <a:t>  source sentence for every node and edge</a:t>
-            </a:r>
-            <a:endParaRPr lang="en-US" sz="1700" dirty="0">
-              <a:solidFill>
-                <a:srgbClr val="1A1A1A"/>
-              </a:solidFill>
-              <a:latin typeface="Calibri"/>
-            </a:endParaRPr>
-          </a:p>
-          <a:p>
-            <a:pPr algn="l">
-              <a:spcAft>
-                <a:spcPts val="400"/>
-              </a:spcAft>
-            </a:pPr>
-            <a:r>
-              <a:rPr sz="1700" b="1" dirty="0">
-                <a:solidFill>
-                  <a:srgbClr val="C9A227"/>
-                </a:solidFill>
-                <a:latin typeface="Calibri"/>
-              </a:rPr>
-              <a:t>•  </a:t>
-            </a:r>
-            <a:r>
-              <a:rPr sz="1700" b="1" dirty="0">
-                <a:solidFill>
-                  <a:srgbClr val="1F3A5F"/>
-                </a:solidFill>
-                <a:latin typeface="Calibri"/>
-              </a:rPr>
-              <a:t>Interactive visualization</a:t>
-            </a:r>
-            <a:r>
-              <a:rPr sz="1700" dirty="0">
+              <a:t>  GPT, Claude, Gemini. Read free text, but hallucinate and invent relation names.</a:t>
+            </a:r>
+          </a:p>
+        </p:txBody>
+      </p:sp>
+      <p:sp>
+        <p:nvSpPr>
+          <p:cNvPr id="7" name="Rounded Rectangle 6"/>
+          <p:cNvSpPr/>
+          <p:nvPr/>
+        </p:nvSpPr>
+        <p:spPr>
+          <a:xfrm>
+            <a:off x="548640" y="5120640"/>
+            <a:ext cx="11064240" cy="914400"/>
+          </a:xfrm>
+          <a:prstGeom prst="roundRect">
+            <a:avLst>
+              <a:gd name="adj" fmla="val 6000"/>
+            </a:avLst>
+          </a:prstGeom>
+          <a:solidFill>
+            <a:srgbClr val="F4F1EA"/>
+          </a:solidFill>
+          <a:ln w="6350">
+            <a:solidFill>
+              <a:srgbClr val="E3DED3"/>
+            </a:solidFill>
+          </a:ln>
+        </p:spPr>
+        <p:style>
+          <a:lnRef idx="1">
+            <a:schemeClr val="accent1"/>
+          </a:lnRef>
+          <a:fillRef idx="3">
+            <a:schemeClr val="accent1"/>
+          </a:fillRef>
+          <a:effectRef idx="2">
+            <a:schemeClr val="accent1"/>
+          </a:effectRef>
+          <a:fontRef idx="minor">
+            <a:schemeClr val="lt1"/>
+          </a:fontRef>
+        </p:style>
+        <p:txBody>
+          <a:bodyPr rtlCol="0" anchor="ctr"/>
+          <a:lstStyle/>
+          <a:p>
+            <a:pPr algn="ctr"/>
+            <a:endParaRPr/>
+          </a:p>
+        </p:txBody>
+      </p:sp>
+      <p:sp>
+        <p:nvSpPr>
+          <p:cNvPr id="8" name="TextBox 7"/>
+          <p:cNvSpPr txBox="1"/>
+          <p:nvPr/>
+        </p:nvSpPr>
+        <p:spPr>
+          <a:xfrm>
+            <a:off x="868680" y="5257800"/>
+            <a:ext cx="10515600" cy="731520"/>
+          </a:xfrm>
+          <a:prstGeom prst="rect">
+            <a:avLst/>
+          </a:prstGeom>
+          <a:noFill/>
+        </p:spPr>
+        <p:txBody>
+          <a:bodyPr wrap="none">
+            <a:spAutoFit/>
+          </a:bodyPr>
+          <a:lstStyle/>
+          <a:p>
+            <a:pPr algn="l"/>
+            <a:r>
+              <a:rPr sz="1500" b="0" dirty="0">
                 <a:solidFill>
                   <a:srgbClr val="1A1A1A"/>
                 </a:solidFill>
                 <a:latin typeface="Calibri"/>
               </a:rPr>
-              <a:t>  filters, search, importance ranking</a:t>
-            </a:r>
-          </a:p>
-          <a:p>
-            <a:pPr algn="l">
-              <a:spcAft>
-                <a:spcPts val="400"/>
-              </a:spcAft>
-            </a:pPr>
-            <a:r>
-              <a:rPr sz="1700" b="1" dirty="0">
-                <a:solidFill>
-                  <a:srgbClr val="C9A227"/>
-                </a:solidFill>
-                <a:latin typeface="Calibri"/>
-              </a:rPr>
-              <a:t>•  </a:t>
-            </a:r>
-            <a:r>
-              <a:rPr sz="1700" b="1" dirty="0">
-                <a:solidFill>
-                  <a:srgbClr val="1F3A5F"/>
-                </a:solidFill>
-                <a:latin typeface="Calibri"/>
-              </a:rPr>
-              <a:t>RDF / Turtle export</a:t>
-            </a:r>
-            <a:r>
-              <a:rPr sz="1700" dirty="0">
-                <a:solidFill>
-                  <a:srgbClr val="1A1A1A"/>
-                </a:solidFill>
-                <a:latin typeface="Calibri"/>
-              </a:rPr>
-              <a:t>  with reified provenance</a:t>
-            </a:r>
-          </a:p>
-        </p:txBody>
-      </p:sp>
-      <p:sp>
-        <p:nvSpPr>
-          <p:cNvPr id="8" name="TextBox 7"/>
+              <a:t>This project sits in the third generation — with explicit controls to keep the output usable.</a:t>
+            </a:r>
+          </a:p>
+        </p:txBody>
+      </p:sp>
+      <p:sp>
+        <p:nvSpPr>
+          <p:cNvPr id="10" name="TextBox 9"/>
           <p:cNvSpPr txBox="1"/>
           <p:nvPr/>
         </p:nvSpPr>
@@ -9898,7 +9886,7 @@
                 </a:solidFill>
                 <a:latin typeface="Calibri"/>
               </a:rPr>
-              <a:t>5 / 19</a:t>
+              <a:t>4 / 19</a:t>
             </a:r>
           </a:p>
         </p:txBody>
@@ -10002,7 +9990,7 @@
                 </a:solidFill>
                 <a:latin typeface="Calibri"/>
               </a:rPr>
-              <a:t>PIPELINE</a:t>
+              <a:t>SCOPE</a:t>
             </a:r>
           </a:p>
         </p:txBody>
@@ -10037,7 +10025,7 @@
                 </a:solidFill>
                 <a:latin typeface="Calibri"/>
               </a:rPr>
-              <a:t>System Architecture</a:t>
+              <a:t>Project Goals</a:t>
             </a:r>
           </a:p>
         </p:txBody>
@@ -10088,563 +10076,206 @@
       </p:sp>
       <p:sp>
         <p:nvSpPr>
-          <p:cNvPr id="6" name="Rounded Rectangle 5"/>
-          <p:cNvSpPr/>
-          <p:nvPr/>
-        </p:nvSpPr>
-        <p:spPr>
-          <a:xfrm>
-            <a:off x="2377440" y="1828800"/>
-            <a:ext cx="7406640" cy="594360"/>
-          </a:xfrm>
-          <a:prstGeom prst="roundRect">
-            <a:avLst>
-              <a:gd name="adj" fmla="val 30000"/>
-            </a:avLst>
-          </a:prstGeom>
-          <a:solidFill>
-            <a:srgbClr val="F4F1EA"/>
-          </a:solidFill>
-          <a:ln w="15875">
-            <a:solidFill>
-              <a:srgbClr val="1F3A5F"/>
-            </a:solidFill>
-          </a:ln>
-        </p:spPr>
-        <p:style>
-          <a:lnRef idx="1">
-            <a:schemeClr val="accent1"/>
-          </a:lnRef>
-          <a:fillRef idx="3">
-            <a:schemeClr val="accent1"/>
-          </a:fillRef>
-          <a:effectRef idx="2">
-            <a:schemeClr val="accent1"/>
-          </a:effectRef>
-          <a:fontRef idx="minor">
-            <a:schemeClr val="lt1"/>
-          </a:fontRef>
-        </p:style>
-        <p:txBody>
-          <a:bodyPr tIns="50800" bIns="50800" rtlCol="0" anchor="ctr"/>
-          <a:lstStyle/>
-          <a:p>
-            <a:pPr algn="ctr"/>
-            <a:r>
-              <a:rPr sz="1500" b="1">
+          <p:cNvPr id="6" name="TextBox 5"/>
+          <p:cNvSpPr txBox="1"/>
+          <p:nvPr/>
+        </p:nvSpPr>
+        <p:spPr>
+          <a:xfrm>
+            <a:off x="502920" y="1828800"/>
+            <a:ext cx="11064240" cy="1605568"/>
+          </a:xfrm>
+          <a:prstGeom prst="rect">
+            <a:avLst/>
+          </a:prstGeom>
+          <a:noFill/>
+        </p:spPr>
+        <p:txBody>
+          <a:bodyPr wrap="square" lIns="0">
+            <a:spAutoFit/>
+          </a:bodyPr>
+          <a:lstStyle/>
+          <a:p>
+            <a:pPr algn="l">
+              <a:spcAft>
+                <a:spcPts val="400"/>
+              </a:spcAft>
+            </a:pPr>
+            <a:r>
+              <a:rPr sz="1700" b="1" dirty="0">
+                <a:solidFill>
+                  <a:srgbClr val="C9A227"/>
+                </a:solidFill>
+                <a:latin typeface="Calibri"/>
+              </a:rPr>
+              <a:t>•  </a:t>
+            </a:r>
+            <a:r>
+              <a:rPr sz="1700" b="1" dirty="0">
                 <a:solidFill>
                   <a:srgbClr val="1F3A5F"/>
                 </a:solidFill>
                 <a:latin typeface="Calibri"/>
               </a:rPr>
-              <a:t>User pastes text</a:t>
-            </a:r>
-          </a:p>
-        </p:txBody>
-      </p:sp>
-      <p:sp>
-        <p:nvSpPr>
-          <p:cNvPr id="7" name="Down Arrow 6"/>
-          <p:cNvSpPr/>
-          <p:nvPr/>
-        </p:nvSpPr>
-        <p:spPr>
-          <a:xfrm>
-            <a:off x="5897880" y="2427732"/>
-            <a:ext cx="365760" cy="109728"/>
-          </a:xfrm>
-          <a:prstGeom prst="downArrow">
-            <a:avLst/>
-          </a:prstGeom>
-          <a:solidFill>
-            <a:srgbClr val="C9A227"/>
-          </a:solidFill>
-          <a:ln>
-            <a:noFill/>
-          </a:ln>
-        </p:spPr>
-        <p:style>
-          <a:lnRef idx="1">
-            <a:schemeClr val="accent1"/>
-          </a:lnRef>
-          <a:fillRef idx="3">
-            <a:schemeClr val="accent1"/>
-          </a:fillRef>
-          <a:effectRef idx="2">
-            <a:schemeClr val="accent1"/>
-          </a:effectRef>
-          <a:fontRef idx="minor">
-            <a:schemeClr val="lt1"/>
-          </a:fontRef>
-        </p:style>
-        <p:txBody>
-          <a:bodyPr rtlCol="0" anchor="ctr"/>
-          <a:lstStyle/>
-          <a:p>
-            <a:pPr algn="ctr"/>
-            <a:endParaRPr/>
-          </a:p>
-        </p:txBody>
-      </p:sp>
-      <p:sp>
-        <p:nvSpPr>
-          <p:cNvPr id="8" name="Rounded Rectangle 7"/>
-          <p:cNvSpPr/>
-          <p:nvPr/>
-        </p:nvSpPr>
-        <p:spPr>
-          <a:xfrm>
-            <a:off x="2377440" y="2532888"/>
-            <a:ext cx="7406640" cy="594360"/>
-          </a:xfrm>
-          <a:prstGeom prst="roundRect">
-            <a:avLst>
-              <a:gd name="adj" fmla="val 30000"/>
-            </a:avLst>
-          </a:prstGeom>
-          <a:solidFill>
-            <a:srgbClr val="F4F1EA"/>
-          </a:solidFill>
-          <a:ln w="15875">
-            <a:solidFill>
-              <a:srgbClr val="1F3A5F"/>
-            </a:solidFill>
-          </a:ln>
-        </p:spPr>
-        <p:style>
-          <a:lnRef idx="1">
-            <a:schemeClr val="accent1"/>
-          </a:lnRef>
-          <a:fillRef idx="3">
-            <a:schemeClr val="accent1"/>
-          </a:fillRef>
-          <a:effectRef idx="2">
-            <a:schemeClr val="accent1"/>
-          </a:effectRef>
-          <a:fontRef idx="minor">
-            <a:schemeClr val="lt1"/>
-          </a:fontRef>
-        </p:style>
-        <p:txBody>
-          <a:bodyPr tIns="50800" bIns="50800" rtlCol="0" anchor="ctr"/>
-          <a:lstStyle/>
-          <a:p>
-            <a:pPr algn="ctr"/>
-            <a:r>
-              <a:rPr sz="1500" b="1">
+              <a:t>Open entity types</a:t>
+            </a:r>
+            <a:r>
+              <a:rPr sz="1700" dirty="0">
+                <a:solidFill>
+                  <a:srgbClr val="1A1A1A"/>
+                </a:solidFill>
+                <a:latin typeface="Calibri"/>
+              </a:rPr>
+              <a:t>  discover what the text is about</a:t>
+            </a:r>
+          </a:p>
+          <a:p>
+            <a:pPr algn="l">
+              <a:spcAft>
+                <a:spcPts val="400"/>
+              </a:spcAft>
+            </a:pPr>
+            <a:r>
+              <a:rPr sz="1700" b="1" dirty="0">
+                <a:solidFill>
+                  <a:srgbClr val="C9A227"/>
+                </a:solidFill>
+                <a:latin typeface="Calibri"/>
+              </a:rPr>
+              <a:t>•  </a:t>
+            </a:r>
+            <a:r>
+              <a:rPr sz="1700" b="1" dirty="0">
                 <a:solidFill>
                   <a:srgbClr val="1F3A5F"/>
                 </a:solidFill>
                 <a:latin typeface="Calibri"/>
               </a:rPr>
-              <a:t>Next.js frontend  /  /extract route</a:t>
-            </a:r>
-          </a:p>
-        </p:txBody>
-      </p:sp>
-      <p:sp>
-        <p:nvSpPr>
-          <p:cNvPr id="9" name="Down Arrow 8"/>
-          <p:cNvSpPr/>
-          <p:nvPr/>
-        </p:nvSpPr>
-        <p:spPr>
-          <a:xfrm>
-            <a:off x="5897880" y="3131820"/>
-            <a:ext cx="365760" cy="109728"/>
-          </a:xfrm>
-          <a:prstGeom prst="downArrow">
-            <a:avLst/>
-          </a:prstGeom>
-          <a:solidFill>
-            <a:srgbClr val="C9A227"/>
-          </a:solidFill>
-          <a:ln>
-            <a:noFill/>
-          </a:ln>
-        </p:spPr>
-        <p:style>
-          <a:lnRef idx="1">
-            <a:schemeClr val="accent1"/>
-          </a:lnRef>
-          <a:fillRef idx="3">
-            <a:schemeClr val="accent1"/>
-          </a:fillRef>
-          <a:effectRef idx="2">
-            <a:schemeClr val="accent1"/>
-          </a:effectRef>
-          <a:fontRef idx="minor">
-            <a:schemeClr val="lt1"/>
-          </a:fontRef>
-        </p:style>
-        <p:txBody>
-          <a:bodyPr rtlCol="0" anchor="ctr"/>
-          <a:lstStyle/>
-          <a:p>
-            <a:pPr algn="ctr"/>
-            <a:endParaRPr/>
-          </a:p>
-        </p:txBody>
-      </p:sp>
-      <p:sp>
-        <p:nvSpPr>
-          <p:cNvPr id="10" name="Rounded Rectangle 9"/>
-          <p:cNvSpPr/>
-          <p:nvPr/>
-        </p:nvSpPr>
-        <p:spPr>
-          <a:xfrm>
-            <a:off x="2377440" y="3236976"/>
-            <a:ext cx="7406640" cy="594360"/>
-          </a:xfrm>
-          <a:prstGeom prst="roundRect">
-            <a:avLst>
-              <a:gd name="adj" fmla="val 30000"/>
-            </a:avLst>
-          </a:prstGeom>
-          <a:solidFill>
-            <a:srgbClr val="F4F1EA"/>
-          </a:solidFill>
-          <a:ln w="15875">
-            <a:solidFill>
-              <a:srgbClr val="1F3A5F"/>
-            </a:solidFill>
-          </a:ln>
-        </p:spPr>
-        <p:style>
-          <a:lnRef idx="1">
-            <a:schemeClr val="accent1"/>
-          </a:lnRef>
-          <a:fillRef idx="3">
-            <a:schemeClr val="accent1"/>
-          </a:fillRef>
-          <a:effectRef idx="2">
-            <a:schemeClr val="accent1"/>
-          </a:effectRef>
-          <a:fontRef idx="minor">
-            <a:schemeClr val="lt1"/>
-          </a:fontRef>
-        </p:style>
-        <p:txBody>
-          <a:bodyPr tIns="50800" bIns="50800" rtlCol="0" anchor="ctr"/>
-          <a:lstStyle/>
-          <a:p>
-            <a:pPr algn="ctr"/>
-            <a:r>
-              <a:rPr sz="1500" b="1">
+              <a:t>Closed relation vocabulary</a:t>
+            </a:r>
+            <a:r>
+              <a:rPr sz="1700" dirty="0">
+                <a:solidFill>
+                  <a:srgbClr val="1A1A1A"/>
+                </a:solidFill>
+                <a:latin typeface="Calibri"/>
+              </a:rPr>
+              <a:t>  23 named relations</a:t>
+            </a:r>
+          </a:p>
+          <a:p>
+            <a:pPr algn="l">
+              <a:spcAft>
+                <a:spcPts val="400"/>
+              </a:spcAft>
+            </a:pPr>
+            <a:r>
+              <a:rPr sz="1700" b="1" dirty="0">
+                <a:solidFill>
+                  <a:srgbClr val="C9A227"/>
+                </a:solidFill>
+                <a:latin typeface="Calibri"/>
+              </a:rPr>
+              <a:t>•  </a:t>
+            </a:r>
+            <a:r>
+              <a:rPr sz="1700" b="1" dirty="0">
                 <a:solidFill>
                   <a:srgbClr val="1F3A5F"/>
                 </a:solidFill>
                 <a:latin typeface="Calibri"/>
               </a:rPr>
-              <a:t>Node.js backend</a:t>
-            </a:r>
-          </a:p>
-        </p:txBody>
-      </p:sp>
-      <p:sp>
-        <p:nvSpPr>
-          <p:cNvPr id="11" name="Down Arrow 10"/>
-          <p:cNvSpPr/>
-          <p:nvPr/>
-        </p:nvSpPr>
-        <p:spPr>
-          <a:xfrm>
-            <a:off x="5897880" y="3835908"/>
-            <a:ext cx="365760" cy="109728"/>
-          </a:xfrm>
-          <a:prstGeom prst="downArrow">
-            <a:avLst/>
-          </a:prstGeom>
-          <a:solidFill>
-            <a:srgbClr val="C9A227"/>
-          </a:solidFill>
-          <a:ln>
-            <a:noFill/>
-          </a:ln>
-        </p:spPr>
-        <p:style>
-          <a:lnRef idx="1">
-            <a:schemeClr val="accent1"/>
-          </a:lnRef>
-          <a:fillRef idx="3">
-            <a:schemeClr val="accent1"/>
-          </a:fillRef>
-          <a:effectRef idx="2">
-            <a:schemeClr val="accent1"/>
-          </a:effectRef>
-          <a:fontRef idx="minor">
-            <a:schemeClr val="lt1"/>
-          </a:fontRef>
-        </p:style>
-        <p:txBody>
-          <a:bodyPr rtlCol="0" anchor="ctr"/>
-          <a:lstStyle/>
-          <a:p>
-            <a:pPr algn="ctr"/>
-            <a:endParaRPr/>
-          </a:p>
-        </p:txBody>
-      </p:sp>
-      <p:sp>
-        <p:nvSpPr>
-          <p:cNvPr id="12" name="Rounded Rectangle 11"/>
-          <p:cNvSpPr/>
-          <p:nvPr/>
-        </p:nvSpPr>
-        <p:spPr>
-          <a:xfrm>
-            <a:off x="2377440" y="3941064"/>
-            <a:ext cx="7406640" cy="594360"/>
-          </a:xfrm>
-          <a:prstGeom prst="roundRect">
-            <a:avLst>
-              <a:gd name="adj" fmla="val 30000"/>
-            </a:avLst>
-          </a:prstGeom>
-          <a:solidFill>
-            <a:srgbClr val="FBF4DF"/>
-          </a:solidFill>
-          <a:ln w="15875">
-            <a:solidFill>
-              <a:srgbClr val="C9A227"/>
-            </a:solidFill>
-          </a:ln>
-        </p:spPr>
-        <p:style>
-          <a:lnRef idx="1">
-            <a:schemeClr val="accent1"/>
-          </a:lnRef>
-          <a:fillRef idx="3">
-            <a:schemeClr val="accent1"/>
-          </a:fillRef>
-          <a:effectRef idx="2">
-            <a:schemeClr val="accent1"/>
-          </a:effectRef>
-          <a:fontRef idx="minor">
-            <a:schemeClr val="lt1"/>
-          </a:fontRef>
-        </p:style>
-        <p:txBody>
-          <a:bodyPr tIns="50800" bIns="50800" rtlCol="0" anchor="ctr"/>
-          <a:lstStyle/>
-          <a:p>
-            <a:pPr algn="ctr"/>
-            <a:r>
-              <a:rPr sz="1500" b="1">
+              <a:t>Evidence</a:t>
+            </a:r>
+            <a:r>
+              <a:rPr sz="1700" dirty="0">
+                <a:solidFill>
+                  <a:srgbClr val="1A1A1A"/>
+                </a:solidFill>
+                <a:latin typeface="Calibri"/>
+              </a:rPr>
+              <a:t>  source sentence for every node and edge</a:t>
+            </a:r>
+            <a:endParaRPr lang="en-US" sz="1700" dirty="0">
+              <a:solidFill>
+                <a:srgbClr val="1A1A1A"/>
+              </a:solidFill>
+              <a:latin typeface="Calibri"/>
+            </a:endParaRPr>
+          </a:p>
+          <a:p>
+            <a:pPr algn="l">
+              <a:spcAft>
+                <a:spcPts val="400"/>
+              </a:spcAft>
+            </a:pPr>
+            <a:r>
+              <a:rPr sz="1700" b="1" dirty="0">
                 <a:solidFill>
                   <a:srgbClr val="C9A227"/>
                 </a:solidFill>
                 <a:latin typeface="Calibri"/>
               </a:rPr>
-              <a:t>LLM provider  (Anthropic / OpenAI / Gemini)</a:t>
-            </a:r>
-          </a:p>
-        </p:txBody>
-      </p:sp>
-      <p:sp>
-        <p:nvSpPr>
-          <p:cNvPr id="13" name="Down Arrow 12"/>
-          <p:cNvSpPr/>
-          <p:nvPr/>
-        </p:nvSpPr>
-        <p:spPr>
-          <a:xfrm>
-            <a:off x="5897880" y="4539996"/>
-            <a:ext cx="365760" cy="109728"/>
-          </a:xfrm>
-          <a:prstGeom prst="downArrow">
-            <a:avLst/>
-          </a:prstGeom>
-          <a:solidFill>
-            <a:srgbClr val="C9A227"/>
-          </a:solidFill>
-          <a:ln>
-            <a:noFill/>
-          </a:ln>
-        </p:spPr>
-        <p:style>
-          <a:lnRef idx="1">
-            <a:schemeClr val="accent1"/>
-          </a:lnRef>
-          <a:fillRef idx="3">
-            <a:schemeClr val="accent1"/>
-          </a:fillRef>
-          <a:effectRef idx="2">
-            <a:schemeClr val="accent1"/>
-          </a:effectRef>
-          <a:fontRef idx="minor">
-            <a:schemeClr val="lt1"/>
-          </a:fontRef>
-        </p:style>
-        <p:txBody>
-          <a:bodyPr rtlCol="0" anchor="ctr"/>
-          <a:lstStyle/>
-          <a:p>
-            <a:pPr algn="ctr"/>
-            <a:endParaRPr/>
-          </a:p>
-        </p:txBody>
-      </p:sp>
-      <p:sp>
-        <p:nvSpPr>
-          <p:cNvPr id="14" name="Rounded Rectangle 13"/>
-          <p:cNvSpPr/>
-          <p:nvPr/>
-        </p:nvSpPr>
-        <p:spPr>
-          <a:xfrm>
-            <a:off x="2377440" y="4645152"/>
-            <a:ext cx="7406640" cy="594360"/>
-          </a:xfrm>
-          <a:prstGeom prst="roundRect">
-            <a:avLst>
-              <a:gd name="adj" fmla="val 30000"/>
-            </a:avLst>
-          </a:prstGeom>
-          <a:solidFill>
-            <a:srgbClr val="F4F1EA"/>
-          </a:solidFill>
-          <a:ln w="15875">
-            <a:solidFill>
-              <a:srgbClr val="1F3A5F"/>
-            </a:solidFill>
-          </a:ln>
-        </p:spPr>
-        <p:style>
-          <a:lnRef idx="1">
-            <a:schemeClr val="accent1"/>
-          </a:lnRef>
-          <a:fillRef idx="3">
-            <a:schemeClr val="accent1"/>
-          </a:fillRef>
-          <a:effectRef idx="2">
-            <a:schemeClr val="accent1"/>
-          </a:effectRef>
-          <a:fontRef idx="minor">
-            <a:schemeClr val="lt1"/>
-          </a:fontRef>
-        </p:style>
-        <p:txBody>
-          <a:bodyPr tIns="50800" bIns="50800" rtlCol="0" anchor="ctr"/>
-          <a:lstStyle/>
-          <a:p>
-            <a:pPr algn="ctr"/>
-            <a:r>
-              <a:rPr sz="1500" b="1">
+              <a:t>•  </a:t>
+            </a:r>
+            <a:r>
+              <a:rPr sz="1700" b="1" dirty="0">
                 <a:solidFill>
                   <a:srgbClr val="1F3A5F"/>
                 </a:solidFill>
                 <a:latin typeface="Calibri"/>
               </a:rPr>
-              <a:t>normalizeGraph()  ·  dedup · alias merge · validate</a:t>
-            </a:r>
-          </a:p>
-        </p:txBody>
-      </p:sp>
-      <p:sp>
-        <p:nvSpPr>
-          <p:cNvPr id="15" name="Down Arrow 14"/>
-          <p:cNvSpPr/>
-          <p:nvPr/>
-        </p:nvSpPr>
-        <p:spPr>
-          <a:xfrm>
-            <a:off x="5897880" y="5244084"/>
-            <a:ext cx="365760" cy="109728"/>
-          </a:xfrm>
-          <a:prstGeom prst="downArrow">
-            <a:avLst/>
-          </a:prstGeom>
-          <a:solidFill>
-            <a:srgbClr val="C9A227"/>
-          </a:solidFill>
-          <a:ln>
-            <a:noFill/>
-          </a:ln>
-        </p:spPr>
-        <p:style>
-          <a:lnRef idx="1">
-            <a:schemeClr val="accent1"/>
-          </a:lnRef>
-          <a:fillRef idx="3">
-            <a:schemeClr val="accent1"/>
-          </a:fillRef>
-          <a:effectRef idx="2">
-            <a:schemeClr val="accent1"/>
-          </a:effectRef>
-          <a:fontRef idx="minor">
-            <a:schemeClr val="lt1"/>
-          </a:fontRef>
-        </p:style>
-        <p:txBody>
-          <a:bodyPr rtlCol="0" anchor="ctr"/>
-          <a:lstStyle/>
-          <a:p>
-            <a:pPr algn="ctr"/>
-            <a:endParaRPr/>
-          </a:p>
-        </p:txBody>
-      </p:sp>
-      <p:sp>
-        <p:nvSpPr>
-          <p:cNvPr id="16" name="Rounded Rectangle 15"/>
-          <p:cNvSpPr/>
-          <p:nvPr/>
-        </p:nvSpPr>
-        <p:spPr>
-          <a:xfrm>
-            <a:off x="2377440" y="5349240"/>
-            <a:ext cx="7406640" cy="594360"/>
-          </a:xfrm>
-          <a:prstGeom prst="roundRect">
-            <a:avLst>
-              <a:gd name="adj" fmla="val 30000"/>
-            </a:avLst>
-          </a:prstGeom>
-          <a:solidFill>
-            <a:srgbClr val="F4F1EA"/>
-          </a:solidFill>
-          <a:ln w="15875">
-            <a:solidFill>
-              <a:srgbClr val="1F3A5F"/>
-            </a:solidFill>
-          </a:ln>
-        </p:spPr>
-        <p:style>
-          <a:lnRef idx="1">
-            <a:schemeClr val="accent1"/>
-          </a:lnRef>
-          <a:fillRef idx="3">
-            <a:schemeClr val="accent1"/>
-          </a:fillRef>
-          <a:effectRef idx="2">
-            <a:schemeClr val="accent1"/>
-          </a:effectRef>
-          <a:fontRef idx="minor">
-            <a:schemeClr val="lt1"/>
-          </a:fontRef>
-        </p:style>
-        <p:txBody>
-          <a:bodyPr tIns="50800" bIns="50800" rtlCol="0" anchor="ctr"/>
-          <a:lstStyle/>
-          <a:p>
-            <a:pPr algn="ctr"/>
-            <a:r>
-              <a:rPr sz="1500" b="1">
+              <a:t>Interactive visualization</a:t>
+            </a:r>
+            <a:r>
+              <a:rPr sz="1700" dirty="0">
+                <a:solidFill>
+                  <a:srgbClr val="1A1A1A"/>
+                </a:solidFill>
+                <a:latin typeface="Calibri"/>
+              </a:rPr>
+              <a:t>  filters, search, importance ranking</a:t>
+            </a:r>
+          </a:p>
+          <a:p>
+            <a:pPr algn="l">
+              <a:spcAft>
+                <a:spcPts val="400"/>
+              </a:spcAft>
+            </a:pPr>
+            <a:r>
+              <a:rPr sz="1700" b="1" dirty="0">
+                <a:solidFill>
+                  <a:srgbClr val="C9A227"/>
+                </a:solidFill>
+                <a:latin typeface="Calibri"/>
+              </a:rPr>
+              <a:t>•  </a:t>
+            </a:r>
+            <a:r>
+              <a:rPr sz="1700" b="1" dirty="0">
                 <a:solidFill>
                   <a:srgbClr val="1F3A5F"/>
                 </a:solidFill>
                 <a:latin typeface="Calibri"/>
               </a:rPr>
-              <a:t>Cytoscape.js graph  +  Turtle / JSON-LD export</a:t>
-            </a:r>
-          </a:p>
-        </p:txBody>
-      </p:sp>
-      <p:sp>
-        <p:nvSpPr>
-          <p:cNvPr id="18" name="TextBox 17"/>
+              <a:t>RDF / Turtle export</a:t>
+            </a:r>
+            <a:r>
+              <a:rPr sz="1700" dirty="0">
+                <a:solidFill>
+                  <a:srgbClr val="1A1A1A"/>
+                </a:solidFill>
+                <a:latin typeface="Calibri"/>
+              </a:rPr>
+              <a:t>  with reified provenance</a:t>
+            </a:r>
+          </a:p>
+        </p:txBody>
+      </p:sp>
+      <p:sp>
+        <p:nvSpPr>
+          <p:cNvPr id="8" name="TextBox 7"/>
           <p:cNvSpPr txBox="1"/>
           <p:nvPr/>
         </p:nvSpPr>
@@ -10672,7 +10303,7 @@
                 </a:solidFill>
                 <a:latin typeface="Calibri"/>
               </a:rPr>
-              <a:t>6 / 19</a:t>
+              <a:t>5 / 19</a:t>
             </a:r>
           </a:p>
         </p:txBody>
@@ -10776,7 +10407,7 @@
                 </a:solidFill>
                 <a:latin typeface="Calibri"/>
               </a:rPr>
-              <a:t>KNOWLEDGE MODEL</a:t>
+              <a:t>PIPELINE</a:t>
             </a:r>
           </a:p>
         </p:txBody>
@@ -10811,7 +10442,7 @@
                 </a:solidFill>
                 <a:latin typeface="Calibri"/>
               </a:rPr>
-              <a:t>Hybrid Schema</a:t>
+              <a:t>System Architecture</a:t>
             </a:r>
           </a:p>
         </p:txBody>
@@ -10868,18 +10499,18 @@
         </p:nvSpPr>
         <p:spPr>
           <a:xfrm>
-            <a:off x="502920" y="1828800"/>
-            <a:ext cx="5349240" cy="3657600"/>
+            <a:off x="2377440" y="1828800"/>
+            <a:ext cx="7406640" cy="594360"/>
           </a:xfrm>
           <a:prstGeom prst="roundRect">
             <a:avLst>
-              <a:gd name="adj" fmla="val 6000"/>
+              <a:gd name="adj" fmla="val 30000"/>
             </a:avLst>
           </a:prstGeom>
           <a:solidFill>
             <a:srgbClr val="F4F1EA"/>
           </a:solidFill>
-          <a:ln w="19050">
+          <a:ln w="15875">
             <a:solidFill>
               <a:srgbClr val="1F3A5F"/>
             </a:solidFill>
@@ -10900,108 +10531,41 @@
           </a:fontRef>
         </p:style>
         <p:txBody>
-          <a:bodyPr rtlCol="0" anchor="ctr"/>
+          <a:bodyPr tIns="50800" bIns="50800" rtlCol="0" anchor="ctr"/>
           <a:lstStyle/>
           <a:p>
             <a:pPr algn="ctr"/>
-            <a:endParaRPr/>
-          </a:p>
-        </p:txBody>
-      </p:sp>
-      <p:sp>
-        <p:nvSpPr>
-          <p:cNvPr id="7" name="TextBox 6"/>
-          <p:cNvSpPr txBox="1"/>
-          <p:nvPr/>
-        </p:nvSpPr>
-        <p:spPr>
-          <a:xfrm>
-            <a:off x="777240" y="2057400"/>
-            <a:ext cx="4800600" cy="548640"/>
-          </a:xfrm>
-          <a:prstGeom prst="rect">
-            <a:avLst/>
-          </a:prstGeom>
-          <a:noFill/>
-        </p:spPr>
-        <p:txBody>
-          <a:bodyPr wrap="none">
-            <a:spAutoFit/>
-          </a:bodyPr>
-          <a:lstStyle/>
-          <a:p>
-            <a:pPr algn="l"/>
-            <a:r>
-              <a:rPr sz="1800" b="1">
+            <a:r>
+              <a:rPr sz="1500" b="1">
                 <a:solidFill>
                   <a:srgbClr val="1F3A5F"/>
                 </a:solidFill>
                 <a:latin typeface="Calibri"/>
               </a:rPr>
-              <a:t>Entity types: OPEN</a:t>
-            </a:r>
-          </a:p>
-        </p:txBody>
-      </p:sp>
-      <p:sp>
-        <p:nvSpPr>
-          <p:cNvPr id="8" name="TextBox 7"/>
-          <p:cNvSpPr txBox="1"/>
-          <p:nvPr/>
-        </p:nvSpPr>
-        <p:spPr>
-          <a:xfrm>
-            <a:off x="777240" y="2743200"/>
-            <a:ext cx="4800600" cy="2560320"/>
-          </a:xfrm>
-          <a:prstGeom prst="rect">
-            <a:avLst/>
-          </a:prstGeom>
-          <a:noFill/>
-        </p:spPr>
-        <p:txBody>
-          <a:bodyPr wrap="square">
-            <a:spAutoFit/>
-          </a:bodyPr>
-          <a:lstStyle/>
-          <a:p>
-            <a:pPr algn="l"/>
-            <a:r>
-              <a:rPr sz="1600" b="0">
-                <a:solidFill>
-                  <a:srgbClr val="1A1A1A"/>
-                </a:solidFill>
-                <a:latin typeface="Calibri"/>
-              </a:rPr>
-              <a:t>The LLM picks the type (Person, Company, Mountain, Award, …).
-The system adapts to any domain.</a:t>
-            </a:r>
-          </a:p>
-        </p:txBody>
-      </p:sp>
-      <p:sp>
-        <p:nvSpPr>
-          <p:cNvPr id="9" name="Rounded Rectangle 8"/>
+              <a:t>User pastes text</a:t>
+            </a:r>
+          </a:p>
+        </p:txBody>
+      </p:sp>
+      <p:sp>
+        <p:nvSpPr>
+          <p:cNvPr id="7" name="Down Arrow 6"/>
           <p:cNvSpPr/>
           <p:nvPr/>
         </p:nvSpPr>
         <p:spPr>
           <a:xfrm>
-            <a:off x="6355080" y="1828800"/>
-            <a:ext cx="5349240" cy="3657600"/>
-          </a:xfrm>
-          <a:prstGeom prst="roundRect">
-            <a:avLst>
-              <a:gd name="adj" fmla="val 6000"/>
-            </a:avLst>
+            <a:off x="5897880" y="2427732"/>
+            <a:ext cx="365760" cy="109728"/>
+          </a:xfrm>
+          <a:prstGeom prst="downArrow">
+            <a:avLst/>
           </a:prstGeom>
           <a:solidFill>
-            <a:srgbClr val="F4F1EA"/>
+            <a:srgbClr val="C9A227"/>
           </a:solidFill>
-          <a:ln w="19050">
-            <a:solidFill>
-              <a:srgbClr val="C9A227"/>
-            </a:solidFill>
+          <a:ln>
+            <a:noFill/>
           </a:ln>
         </p:spPr>
         <p:style>
@@ -11029,112 +10593,463 @@
       </p:sp>
       <p:sp>
         <p:nvSpPr>
-          <p:cNvPr id="10" name="TextBox 9"/>
-          <p:cNvSpPr txBox="1"/>
-          <p:nvPr/>
-        </p:nvSpPr>
-        <p:spPr>
-          <a:xfrm>
-            <a:off x="6629400" y="2057400"/>
-            <a:ext cx="4800600" cy="548640"/>
-          </a:xfrm>
-          <a:prstGeom prst="rect">
-            <a:avLst/>
-          </a:prstGeom>
-          <a:noFill/>
-        </p:spPr>
-        <p:txBody>
-          <a:bodyPr wrap="none">
-            <a:spAutoFit/>
-          </a:bodyPr>
-          <a:lstStyle/>
-          <a:p>
-            <a:pPr algn="l"/>
-            <a:r>
-              <a:rPr sz="1800" b="1">
+          <p:cNvPr id="8" name="Rounded Rectangle 7"/>
+          <p:cNvSpPr/>
+          <p:nvPr/>
+        </p:nvSpPr>
+        <p:spPr>
+          <a:xfrm>
+            <a:off x="2377440" y="2532888"/>
+            <a:ext cx="7406640" cy="594360"/>
+          </a:xfrm>
+          <a:prstGeom prst="roundRect">
+            <a:avLst>
+              <a:gd name="adj" fmla="val 30000"/>
+            </a:avLst>
+          </a:prstGeom>
+          <a:solidFill>
+            <a:srgbClr val="F4F1EA"/>
+          </a:solidFill>
+          <a:ln w="15875">
+            <a:solidFill>
+              <a:srgbClr val="1F3A5F"/>
+            </a:solidFill>
+          </a:ln>
+        </p:spPr>
+        <p:style>
+          <a:lnRef idx="1">
+            <a:schemeClr val="accent1"/>
+          </a:lnRef>
+          <a:fillRef idx="3">
+            <a:schemeClr val="accent1"/>
+          </a:fillRef>
+          <a:effectRef idx="2">
+            <a:schemeClr val="accent1"/>
+          </a:effectRef>
+          <a:fontRef idx="minor">
+            <a:schemeClr val="lt1"/>
+          </a:fontRef>
+        </p:style>
+        <p:txBody>
+          <a:bodyPr tIns="50800" bIns="50800" rtlCol="0" anchor="ctr"/>
+          <a:lstStyle/>
+          <a:p>
+            <a:pPr algn="ctr"/>
+            <a:r>
+              <a:rPr sz="1500" b="1">
+                <a:solidFill>
+                  <a:srgbClr val="1F3A5F"/>
+                </a:solidFill>
+                <a:latin typeface="Calibri"/>
+              </a:rPr>
+              <a:t>Next.js frontend  /  /extract route</a:t>
+            </a:r>
+          </a:p>
+        </p:txBody>
+      </p:sp>
+      <p:sp>
+        <p:nvSpPr>
+          <p:cNvPr id="9" name="Down Arrow 8"/>
+          <p:cNvSpPr/>
+          <p:nvPr/>
+        </p:nvSpPr>
+        <p:spPr>
+          <a:xfrm>
+            <a:off x="5897880" y="3131820"/>
+            <a:ext cx="365760" cy="109728"/>
+          </a:xfrm>
+          <a:prstGeom prst="downArrow">
+            <a:avLst/>
+          </a:prstGeom>
+          <a:solidFill>
+            <a:srgbClr val="C9A227"/>
+          </a:solidFill>
+          <a:ln>
+            <a:noFill/>
+          </a:ln>
+        </p:spPr>
+        <p:style>
+          <a:lnRef idx="1">
+            <a:schemeClr val="accent1"/>
+          </a:lnRef>
+          <a:fillRef idx="3">
+            <a:schemeClr val="accent1"/>
+          </a:fillRef>
+          <a:effectRef idx="2">
+            <a:schemeClr val="accent1"/>
+          </a:effectRef>
+          <a:fontRef idx="minor">
+            <a:schemeClr val="lt1"/>
+          </a:fontRef>
+        </p:style>
+        <p:txBody>
+          <a:bodyPr rtlCol="0" anchor="ctr"/>
+          <a:lstStyle/>
+          <a:p>
+            <a:pPr algn="ctr"/>
+            <a:endParaRPr/>
+          </a:p>
+        </p:txBody>
+      </p:sp>
+      <p:sp>
+        <p:nvSpPr>
+          <p:cNvPr id="10" name="Rounded Rectangle 9"/>
+          <p:cNvSpPr/>
+          <p:nvPr/>
+        </p:nvSpPr>
+        <p:spPr>
+          <a:xfrm>
+            <a:off x="2377440" y="3236976"/>
+            <a:ext cx="7406640" cy="594360"/>
+          </a:xfrm>
+          <a:prstGeom prst="roundRect">
+            <a:avLst>
+              <a:gd name="adj" fmla="val 30000"/>
+            </a:avLst>
+          </a:prstGeom>
+          <a:solidFill>
+            <a:srgbClr val="F4F1EA"/>
+          </a:solidFill>
+          <a:ln w="15875">
+            <a:solidFill>
+              <a:srgbClr val="1F3A5F"/>
+            </a:solidFill>
+          </a:ln>
+        </p:spPr>
+        <p:style>
+          <a:lnRef idx="1">
+            <a:schemeClr val="accent1"/>
+          </a:lnRef>
+          <a:fillRef idx="3">
+            <a:schemeClr val="accent1"/>
+          </a:fillRef>
+          <a:effectRef idx="2">
+            <a:schemeClr val="accent1"/>
+          </a:effectRef>
+          <a:fontRef idx="minor">
+            <a:schemeClr val="lt1"/>
+          </a:fontRef>
+        </p:style>
+        <p:txBody>
+          <a:bodyPr tIns="50800" bIns="50800" rtlCol="0" anchor="ctr"/>
+          <a:lstStyle/>
+          <a:p>
+            <a:pPr algn="ctr"/>
+            <a:r>
+              <a:rPr sz="1500" b="1">
+                <a:solidFill>
+                  <a:srgbClr val="1F3A5F"/>
+                </a:solidFill>
+                <a:latin typeface="Calibri"/>
+              </a:rPr>
+              <a:t>Node.js backend</a:t>
+            </a:r>
+          </a:p>
+        </p:txBody>
+      </p:sp>
+      <p:sp>
+        <p:nvSpPr>
+          <p:cNvPr id="11" name="Down Arrow 10"/>
+          <p:cNvSpPr/>
+          <p:nvPr/>
+        </p:nvSpPr>
+        <p:spPr>
+          <a:xfrm>
+            <a:off x="5897880" y="3835908"/>
+            <a:ext cx="365760" cy="109728"/>
+          </a:xfrm>
+          <a:prstGeom prst="downArrow">
+            <a:avLst/>
+          </a:prstGeom>
+          <a:solidFill>
+            <a:srgbClr val="C9A227"/>
+          </a:solidFill>
+          <a:ln>
+            <a:noFill/>
+          </a:ln>
+        </p:spPr>
+        <p:style>
+          <a:lnRef idx="1">
+            <a:schemeClr val="accent1"/>
+          </a:lnRef>
+          <a:fillRef idx="3">
+            <a:schemeClr val="accent1"/>
+          </a:fillRef>
+          <a:effectRef idx="2">
+            <a:schemeClr val="accent1"/>
+          </a:effectRef>
+          <a:fontRef idx="minor">
+            <a:schemeClr val="lt1"/>
+          </a:fontRef>
+        </p:style>
+        <p:txBody>
+          <a:bodyPr rtlCol="0" anchor="ctr"/>
+          <a:lstStyle/>
+          <a:p>
+            <a:pPr algn="ctr"/>
+            <a:endParaRPr/>
+          </a:p>
+        </p:txBody>
+      </p:sp>
+      <p:sp>
+        <p:nvSpPr>
+          <p:cNvPr id="12" name="Rounded Rectangle 11"/>
+          <p:cNvSpPr/>
+          <p:nvPr/>
+        </p:nvSpPr>
+        <p:spPr>
+          <a:xfrm>
+            <a:off x="2377440" y="3941064"/>
+            <a:ext cx="7406640" cy="594360"/>
+          </a:xfrm>
+          <a:prstGeom prst="roundRect">
+            <a:avLst>
+              <a:gd name="adj" fmla="val 30000"/>
+            </a:avLst>
+          </a:prstGeom>
+          <a:solidFill>
+            <a:srgbClr val="FBF4DF"/>
+          </a:solidFill>
+          <a:ln w="15875">
+            <a:solidFill>
+              <a:srgbClr val="C9A227"/>
+            </a:solidFill>
+          </a:ln>
+        </p:spPr>
+        <p:style>
+          <a:lnRef idx="1">
+            <a:schemeClr val="accent1"/>
+          </a:lnRef>
+          <a:fillRef idx="3">
+            <a:schemeClr val="accent1"/>
+          </a:fillRef>
+          <a:effectRef idx="2">
+            <a:schemeClr val="accent1"/>
+          </a:effectRef>
+          <a:fontRef idx="minor">
+            <a:schemeClr val="lt1"/>
+          </a:fontRef>
+        </p:style>
+        <p:txBody>
+          <a:bodyPr tIns="50800" bIns="50800" rtlCol="0" anchor="ctr"/>
+          <a:lstStyle/>
+          <a:p>
+            <a:pPr algn="ctr"/>
+            <a:r>
+              <a:rPr sz="1500" b="1">
                 <a:solidFill>
                   <a:srgbClr val="C9A227"/>
                 </a:solidFill>
                 <a:latin typeface="Calibri"/>
               </a:rPr>
-              <a:t>Relations: CLOSED</a:t>
-            </a:r>
-          </a:p>
-        </p:txBody>
-      </p:sp>
-      <p:sp>
-        <p:nvSpPr>
-          <p:cNvPr id="11" name="TextBox 10"/>
-          <p:cNvSpPr txBox="1"/>
-          <p:nvPr/>
-        </p:nvSpPr>
-        <p:spPr>
-          <a:xfrm>
-            <a:off x="6629400" y="2743200"/>
-            <a:ext cx="4800600" cy="2560320"/>
-          </a:xfrm>
-          <a:prstGeom prst="rect">
-            <a:avLst/>
-          </a:prstGeom>
-          <a:noFill/>
-        </p:spPr>
-        <p:txBody>
-          <a:bodyPr wrap="square">
-            <a:spAutoFit/>
-          </a:bodyPr>
-          <a:lstStyle/>
-          <a:p>
-            <a:pPr algn="l"/>
-            <a:r>
-              <a:rPr sz="1600" b="0" dirty="0">
-                <a:solidFill>
-                  <a:srgbClr val="1A1A1A"/>
-                </a:solidFill>
-                <a:latin typeface="Calibri"/>
-              </a:rPr>
-              <a:t>23 fixed relations. The LLM must pick one, or mark the edge as [FALLBACK] for an audit.</a:t>
-            </a:r>
-          </a:p>
-        </p:txBody>
-      </p:sp>
-      <p:sp>
-        <p:nvSpPr>
-          <p:cNvPr id="12" name="TextBox 11"/>
-          <p:cNvSpPr txBox="1"/>
-          <p:nvPr/>
-        </p:nvSpPr>
-        <p:spPr>
-          <a:xfrm>
-            <a:off x="548640" y="5760720"/>
-            <a:ext cx="11064240" cy="548640"/>
-          </a:xfrm>
-          <a:prstGeom prst="rect">
-            <a:avLst/>
-          </a:prstGeom>
-          <a:noFill/>
-        </p:spPr>
-        <p:txBody>
-          <a:bodyPr wrap="none">
-            <a:spAutoFit/>
-          </a:bodyPr>
-          <a:lstStyle/>
-          <a:p>
-            <a:pPr algn="l"/>
+              <a:t>LLM provider  (Anthropic / OpenAI / Gemini)</a:t>
+            </a:r>
+          </a:p>
+        </p:txBody>
+      </p:sp>
+      <p:sp>
+        <p:nvSpPr>
+          <p:cNvPr id="13" name="Down Arrow 12"/>
+          <p:cNvSpPr/>
+          <p:nvPr/>
+        </p:nvSpPr>
+        <p:spPr>
+          <a:xfrm>
+            <a:off x="5897880" y="4539996"/>
+            <a:ext cx="365760" cy="109728"/>
+          </a:xfrm>
+          <a:prstGeom prst="downArrow">
+            <a:avLst/>
+          </a:prstGeom>
+          <a:solidFill>
+            <a:srgbClr val="C9A227"/>
+          </a:solidFill>
+          <a:ln>
+            <a:noFill/>
+          </a:ln>
+        </p:spPr>
+        <p:style>
+          <a:lnRef idx="1">
+            <a:schemeClr val="accent1"/>
+          </a:lnRef>
+          <a:fillRef idx="3">
+            <a:schemeClr val="accent1"/>
+          </a:fillRef>
+          <a:effectRef idx="2">
+            <a:schemeClr val="accent1"/>
+          </a:effectRef>
+          <a:fontRef idx="minor">
+            <a:schemeClr val="lt1"/>
+          </a:fontRef>
+        </p:style>
+        <p:txBody>
+          <a:bodyPr rtlCol="0" anchor="ctr"/>
+          <a:lstStyle/>
+          <a:p>
+            <a:pPr algn="ctr"/>
+            <a:endParaRPr/>
+          </a:p>
+        </p:txBody>
+      </p:sp>
+      <p:sp>
+        <p:nvSpPr>
+          <p:cNvPr id="14" name="Rounded Rectangle 13"/>
+          <p:cNvSpPr/>
+          <p:nvPr/>
+        </p:nvSpPr>
+        <p:spPr>
+          <a:xfrm>
+            <a:off x="2377440" y="4645152"/>
+            <a:ext cx="7406640" cy="594360"/>
+          </a:xfrm>
+          <a:prstGeom prst="roundRect">
+            <a:avLst>
+              <a:gd name="adj" fmla="val 30000"/>
+            </a:avLst>
+          </a:prstGeom>
+          <a:solidFill>
+            <a:srgbClr val="F4F1EA"/>
+          </a:solidFill>
+          <a:ln w="15875">
+            <a:solidFill>
+              <a:srgbClr val="1F3A5F"/>
+            </a:solidFill>
+          </a:ln>
+        </p:spPr>
+        <p:style>
+          <a:lnRef idx="1">
+            <a:schemeClr val="accent1"/>
+          </a:lnRef>
+          <a:fillRef idx="3">
+            <a:schemeClr val="accent1"/>
+          </a:fillRef>
+          <a:effectRef idx="2">
+            <a:schemeClr val="accent1"/>
+          </a:effectRef>
+          <a:fontRef idx="minor">
+            <a:schemeClr val="lt1"/>
+          </a:fontRef>
+        </p:style>
+        <p:txBody>
+          <a:bodyPr tIns="50800" bIns="50800" rtlCol="0" anchor="ctr"/>
+          <a:lstStyle/>
+          <a:p>
+            <a:pPr algn="ctr"/>
             <a:r>
               <a:rPr sz="1500" b="1">
                 <a:solidFill>
-                  <a:srgbClr val="6B6B6B"/>
-                </a:solidFill>
-                <a:latin typeface="Calibri"/>
-              </a:rPr>
-              <a:t>Readable (consistent edges) AND flexible (any text works).</a:t>
-            </a:r>
-          </a:p>
-        </p:txBody>
-      </p:sp>
-      <p:sp>
-        <p:nvSpPr>
-          <p:cNvPr id="14" name="TextBox 13"/>
+                  <a:srgbClr val="1F3A5F"/>
+                </a:solidFill>
+                <a:latin typeface="Calibri"/>
+              </a:rPr>
+              <a:t>normalizeGraph()  ·  dedup · alias merge · validate</a:t>
+            </a:r>
+          </a:p>
+        </p:txBody>
+      </p:sp>
+      <p:sp>
+        <p:nvSpPr>
+          <p:cNvPr id="15" name="Down Arrow 14"/>
+          <p:cNvSpPr/>
+          <p:nvPr/>
+        </p:nvSpPr>
+        <p:spPr>
+          <a:xfrm>
+            <a:off x="5897880" y="5244084"/>
+            <a:ext cx="365760" cy="109728"/>
+          </a:xfrm>
+          <a:prstGeom prst="downArrow">
+            <a:avLst/>
+          </a:prstGeom>
+          <a:solidFill>
+            <a:srgbClr val="C9A227"/>
+          </a:solidFill>
+          <a:ln>
+            <a:noFill/>
+          </a:ln>
+        </p:spPr>
+        <p:style>
+          <a:lnRef idx="1">
+            <a:schemeClr val="accent1"/>
+          </a:lnRef>
+          <a:fillRef idx="3">
+            <a:schemeClr val="accent1"/>
+          </a:fillRef>
+          <a:effectRef idx="2">
+            <a:schemeClr val="accent1"/>
+          </a:effectRef>
+          <a:fontRef idx="minor">
+            <a:schemeClr val="lt1"/>
+          </a:fontRef>
+        </p:style>
+        <p:txBody>
+          <a:bodyPr rtlCol="0" anchor="ctr"/>
+          <a:lstStyle/>
+          <a:p>
+            <a:pPr algn="ctr"/>
+            <a:endParaRPr/>
+          </a:p>
+        </p:txBody>
+      </p:sp>
+      <p:sp>
+        <p:nvSpPr>
+          <p:cNvPr id="16" name="Rounded Rectangle 15"/>
+          <p:cNvSpPr/>
+          <p:nvPr/>
+        </p:nvSpPr>
+        <p:spPr>
+          <a:xfrm>
+            <a:off x="2377440" y="5349240"/>
+            <a:ext cx="7406640" cy="594360"/>
+          </a:xfrm>
+          <a:prstGeom prst="roundRect">
+            <a:avLst>
+              <a:gd name="adj" fmla="val 30000"/>
+            </a:avLst>
+          </a:prstGeom>
+          <a:solidFill>
+            <a:srgbClr val="F4F1EA"/>
+          </a:solidFill>
+          <a:ln w="15875">
+            <a:solidFill>
+              <a:srgbClr val="1F3A5F"/>
+            </a:solidFill>
+          </a:ln>
+        </p:spPr>
+        <p:style>
+          <a:lnRef idx="1">
+            <a:schemeClr val="accent1"/>
+          </a:lnRef>
+          <a:fillRef idx="3">
+            <a:schemeClr val="accent1"/>
+          </a:fillRef>
+          <a:effectRef idx="2">
+            <a:schemeClr val="accent1"/>
+          </a:effectRef>
+          <a:fontRef idx="minor">
+            <a:schemeClr val="lt1"/>
+          </a:fontRef>
+        </p:style>
+        <p:txBody>
+          <a:bodyPr tIns="50800" bIns="50800" rtlCol="0" anchor="ctr"/>
+          <a:lstStyle/>
+          <a:p>
+            <a:pPr algn="ctr"/>
+            <a:r>
+              <a:rPr sz="1500" b="1">
+                <a:solidFill>
+                  <a:srgbClr val="1F3A5F"/>
+                </a:solidFill>
+                <a:latin typeface="Calibri"/>
+              </a:rPr>
+              <a:t>Cytoscape.js graph  +  Turtle / JSON-LD export</a:t>
+            </a:r>
+          </a:p>
+        </p:txBody>
+      </p:sp>
+      <p:sp>
+        <p:nvSpPr>
+          <p:cNvPr id="18" name="TextBox 17"/>
           <p:cNvSpPr txBox="1"/>
           <p:nvPr/>
         </p:nvSpPr>
@@ -11162,7 +11077,7 @@
                 </a:solidFill>
                 <a:latin typeface="Calibri"/>
               </a:rPr>
-              <a:t>7 / 19</a:t>
+              <a:t>6 / 19</a:t>
             </a:r>
           </a:p>
         </p:txBody>
@@ -11266,7 +11181,7 @@
                 </a:solidFill>
                 <a:latin typeface="Calibri"/>
               </a:rPr>
-              <a:t>THE PROMPT</a:t>
+              <a:t>KNOWLEDGE MODEL</a:t>
             </a:r>
           </a:p>
         </p:txBody>
@@ -11301,7 +11216,7 @@
                 </a:solidFill>
                 <a:latin typeface="Calibri"/>
               </a:rPr>
-              <a:t>Five Parts of the Contract</a:t>
+              <a:t>Hybrid Schema</a:t>
             </a:r>
           </a:p>
         </p:txBody>
@@ -11352,194 +11267,49 @@
       </p:sp>
       <p:sp>
         <p:nvSpPr>
-          <p:cNvPr id="6" name="TextBox 5"/>
-          <p:cNvSpPr txBox="1"/>
-          <p:nvPr/>
-        </p:nvSpPr>
-        <p:spPr>
-          <a:xfrm>
-            <a:off x="548640" y="1828800"/>
-            <a:ext cx="11064240" cy="4389120"/>
-          </a:xfrm>
-          <a:prstGeom prst="rect">
-            <a:avLst/>
-          </a:prstGeom>
-          <a:noFill/>
-        </p:spPr>
-        <p:txBody>
-          <a:bodyPr wrap="square" lIns="0">
-            <a:spAutoFit/>
-          </a:bodyPr>
-          <a:lstStyle/>
-          <a:p>
-            <a:pPr algn="l">
-              <a:spcAft>
-                <a:spcPts val="600"/>
-              </a:spcAft>
-            </a:pPr>
-            <a:r>
-              <a:rPr sz="1800" b="1">
-                <a:solidFill>
-                  <a:srgbClr val="C9A227"/>
-                </a:solidFill>
-                <a:latin typeface="Calibri"/>
-              </a:rPr>
-              <a:t>•  </a:t>
-            </a:r>
-            <a:r>
-              <a:rPr sz="1800" b="1">
-                <a:solidFill>
-                  <a:srgbClr val="1F3A5F"/>
-                </a:solidFill>
-                <a:latin typeface="Calibri"/>
-              </a:rPr>
-              <a:t>Decision rules</a:t>
-            </a:r>
-            <a:r>
-              <a:rPr sz="1800">
-                <a:solidFill>
-                  <a:srgbClr val="1A1A1A"/>
-                </a:solidFill>
-                <a:latin typeface="Calibri"/>
-              </a:rPr>
-              <a:t>  when to pick which relation</a:t>
-            </a:r>
-          </a:p>
-          <a:p>
-            <a:pPr algn="l">
-              <a:spcAft>
-                <a:spcPts val="600"/>
-              </a:spcAft>
-            </a:pPr>
-            <a:r>
-              <a:rPr sz="1800" b="1">
-                <a:solidFill>
-                  <a:srgbClr val="C9A227"/>
-                </a:solidFill>
-                <a:latin typeface="Calibri"/>
-              </a:rPr>
-              <a:t>•  </a:t>
-            </a:r>
-            <a:r>
-              <a:rPr sz="1800" b="1">
-                <a:solidFill>
-                  <a:srgbClr val="1F3A5F"/>
-                </a:solidFill>
-                <a:latin typeface="Calibri"/>
-              </a:rPr>
-              <a:t>Event reification</a:t>
-            </a:r>
-            <a:r>
-              <a:rPr sz="1800">
-                <a:solidFill>
-                  <a:srgbClr val="1A1A1A"/>
-                </a:solidFill>
-                <a:latin typeface="Calibri"/>
-              </a:rPr>
-              <a:t>  “X received Y in 2009” → an Award event node</a:t>
-            </a:r>
-          </a:p>
-          <a:p>
-            <a:pPr algn="l">
-              <a:spcAft>
-                <a:spcPts val="600"/>
-              </a:spcAft>
-            </a:pPr>
-            <a:r>
-              <a:rPr sz="1800" b="1">
-                <a:solidFill>
-                  <a:srgbClr val="C9A227"/>
-                </a:solidFill>
-                <a:latin typeface="Calibri"/>
-              </a:rPr>
-              <a:t>•  </a:t>
-            </a:r>
-            <a:r>
-              <a:rPr sz="1800" b="1">
-                <a:solidFill>
-                  <a:srgbClr val="1F3A5F"/>
-                </a:solidFill>
-                <a:latin typeface="Calibri"/>
-              </a:rPr>
-              <a:t>Aliases</a:t>
-            </a:r>
-            <a:r>
-              <a:rPr sz="1800">
-                <a:solidFill>
-                  <a:srgbClr val="1A1A1A"/>
-                </a:solidFill>
-                <a:latin typeface="Calibri"/>
-              </a:rPr>
-              <a:t>  merge “Microsoft”, “MSFT”, “the company”</a:t>
-            </a:r>
-          </a:p>
-          <a:p>
-            <a:pPr algn="l">
-              <a:spcAft>
-                <a:spcPts val="600"/>
-              </a:spcAft>
-            </a:pPr>
-            <a:r>
-              <a:rPr sz="1800" b="1">
-                <a:solidFill>
-                  <a:srgbClr val="C9A227"/>
-                </a:solidFill>
-                <a:latin typeface="Calibri"/>
-              </a:rPr>
-              <a:t>•  </a:t>
-            </a:r>
-            <a:r>
-              <a:rPr sz="1800" b="1">
-                <a:solidFill>
-                  <a:srgbClr val="1F3A5F"/>
-                </a:solidFill>
-                <a:latin typeface="Calibri"/>
-              </a:rPr>
-              <a:t>Deduplication</a:t>
-            </a:r>
-            <a:r>
-              <a:rPr sz="1800">
-                <a:solidFill>
-                  <a:srgbClr val="1A1A1A"/>
-                </a:solidFill>
-                <a:latin typeface="Calibri"/>
-              </a:rPr>
-              <a:t>  one node per real-world entity</a:t>
-            </a:r>
-          </a:p>
-          <a:p>
-            <a:pPr algn="l">
-              <a:spcAft>
-                <a:spcPts val="600"/>
-              </a:spcAft>
-            </a:pPr>
-            <a:r>
-              <a:rPr sz="1800" b="1">
-                <a:solidFill>
-                  <a:srgbClr val="C9A227"/>
-                </a:solidFill>
-                <a:latin typeface="Calibri"/>
-              </a:rPr>
-              <a:t>•  </a:t>
-            </a:r>
-            <a:r>
-              <a:rPr sz="1800" b="1">
-                <a:solidFill>
-                  <a:srgbClr val="1F3A5F"/>
-                </a:solidFill>
-                <a:latin typeface="Calibri"/>
-              </a:rPr>
-              <a:t>Confidence + [FALLBACK]</a:t>
-            </a:r>
-            <a:r>
-              <a:rPr sz="1800">
-                <a:solidFill>
-                  <a:srgbClr val="1A1A1A"/>
-                </a:solidFill>
-                <a:latin typeface="Calibri"/>
-              </a:rPr>
-              <a:t>  model self-reports certainty per edge</a:t>
-            </a:r>
+          <p:cNvPr id="6" name="Rounded Rectangle 5"/>
+          <p:cNvSpPr/>
+          <p:nvPr/>
+        </p:nvSpPr>
+        <p:spPr>
+          <a:xfrm>
+            <a:off x="502920" y="1828800"/>
+            <a:ext cx="5349240" cy="3657600"/>
+          </a:xfrm>
+          <a:prstGeom prst="roundRect">
+            <a:avLst>
+              <a:gd name="adj" fmla="val 6000"/>
+            </a:avLst>
+          </a:prstGeom>
+          <a:solidFill>
+            <a:srgbClr val="F4F1EA"/>
+          </a:solidFill>
+          <a:ln w="19050">
+            <a:solidFill>
+              <a:srgbClr val="1F3A5F"/>
+            </a:solidFill>
+          </a:ln>
+        </p:spPr>
+        <p:style>
+          <a:lnRef idx="1">
+            <a:schemeClr val="accent1"/>
+          </a:lnRef>
+          <a:fillRef idx="3">
+            <a:schemeClr val="accent1"/>
+          </a:fillRef>
+          <a:effectRef idx="2">
+            <a:schemeClr val="accent1"/>
+          </a:effectRef>
+          <a:fontRef idx="minor">
+            <a:schemeClr val="lt1"/>
+          </a:fontRef>
+        </p:style>
+        <p:txBody>
+          <a:bodyPr rtlCol="0" anchor="ctr"/>
+          <a:lstStyle/>
+          <a:p>
+            <a:pPr algn="ctr"/>
+            <a:endParaRPr/>
           </a:p>
         </p:txBody>
       </p:sp>
@@ -11551,8 +11321,8 @@
         </p:nvSpPr>
         <p:spPr>
           <a:xfrm>
-            <a:off x="548640" y="5669280"/>
-            <a:ext cx="10972800" cy="548640"/>
+            <a:off x="777240" y="2057400"/>
+            <a:ext cx="4800600" cy="548640"/>
           </a:xfrm>
           <a:prstGeom prst="rect">
             <a:avLst/>
@@ -11567,20 +11337,209 @@
           <a:p>
             <a:pPr algn="l"/>
             <a:r>
-              <a:rPr sz="1300" b="0">
+              <a:rPr sz="1800" b="1">
+                <a:solidFill>
+                  <a:srgbClr val="1F3A5F"/>
+                </a:solidFill>
+                <a:latin typeface="Calibri"/>
+              </a:rPr>
+              <a:t>Entity types: OPEN</a:t>
+            </a:r>
+          </a:p>
+        </p:txBody>
+      </p:sp>
+      <p:sp>
+        <p:nvSpPr>
+          <p:cNvPr id="8" name="TextBox 7"/>
+          <p:cNvSpPr txBox="1"/>
+          <p:nvPr/>
+        </p:nvSpPr>
+        <p:spPr>
+          <a:xfrm>
+            <a:off x="777240" y="2743200"/>
+            <a:ext cx="4800600" cy="2560320"/>
+          </a:xfrm>
+          <a:prstGeom prst="rect">
+            <a:avLst/>
+          </a:prstGeom>
+          <a:noFill/>
+        </p:spPr>
+        <p:txBody>
+          <a:bodyPr wrap="square">
+            <a:spAutoFit/>
+          </a:bodyPr>
+          <a:lstStyle/>
+          <a:p>
+            <a:pPr algn="l"/>
+            <a:r>
+              <a:rPr sz="1600" b="0">
+                <a:solidFill>
+                  <a:srgbClr val="1A1A1A"/>
+                </a:solidFill>
+                <a:latin typeface="Calibri"/>
+              </a:rPr>
+              <a:t>The LLM picks the type (Person, Company, Mountain, Award, …).
+The system adapts to any domain.</a:t>
+            </a:r>
+          </a:p>
+        </p:txBody>
+      </p:sp>
+      <p:sp>
+        <p:nvSpPr>
+          <p:cNvPr id="9" name="Rounded Rectangle 8"/>
+          <p:cNvSpPr/>
+          <p:nvPr/>
+        </p:nvSpPr>
+        <p:spPr>
+          <a:xfrm>
+            <a:off x="6355080" y="1828800"/>
+            <a:ext cx="5349240" cy="3657600"/>
+          </a:xfrm>
+          <a:prstGeom prst="roundRect">
+            <a:avLst>
+              <a:gd name="adj" fmla="val 6000"/>
+            </a:avLst>
+          </a:prstGeom>
+          <a:solidFill>
+            <a:srgbClr val="F4F1EA"/>
+          </a:solidFill>
+          <a:ln w="19050">
+            <a:solidFill>
+              <a:srgbClr val="C9A227"/>
+            </a:solidFill>
+          </a:ln>
+        </p:spPr>
+        <p:style>
+          <a:lnRef idx="1">
+            <a:schemeClr val="accent1"/>
+          </a:lnRef>
+          <a:fillRef idx="3">
+            <a:schemeClr val="accent1"/>
+          </a:fillRef>
+          <a:effectRef idx="2">
+            <a:schemeClr val="accent1"/>
+          </a:effectRef>
+          <a:fontRef idx="minor">
+            <a:schemeClr val="lt1"/>
+          </a:fontRef>
+        </p:style>
+        <p:txBody>
+          <a:bodyPr rtlCol="0" anchor="ctr"/>
+          <a:lstStyle/>
+          <a:p>
+            <a:pPr algn="ctr"/>
+            <a:endParaRPr/>
+          </a:p>
+        </p:txBody>
+      </p:sp>
+      <p:sp>
+        <p:nvSpPr>
+          <p:cNvPr id="10" name="TextBox 9"/>
+          <p:cNvSpPr txBox="1"/>
+          <p:nvPr/>
+        </p:nvSpPr>
+        <p:spPr>
+          <a:xfrm>
+            <a:off x="6629400" y="2057400"/>
+            <a:ext cx="4800600" cy="548640"/>
+          </a:xfrm>
+          <a:prstGeom prst="rect">
+            <a:avLst/>
+          </a:prstGeom>
+          <a:noFill/>
+        </p:spPr>
+        <p:txBody>
+          <a:bodyPr wrap="none">
+            <a:spAutoFit/>
+          </a:bodyPr>
+          <a:lstStyle/>
+          <a:p>
+            <a:pPr algn="l"/>
+            <a:r>
+              <a:rPr sz="1800" b="1">
+                <a:solidFill>
+                  <a:srgbClr val="C9A227"/>
+                </a:solidFill>
+                <a:latin typeface="Calibri"/>
+              </a:rPr>
+              <a:t>Relations: CLOSED</a:t>
+            </a:r>
+          </a:p>
+        </p:txBody>
+      </p:sp>
+      <p:sp>
+        <p:nvSpPr>
+          <p:cNvPr id="11" name="TextBox 10"/>
+          <p:cNvSpPr txBox="1"/>
+          <p:nvPr/>
+        </p:nvSpPr>
+        <p:spPr>
+          <a:xfrm>
+            <a:off x="6629400" y="2743200"/>
+            <a:ext cx="4800600" cy="2560320"/>
+          </a:xfrm>
+          <a:prstGeom prst="rect">
+            <a:avLst/>
+          </a:prstGeom>
+          <a:noFill/>
+        </p:spPr>
+        <p:txBody>
+          <a:bodyPr wrap="square">
+            <a:spAutoFit/>
+          </a:bodyPr>
+          <a:lstStyle/>
+          <a:p>
+            <a:pPr algn="l"/>
+            <a:r>
+              <a:rPr sz="1600" b="0" dirty="0">
+                <a:solidFill>
+                  <a:srgbClr val="1A1A1A"/>
+                </a:solidFill>
+                <a:latin typeface="Calibri"/>
+              </a:rPr>
+              <a:t>23 fixed relations. The LLM must pick one, or mark the edge as [FALLBACK] for an audit.</a:t>
+            </a:r>
+          </a:p>
+        </p:txBody>
+      </p:sp>
+      <p:sp>
+        <p:nvSpPr>
+          <p:cNvPr id="12" name="TextBox 11"/>
+          <p:cNvSpPr txBox="1"/>
+          <p:nvPr/>
+        </p:nvSpPr>
+        <p:spPr>
+          <a:xfrm>
+            <a:off x="548640" y="5760720"/>
+            <a:ext cx="11064240" cy="548640"/>
+          </a:xfrm>
+          <a:prstGeom prst="rect">
+            <a:avLst/>
+          </a:prstGeom>
+          <a:noFill/>
+        </p:spPr>
+        <p:txBody>
+          <a:bodyPr wrap="none">
+            <a:spAutoFit/>
+          </a:bodyPr>
+          <a:lstStyle/>
+          <a:p>
+            <a:pPr algn="l"/>
+            <a:r>
+              <a:rPr sz="1500" b="1">
                 <a:solidFill>
                   <a:srgbClr val="6B6B6B"/>
                 </a:solidFill>
                 <a:latin typeface="Calibri"/>
               </a:rPr>
-              <a:t>The prompt is the contract with the LLM. Five named parts, ~1k tokens.</a:t>
-            </a:r>
-          </a:p>
-        </p:txBody>
-      </p:sp>
-      <p:sp>
-        <p:nvSpPr>
-          <p:cNvPr id="9" name="TextBox 8"/>
+              <a:t>Readable (consistent edges) AND flexible (any text works).</a:t>
+            </a:r>
+          </a:p>
+        </p:txBody>
+      </p:sp>
+      <p:sp>
+        <p:nvSpPr>
+          <p:cNvPr id="14" name="TextBox 13"/>
           <p:cNvSpPr txBox="1"/>
           <p:nvPr/>
         </p:nvSpPr>
@@ -11608,7 +11567,7 @@
                 </a:solidFill>
                 <a:latin typeface="Calibri"/>
               </a:rPr>
-              <a:t>8 / 19</a:t>
+              <a:t>7 / 19</a:t>
             </a:r>
           </a:p>
         </p:txBody>
@@ -11712,7 +11671,7 @@
                 </a:solidFill>
                 <a:latin typeface="Calibri"/>
               </a:rPr>
-              <a:t>IDENTITY</a:t>
+              <a:t>THE PROMPT</a:t>
             </a:r>
           </a:p>
         </p:txBody>
@@ -11747,7 +11706,7 @@
                 </a:solidFill>
                 <a:latin typeface="Calibri"/>
               </a:rPr>
-              <a:t>Aliases and Deduplication</a:t>
+              <a:t>Five Parts of the Contract</a:t>
             </a:r>
           </a:p>
         </p:txBody>
@@ -11820,11 +11779,11 @@
           <a:p>
             <a:pPr algn="l">
               <a:spcAft>
-                <a:spcPts val="800"/>
+                <a:spcPts val="600"/>
               </a:spcAft>
             </a:pPr>
             <a:r>
-              <a:rPr sz="1700" b="1">
+              <a:rPr sz="1800" b="1">
                 <a:solidFill>
                   <a:srgbClr val="C9A227"/>
                 </a:solidFill>
@@ -11833,32 +11792,32 @@
               <a:t>•  </a:t>
             </a:r>
             <a:r>
-              <a:rPr sz="1700" b="1">
+              <a:rPr sz="1800" b="1">
                 <a:solidFill>
                   <a:srgbClr val="1F3A5F"/>
                 </a:solidFill>
                 <a:latin typeface="Calibri"/>
               </a:rPr>
-              <a:t>aliases field on every node</a:t>
-            </a:r>
-            <a:r>
-              <a:rPr sz="1700">
+              <a:t>Decision rules</a:t>
+            </a:r>
+            <a:r>
+              <a:rPr sz="1800">
                 <a:solidFill>
                   <a:srgbClr val="1A1A1A"/>
                 </a:solidFill>
                 <a:latin typeface="Calibri"/>
               </a:rPr>
-              <a:t>  {label: "Mark Twain", aliases: ["Samuel Clemens", "Clemens"]}</a:t>
+              <a:t>  when to pick which relation</a:t>
             </a:r>
           </a:p>
           <a:p>
             <a:pPr algn="l">
               <a:spcAft>
-                <a:spcPts val="800"/>
+                <a:spcPts val="600"/>
               </a:spcAft>
             </a:pPr>
             <a:r>
-              <a:rPr sz="1700" b="1">
+              <a:rPr sz="1800" b="1">
                 <a:solidFill>
                   <a:srgbClr val="C9A227"/>
                 </a:solidFill>
@@ -11867,32 +11826,32 @@
               <a:t>•  </a:t>
             </a:r>
             <a:r>
-              <a:rPr sz="1700" b="1">
+              <a:rPr sz="1800" b="1">
                 <a:solidFill>
                   <a:srgbClr val="1F3A5F"/>
                 </a:solidFill>
                 <a:latin typeface="Calibri"/>
               </a:rPr>
-              <a:t>normalizeGraph()</a:t>
-            </a:r>
-            <a:r>
-              <a:rPr sz="1700">
+              <a:t>Event reification</a:t>
+            </a:r>
+            <a:r>
+              <a:rPr sz="1800">
                 <a:solidFill>
                   <a:srgbClr val="1A1A1A"/>
                 </a:solidFill>
                 <a:latin typeface="Calibri"/>
               </a:rPr>
-              <a:t>  merges nodes that share an alias</a:t>
+              <a:t>  “X received Y in 2009” → an Award event node</a:t>
             </a:r>
           </a:p>
           <a:p>
             <a:pPr algn="l">
               <a:spcAft>
-                <a:spcPts val="800"/>
+                <a:spcPts val="600"/>
               </a:spcAft>
             </a:pPr>
             <a:r>
-              <a:rPr sz="1700" b="1">
+              <a:rPr sz="1800" b="1">
                 <a:solidFill>
                   <a:srgbClr val="C9A227"/>
                 </a:solidFill>
@@ -11901,32 +11860,32 @@
               <a:t>•  </a:t>
             </a:r>
             <a:r>
-              <a:rPr sz="1700" b="1">
+              <a:rPr sz="1800" b="1">
                 <a:solidFill>
                   <a:srgbClr val="1F3A5F"/>
                 </a:solidFill>
                 <a:latin typeface="Calibri"/>
               </a:rPr>
-              <a:t>Pronouns</a:t>
-            </a:r>
-            <a:r>
-              <a:rPr sz="1700">
+              <a:t>Aliases</a:t>
+            </a:r>
+            <a:r>
+              <a:rPr sz="1800">
                 <a:solidFill>
                   <a:srgbClr val="1A1A1A"/>
                 </a:solidFill>
                 <a:latin typeface="Calibri"/>
               </a:rPr>
-              <a:t>  “he”, “the company” resolved to the canonical entity</a:t>
+              <a:t>  merge “Microsoft”, “MSFT”, “the company”</a:t>
             </a:r>
           </a:p>
           <a:p>
             <a:pPr algn="l">
               <a:spcAft>
-                <a:spcPts val="800"/>
+                <a:spcPts val="600"/>
               </a:spcAft>
             </a:pPr>
             <a:r>
-              <a:rPr sz="1700" b="1">
+              <a:rPr sz="1800" b="1">
                 <a:solidFill>
                   <a:srgbClr val="C9A227"/>
                 </a:solidFill>
@@ -11935,84 +11894,70 @@
               <a:t>•  </a:t>
             </a:r>
             <a:r>
-              <a:rPr sz="1700" b="1">
+              <a:rPr sz="1800" b="1">
                 <a:solidFill>
                   <a:srgbClr val="1F3A5F"/>
                 </a:solidFill>
                 <a:latin typeface="Calibri"/>
               </a:rPr>
-              <a:t>UI</a:t>
-            </a:r>
-            <a:r>
-              <a:rPr sz="1700">
+              <a:t>Deduplication</a:t>
+            </a:r>
+            <a:r>
+              <a:rPr sz="1800">
                 <a:solidFill>
                   <a:srgbClr val="1A1A1A"/>
                 </a:solidFill>
                 <a:latin typeface="Calibri"/>
               </a:rPr>
-              <a:t>  aliases shown as small grey pills in the side panel</a:t>
-            </a:r>
-          </a:p>
-        </p:txBody>
-      </p:sp>
-      <p:sp>
-        <p:nvSpPr>
-          <p:cNvPr id="7" name="Rounded Rectangle 6"/>
-          <p:cNvSpPr/>
-          <p:nvPr/>
-        </p:nvSpPr>
-        <p:spPr>
-          <a:xfrm>
-            <a:off x="548640" y="4937760"/>
-            <a:ext cx="11064240" cy="1280160"/>
-          </a:xfrm>
-          <a:prstGeom prst="roundRect">
-            <a:avLst>
-              <a:gd name="adj" fmla="val 6000"/>
-            </a:avLst>
-          </a:prstGeom>
-          <a:solidFill>
-            <a:srgbClr val="F4F1EA"/>
-          </a:solidFill>
-          <a:ln w="6350">
-            <a:solidFill>
-              <a:srgbClr val="E3DED3"/>
-            </a:solidFill>
-          </a:ln>
-        </p:spPr>
-        <p:style>
-          <a:lnRef idx="1">
-            <a:schemeClr val="accent1"/>
-          </a:lnRef>
-          <a:fillRef idx="3">
-            <a:schemeClr val="accent1"/>
-          </a:fillRef>
-          <a:effectRef idx="2">
-            <a:schemeClr val="accent1"/>
-          </a:effectRef>
-          <a:fontRef idx="minor">
-            <a:schemeClr val="lt1"/>
-          </a:fontRef>
-        </p:style>
-        <p:txBody>
-          <a:bodyPr rtlCol="0" anchor="ctr"/>
-          <a:lstStyle/>
-          <a:p>
-            <a:pPr algn="ctr"/>
-            <a:endParaRPr/>
-          </a:p>
-        </p:txBody>
-      </p:sp>
-      <p:sp>
-        <p:nvSpPr>
-          <p:cNvPr id="8" name="TextBox 7"/>
+              <a:t>  one node per real-world entity</a:t>
+            </a:r>
+          </a:p>
+          <a:p>
+            <a:pPr algn="l">
+              <a:spcAft>
+                <a:spcPts val="600"/>
+              </a:spcAft>
+            </a:pPr>
+            <a:r>
+              <a:rPr sz="1800" b="1">
+                <a:solidFill>
+                  <a:srgbClr val="C9A227"/>
+                </a:solidFill>
+                <a:latin typeface="Calibri"/>
+              </a:rPr>
+              <a:t>•  </a:t>
+            </a:r>
+            <a:r>
+              <a:rPr sz="1800" b="1">
+                <a:solidFill>
+                  <a:srgbClr val="1F3A5F"/>
+                </a:solidFill>
+                <a:latin typeface="Calibri"/>
+              </a:rPr>
+              <a:t>Confidence + [FALLBACK]</a:t>
+            </a:r>
+            <a:r>
+              <a:rPr sz="1800">
+                <a:solidFill>
+                  <a:srgbClr val="1A1A1A"/>
+                </a:solidFill>
+                <a:latin typeface="Calibri"/>
+              </a:rPr>
+              <a:t>  model self-reports certainty per edge</a:t>
+            </a:r>
+          </a:p>
+        </p:txBody>
+      </p:sp>
+      <p:sp>
+        <p:nvSpPr>
+          <p:cNvPr id="7" name="TextBox 6"/>
           <p:cNvSpPr txBox="1"/>
           <p:nvPr/>
         </p:nvSpPr>
         <p:spPr>
           <a:xfrm>
-            <a:off x="868680" y="5074920"/>
-            <a:ext cx="10515600" cy="1097280"/>
+            <a:off x="548640" y="5669280"/>
+            <a:ext cx="10972800" cy="548640"/>
           </a:xfrm>
           <a:prstGeom prst="rect">
             <a:avLst/>
@@ -12020,37 +11965,27 @@
           <a:noFill/>
         </p:spPr>
         <p:txBody>
-          <a:bodyPr wrap="square" lIns="0">
+          <a:bodyPr wrap="none">
             <a:spAutoFit/>
           </a:bodyPr>
           <a:lstStyle/>
           <a:p>
-            <a:r>
-              <a:rPr sz="1400" b="1">
-                <a:solidFill>
-                  <a:srgbClr val="C9A227"/>
-                </a:solidFill>
-                <a:latin typeface="Calibri"/>
-              </a:rPr>
-              <a:t>Example  —  Mark Twain passage:</a:t>
-            </a:r>
-          </a:p>
-          <a:p>
-            <a:r>
-              <a:rPr sz="1500">
-                <a:solidFill>
-                  <a:srgbClr val="1A1A1A"/>
-                </a:solidFill>
-                <a:latin typeface="Calibri"/>
-              </a:rPr>
-              <a:t>17 alias mentions → 14 distinct nodes.   “Samuel Clemens” merged into “Mark Twain.”</a:t>
-            </a:r>
-          </a:p>
-        </p:txBody>
-      </p:sp>
-      <p:sp>
-        <p:nvSpPr>
-          <p:cNvPr id="10" name="TextBox 9"/>
+            <a:pPr algn="l"/>
+            <a:r>
+              <a:rPr sz="1300" b="0">
+                <a:solidFill>
+                  <a:srgbClr val="6B6B6B"/>
+                </a:solidFill>
+                <a:latin typeface="Calibri"/>
+              </a:rPr>
+              <a:t>The prompt is the contract with the LLM. Five named parts, ~1k tokens.</a:t>
+            </a:r>
+          </a:p>
+        </p:txBody>
+      </p:sp>
+      <p:sp>
+        <p:nvSpPr>
+          <p:cNvPr id="9" name="TextBox 8"/>
           <p:cNvSpPr txBox="1"/>
           <p:nvPr/>
         </p:nvSpPr>
@@ -12078,7 +12013,7 @@
                 </a:solidFill>
                 <a:latin typeface="Calibri"/>
               </a:rPr>
-              <a:t>9 / 19</a:t>
+              <a:t>8 / 19</a:t>
             </a:r>
           </a:p>
         </p:txBody>
@@ -12182,7 +12117,7 @@
                 </a:solidFill>
                 <a:latin typeface="Calibri"/>
               </a:rPr>
-              <a:t>EXPORT</a:t>
+              <a:t>IDENTITY</a:t>
             </a:r>
           </a:p>
         </p:txBody>
@@ -12217,7 +12152,7 @@
                 </a:solidFill>
                 <a:latin typeface="Calibri"/>
               </a:rPr>
-              <a:t>Provenance and Output Formats</a:t>
+              <a:t>Aliases and Deduplication</a:t>
             </a:r>
           </a:p>
         </p:txBody>
@@ -12290,11 +12225,11 @@
           <a:p>
             <a:pPr algn="l">
               <a:spcAft>
-                <a:spcPts val="1000"/>
+                <a:spcPts val="800"/>
               </a:spcAft>
             </a:pPr>
             <a:r>
-              <a:rPr sz="1800" b="1">
+              <a:rPr sz="1700" b="1">
                 <a:solidFill>
                   <a:srgbClr val="C9A227"/>
                 </a:solidFill>
@@ -12303,32 +12238,32 @@
               <a:t>•  </a:t>
             </a:r>
             <a:r>
-              <a:rPr sz="1800" b="1">
+              <a:rPr sz="1700" b="1">
                 <a:solidFill>
                   <a:srgbClr val="1F3A5F"/>
                 </a:solidFill>
                 <a:latin typeface="Calibri"/>
               </a:rPr>
-              <a:t>JSON</a:t>
-            </a:r>
-            <a:r>
-              <a:rPr sz="1800">
+              <a:t>aliases field on every node</a:t>
+            </a:r>
+            <a:r>
+              <a:rPr sz="1700">
                 <a:solidFill>
                   <a:srgbClr val="1A1A1A"/>
                 </a:solidFill>
                 <a:latin typeface="Calibri"/>
               </a:rPr>
-              <a:t>  nodes, edges, evidence, confidence, aliases</a:t>
+              <a:t>  {label: "Mark Twain", aliases: ["Samuel Clemens", "Clemens"]}</a:t>
             </a:r>
           </a:p>
           <a:p>
             <a:pPr algn="l">
               <a:spcAft>
-                <a:spcPts val="1000"/>
+                <a:spcPts val="800"/>
               </a:spcAft>
             </a:pPr>
             <a:r>
-              <a:rPr sz="1800" b="1">
+              <a:rPr sz="1700" b="1">
                 <a:solidFill>
                   <a:srgbClr val="C9A227"/>
                 </a:solidFill>
@@ -12337,32 +12272,32 @@
               <a:t>•  </a:t>
             </a:r>
             <a:r>
-              <a:rPr sz="1800" b="1">
+              <a:rPr sz="1700" b="1">
                 <a:solidFill>
                   <a:srgbClr val="1F3A5F"/>
                 </a:solidFill>
                 <a:latin typeface="Calibri"/>
               </a:rPr>
-              <a:t>Turtle / RDF</a:t>
-            </a:r>
-            <a:r>
-              <a:rPr sz="1800">
+              <a:t>normalizeGraph()</a:t>
+            </a:r>
+            <a:r>
+              <a:rPr sz="1700">
                 <a:solidFill>
                   <a:srgbClr val="1A1A1A"/>
                 </a:solidFill>
                 <a:latin typeface="Calibri"/>
               </a:rPr>
-              <a:t>  edges as rdf:Statement reifications, kg:evidence, kg:confidence (PROV-O)</a:t>
+              <a:t>  merges nodes that share an alias</a:t>
             </a:r>
           </a:p>
           <a:p>
             <a:pPr algn="l">
               <a:spcAft>
-                <a:spcPts val="1000"/>
+                <a:spcPts val="800"/>
               </a:spcAft>
             </a:pPr>
             <a:r>
-              <a:rPr sz="1800" b="1">
+              <a:rPr sz="1700" b="1">
                 <a:solidFill>
                   <a:srgbClr val="C9A227"/>
                 </a:solidFill>
@@ -12371,64 +12306,63 @@
               <a:t>•  </a:t>
             </a:r>
             <a:r>
-              <a:rPr sz="1800" b="1">
+              <a:rPr sz="1700" b="1">
                 <a:solidFill>
                   <a:srgbClr val="1F3A5F"/>
                 </a:solidFill>
                 <a:latin typeface="Calibri"/>
               </a:rPr>
-              <a:t>PNG</a:t>
-            </a:r>
-            <a:r>
-              <a:rPr sz="1800">
+              <a:t>Pronouns</a:t>
+            </a:r>
+            <a:r>
+              <a:rPr sz="1700">
                 <a:solidFill>
                   <a:srgbClr val="1A1A1A"/>
                 </a:solidFill>
                 <a:latin typeface="Calibri"/>
               </a:rPr>
-              <a:t>  one-click export of the current graph view</a:t>
-            </a:r>
-          </a:p>
-        </p:txBody>
-      </p:sp>
-      <p:sp>
-        <p:nvSpPr>
-          <p:cNvPr id="7" name="TextBox 6"/>
-          <p:cNvSpPr txBox="1"/>
-          <p:nvPr/>
-        </p:nvSpPr>
-        <p:spPr>
-          <a:xfrm>
-            <a:off x="548640" y="5120640"/>
-            <a:ext cx="11064240" cy="914400"/>
-          </a:xfrm>
-          <a:prstGeom prst="rect">
-            <a:avLst/>
-          </a:prstGeom>
-          <a:noFill/>
-        </p:spPr>
-        <p:txBody>
-          <a:bodyPr wrap="square">
-            <a:spAutoFit/>
-          </a:bodyPr>
-          <a:lstStyle/>
-          <a:p>
-            <a:pPr algn="l"/>
-            <a:r>
-              <a:rPr sz="1500" b="0">
-                <a:solidFill>
-                  <a:srgbClr val="6B6B6B"/>
-                </a:solidFill>
-                <a:latin typeface="Calibri"/>
-              </a:rPr>
-              <a:t>Downstream tools can verify WHY each fact is in the graph, not just WHAT it claims.</a:t>
-            </a:r>
-          </a:p>
-        </p:txBody>
-      </p:sp>
-      <p:sp>
-        <p:nvSpPr>
-          <p:cNvPr id="9" name="TextBox 8"/>
+              <a:t>  “he”, “the company” resolved to the canonical entity</a:t>
+            </a:r>
+          </a:p>
+          <a:p>
+            <a:pPr algn="l">
+              <a:spcAft>
+                <a:spcPts val="800"/>
+              </a:spcAft>
+            </a:pPr>
+            <a:r>
+              <a:rPr sz="1700" b="1">
+                <a:solidFill>
+                  <a:srgbClr val="C9A227"/>
+                </a:solidFill>
+                <a:latin typeface="Calibri"/>
+              </a:rPr>
+              <a:t>•  </a:t>
+            </a:r>
+            <a:r>
+              <a:rPr sz="1700" b="1">
+                <a:solidFill>
+                  <a:srgbClr val="1F3A5F"/>
+                </a:solidFill>
+                <a:latin typeface="Calibri"/>
+              </a:rPr>
+              <a:t>UI</a:t>
+            </a:r>
+            <a:r>
+              <a:rPr sz="1700">
+                <a:solidFill>
+                  <a:srgbClr val="1A1A1A"/>
+                </a:solidFill>
+                <a:latin typeface="Calibri"/>
+              </a:rPr>
+              <a:t>  aliases shown as small grey pills in the side panel</a:t>
+            </a:r>
+          </a:p>
+        </p:txBody>
+      </p:sp>
+      <p:sp>
+        <p:nvSpPr>
+          <p:cNvPr id="10" name="TextBox 9"/>
           <p:cNvSpPr txBox="1"/>
           <p:nvPr/>
         </p:nvSpPr>
@@ -12456,7 +12390,7 @@
                 </a:solidFill>
                 <a:latin typeface="Calibri"/>
               </a:rPr>
-              <a:t>10 / 19</a:t>
+              <a:t>9 / 19</a:t>
             </a:r>
           </a:p>
         </p:txBody>
